--- a/report/presentation.pptx
+++ b/report/presentation.pptx
@@ -4,6 +4,9 @@
   <p:sldMasterIdLst>
     <p:sldMasterId id="2147483648" r:id="rId1"/>
   </p:sldMasterIdLst>
+  <p:notesMasterIdLst>
+    <p:notesMasterId r:id="rId17"/>
+  </p:notesMasterIdLst>
   <p:sldIdLst>
     <p:sldId id="256" r:id="rId2"/>
     <p:sldId id="257" r:id="rId3"/>
@@ -21,9 +24,6 @@
     <p:sldId id="269" r:id="rId15"/>
     <p:sldId id="270" r:id="rId16"/>
   </p:sldIdLst>
-  <p:notesMasterIdLst>
-    <p:notesMasterId r:id="rId17"/>
-  </p:notesMasterIdLst>
   <p:sldSz cx="12192000" cy="6858000"/>
   <p:notesSz cx="6858000" cy="12192000"/>
   <p:defaultTextStyle>
@@ -118,13 +118,268 @@
       </a:defRPr>
     </a:lvl9pPr>
   </p:defaultTextStyle>
+  <p:extLst>
+    <p:ext uri="{EFAFB233-063F-42B5-8137-9DF3F51BA10A}">
+      <p15:sldGuideLst xmlns:p15="http://schemas.microsoft.com/office/powerpoint/2012/main"/>
+    </p:ext>
+  </p:extLst>
 </p:presentation>
 </file>
 
+<file path=ppt/changesInfos/changesInfo1.xml><?xml version="1.0" encoding="utf-8"?>
+<pc:chgInfo xmlns:a="http://schemas.openxmlformats.org/drawingml/2006/main" xmlns:r="http://schemas.openxmlformats.org/officeDocument/2006/relationships" xmlns:ac="http://schemas.microsoft.com/office/drawing/2013/main/command" xmlns:pc="http://schemas.microsoft.com/office/powerpoint/2013/main/command">
+  <pc:docChgLst>
+    <pc:chgData name="q q" userId="119e59418752b933" providerId="LiveId" clId="{901C6388-DC03-458C-8BB2-C2734D609010}"/>
+    <pc:docChg chg="undo custSel modSld">
+      <pc:chgData name="q q" userId="119e59418752b933" providerId="LiveId" clId="{901C6388-DC03-458C-8BB2-C2734D609010}" dt="2026-10-01T13:00:06.364" v="37" actId="478"/>
+      <pc:docMkLst>
+        <pc:docMk/>
+      </pc:docMkLst>
+      <pc:sldChg chg="delSp modSp mod">
+        <pc:chgData name="q q" userId="119e59418752b933" providerId="LiveId" clId="{901C6388-DC03-458C-8BB2-C2734D609010}" dt="2026-10-01T12:59:41.351" v="25" actId="478"/>
+        <pc:sldMkLst>
+          <pc:docMk/>
+          <pc:sldMk cId="0" sldId="257"/>
+        </pc:sldMkLst>
+        <pc:spChg chg="del mod">
+          <ac:chgData name="q q" userId="119e59418752b933" providerId="LiveId" clId="{901C6388-DC03-458C-8BB2-C2734D609010}" dt="2026-10-01T12:59:41.351" v="25" actId="478"/>
+          <ac:spMkLst>
+            <pc:docMk/>
+            <pc:sldMk cId="0" sldId="257"/>
+            <ac:spMk id="6" creationId="{00000000-0000-0000-0000-000000000000}"/>
+          </ac:spMkLst>
+        </pc:spChg>
+        <pc:spChg chg="mod">
+          <ac:chgData name="q q" userId="119e59418752b933" providerId="LiveId" clId="{901C6388-DC03-458C-8BB2-C2734D609010}" dt="2026-10-01T12:58:50.968" v="6" actId="1076"/>
+          <ac:spMkLst>
+            <pc:docMk/>
+            <pc:sldMk cId="0" sldId="257"/>
+            <ac:spMk id="8" creationId="{00000000-0000-0000-0000-000000000000}"/>
+          </ac:spMkLst>
+        </pc:spChg>
+      </pc:sldChg>
+      <pc:sldChg chg="delSp modSp mod">
+        <pc:chgData name="q q" userId="119e59418752b933" providerId="LiveId" clId="{901C6388-DC03-458C-8BB2-C2734D609010}" dt="2026-10-01T12:59:43.177" v="26" actId="478"/>
+        <pc:sldMkLst>
+          <pc:docMk/>
+          <pc:sldMk cId="0" sldId="258"/>
+        </pc:sldMkLst>
+        <pc:spChg chg="del mod">
+          <ac:chgData name="q q" userId="119e59418752b933" providerId="LiveId" clId="{901C6388-DC03-458C-8BB2-C2734D609010}" dt="2026-10-01T12:59:43.177" v="26" actId="478"/>
+          <ac:spMkLst>
+            <pc:docMk/>
+            <pc:sldMk cId="0" sldId="258"/>
+            <ac:spMk id="6" creationId="{00000000-0000-0000-0000-000000000000}"/>
+          </ac:spMkLst>
+        </pc:spChg>
+      </pc:sldChg>
+      <pc:sldChg chg="delSp modSp mod">
+        <pc:chgData name="q q" userId="119e59418752b933" providerId="LiveId" clId="{901C6388-DC03-458C-8BB2-C2734D609010}" dt="2026-10-01T12:59:44.954" v="27" actId="478"/>
+        <pc:sldMkLst>
+          <pc:docMk/>
+          <pc:sldMk cId="0" sldId="259"/>
+        </pc:sldMkLst>
+        <pc:spChg chg="del mod">
+          <ac:chgData name="q q" userId="119e59418752b933" providerId="LiveId" clId="{901C6388-DC03-458C-8BB2-C2734D609010}" dt="2026-10-01T12:59:44.954" v="27" actId="478"/>
+          <ac:spMkLst>
+            <pc:docMk/>
+            <pc:sldMk cId="0" sldId="259"/>
+            <ac:spMk id="6" creationId="{00000000-0000-0000-0000-000000000000}"/>
+          </ac:spMkLst>
+        </pc:spChg>
+      </pc:sldChg>
+      <pc:sldChg chg="delSp mod">
+        <pc:chgData name="q q" userId="119e59418752b933" providerId="LiveId" clId="{901C6388-DC03-458C-8BB2-C2734D609010}" dt="2026-10-01T12:59:47.056" v="28" actId="478"/>
+        <pc:sldMkLst>
+          <pc:docMk/>
+          <pc:sldMk cId="0" sldId="260"/>
+        </pc:sldMkLst>
+        <pc:spChg chg="del">
+          <ac:chgData name="q q" userId="119e59418752b933" providerId="LiveId" clId="{901C6388-DC03-458C-8BB2-C2734D609010}" dt="2026-10-01T12:59:47.056" v="28" actId="478"/>
+          <ac:spMkLst>
+            <pc:docMk/>
+            <pc:sldMk cId="0" sldId="260"/>
+            <ac:spMk id="6" creationId="{00000000-0000-0000-0000-000000000000}"/>
+          </ac:spMkLst>
+        </pc:spChg>
+      </pc:sldChg>
+      <pc:sldChg chg="delSp mod">
+        <pc:chgData name="q q" userId="119e59418752b933" providerId="LiveId" clId="{901C6388-DC03-458C-8BB2-C2734D609010}" dt="2026-10-01T12:59:50.192" v="29" actId="478"/>
+        <pc:sldMkLst>
+          <pc:docMk/>
+          <pc:sldMk cId="0" sldId="261"/>
+        </pc:sldMkLst>
+        <pc:spChg chg="del">
+          <ac:chgData name="q q" userId="119e59418752b933" providerId="LiveId" clId="{901C6388-DC03-458C-8BB2-C2734D609010}" dt="2026-10-01T12:59:50.192" v="29" actId="478"/>
+          <ac:spMkLst>
+            <pc:docMk/>
+            <pc:sldMk cId="0" sldId="261"/>
+            <ac:spMk id="6" creationId="{00000000-0000-0000-0000-000000000000}"/>
+          </ac:spMkLst>
+        </pc:spChg>
+      </pc:sldChg>
+      <pc:sldChg chg="delSp modSp mod">
+        <pc:chgData name="q q" userId="119e59418752b933" providerId="LiveId" clId="{901C6388-DC03-458C-8BB2-C2734D609010}" dt="2026-10-01T12:59:37.556" v="24" actId="478"/>
+        <pc:sldMkLst>
+          <pc:docMk/>
+          <pc:sldMk cId="0" sldId="262"/>
+        </pc:sldMkLst>
+        <pc:spChg chg="del mod">
+          <ac:chgData name="q q" userId="119e59418752b933" providerId="LiveId" clId="{901C6388-DC03-458C-8BB2-C2734D609010}" dt="2026-10-01T12:59:37.556" v="24" actId="478"/>
+          <ac:spMkLst>
+            <pc:docMk/>
+            <pc:sldMk cId="0" sldId="262"/>
+            <ac:spMk id="6" creationId="{00000000-0000-0000-0000-000000000000}"/>
+          </ac:spMkLst>
+        </pc:spChg>
+        <pc:spChg chg="mod">
+          <ac:chgData name="q q" userId="119e59418752b933" providerId="LiveId" clId="{901C6388-DC03-458C-8BB2-C2734D609010}" dt="2026-10-01T12:58:51.490" v="7" actId="1076"/>
+          <ac:spMkLst>
+            <pc:docMk/>
+            <pc:sldMk cId="0" sldId="262"/>
+            <ac:spMk id="8" creationId="{00000000-0000-0000-0000-000000000000}"/>
+          </ac:spMkLst>
+        </pc:spChg>
+      </pc:sldChg>
+      <pc:sldChg chg="delSp mod">
+        <pc:chgData name="q q" userId="119e59418752b933" providerId="LiveId" clId="{901C6388-DC03-458C-8BB2-C2734D609010}" dt="2026-10-01T12:59:53.203" v="30" actId="478"/>
+        <pc:sldMkLst>
+          <pc:docMk/>
+          <pc:sldMk cId="0" sldId="263"/>
+        </pc:sldMkLst>
+        <pc:spChg chg="del">
+          <ac:chgData name="q q" userId="119e59418752b933" providerId="LiveId" clId="{901C6388-DC03-458C-8BB2-C2734D609010}" dt="2026-10-01T12:59:53.203" v="30" actId="478"/>
+          <ac:spMkLst>
+            <pc:docMk/>
+            <pc:sldMk cId="0" sldId="263"/>
+            <ac:spMk id="6" creationId="{00000000-0000-0000-0000-000000000000}"/>
+          </ac:spMkLst>
+        </pc:spChg>
+      </pc:sldChg>
+      <pc:sldChg chg="delSp mod">
+        <pc:chgData name="q q" userId="119e59418752b933" providerId="LiveId" clId="{901C6388-DC03-458C-8BB2-C2734D609010}" dt="2026-10-01T12:59:55.289" v="31" actId="478"/>
+        <pc:sldMkLst>
+          <pc:docMk/>
+          <pc:sldMk cId="0" sldId="264"/>
+        </pc:sldMkLst>
+        <pc:spChg chg="del">
+          <ac:chgData name="q q" userId="119e59418752b933" providerId="LiveId" clId="{901C6388-DC03-458C-8BB2-C2734D609010}" dt="2026-10-01T12:59:55.289" v="31" actId="478"/>
+          <ac:spMkLst>
+            <pc:docMk/>
+            <pc:sldMk cId="0" sldId="264"/>
+            <ac:spMk id="6" creationId="{00000000-0000-0000-0000-000000000000}"/>
+          </ac:spMkLst>
+        </pc:spChg>
+      </pc:sldChg>
+      <pc:sldChg chg="delSp mod">
+        <pc:chgData name="q q" userId="119e59418752b933" providerId="LiveId" clId="{901C6388-DC03-458C-8BB2-C2734D609010}" dt="2026-10-01T12:59:56.891" v="32" actId="478"/>
+        <pc:sldMkLst>
+          <pc:docMk/>
+          <pc:sldMk cId="0" sldId="265"/>
+        </pc:sldMkLst>
+        <pc:spChg chg="del">
+          <ac:chgData name="q q" userId="119e59418752b933" providerId="LiveId" clId="{901C6388-DC03-458C-8BB2-C2734D609010}" dt="2026-10-01T12:59:56.891" v="32" actId="478"/>
+          <ac:spMkLst>
+            <pc:docMk/>
+            <pc:sldMk cId="0" sldId="265"/>
+            <ac:spMk id="6" creationId="{00000000-0000-0000-0000-000000000000}"/>
+          </ac:spMkLst>
+        </pc:spChg>
+      </pc:sldChg>
+      <pc:sldChg chg="delSp mod">
+        <pc:chgData name="q q" userId="119e59418752b933" providerId="LiveId" clId="{901C6388-DC03-458C-8BB2-C2734D609010}" dt="2026-10-01T12:59:58.684" v="33" actId="478"/>
+        <pc:sldMkLst>
+          <pc:docMk/>
+          <pc:sldMk cId="0" sldId="266"/>
+        </pc:sldMkLst>
+        <pc:spChg chg="del">
+          <ac:chgData name="q q" userId="119e59418752b933" providerId="LiveId" clId="{901C6388-DC03-458C-8BB2-C2734D609010}" dt="2026-10-01T12:59:58.684" v="33" actId="478"/>
+          <ac:spMkLst>
+            <pc:docMk/>
+            <pc:sldMk cId="0" sldId="266"/>
+            <ac:spMk id="6" creationId="{00000000-0000-0000-0000-000000000000}"/>
+          </ac:spMkLst>
+        </pc:spChg>
+      </pc:sldChg>
+      <pc:sldChg chg="delSp mod">
+        <pc:chgData name="q q" userId="119e59418752b933" providerId="LiveId" clId="{901C6388-DC03-458C-8BB2-C2734D609010}" dt="2026-10-01T13:00:00.545" v="34" actId="478"/>
+        <pc:sldMkLst>
+          <pc:docMk/>
+          <pc:sldMk cId="0" sldId="267"/>
+        </pc:sldMkLst>
+        <pc:spChg chg="del">
+          <ac:chgData name="q q" userId="119e59418752b933" providerId="LiveId" clId="{901C6388-DC03-458C-8BB2-C2734D609010}" dt="2026-10-01T13:00:00.545" v="34" actId="478"/>
+          <ac:spMkLst>
+            <pc:docMk/>
+            <pc:sldMk cId="0" sldId="267"/>
+            <ac:spMk id="6" creationId="{00000000-0000-0000-0000-000000000000}"/>
+          </ac:spMkLst>
+        </pc:spChg>
+      </pc:sldChg>
+      <pc:sldChg chg="delSp mod">
+        <pc:chgData name="q q" userId="119e59418752b933" providerId="LiveId" clId="{901C6388-DC03-458C-8BB2-C2734D609010}" dt="2026-10-01T13:00:02.739" v="35" actId="478"/>
+        <pc:sldMkLst>
+          <pc:docMk/>
+          <pc:sldMk cId="0" sldId="268"/>
+        </pc:sldMkLst>
+        <pc:spChg chg="del">
+          <ac:chgData name="q q" userId="119e59418752b933" providerId="LiveId" clId="{901C6388-DC03-458C-8BB2-C2734D609010}" dt="2026-10-01T13:00:02.739" v="35" actId="478"/>
+          <ac:spMkLst>
+            <pc:docMk/>
+            <pc:sldMk cId="0" sldId="268"/>
+            <ac:spMk id="6" creationId="{00000000-0000-0000-0000-000000000000}"/>
+          </ac:spMkLst>
+        </pc:spChg>
+      </pc:sldChg>
+      <pc:sldChg chg="delSp mod">
+        <pc:chgData name="q q" userId="119e59418752b933" providerId="LiveId" clId="{901C6388-DC03-458C-8BB2-C2734D609010}" dt="2026-10-01T13:00:04.679" v="36" actId="478"/>
+        <pc:sldMkLst>
+          <pc:docMk/>
+          <pc:sldMk cId="0" sldId="269"/>
+        </pc:sldMkLst>
+        <pc:spChg chg="del">
+          <ac:chgData name="q q" userId="119e59418752b933" providerId="LiveId" clId="{901C6388-DC03-458C-8BB2-C2734D609010}" dt="2026-10-01T13:00:04.679" v="36" actId="478"/>
+          <ac:spMkLst>
+            <pc:docMk/>
+            <pc:sldMk cId="0" sldId="269"/>
+            <ac:spMk id="6" creationId="{00000000-0000-0000-0000-000000000000}"/>
+          </ac:spMkLst>
+        </pc:spChg>
+      </pc:sldChg>
+      <pc:sldChg chg="delSp modSp mod">
+        <pc:chgData name="q q" userId="119e59418752b933" providerId="LiveId" clId="{901C6388-DC03-458C-8BB2-C2734D609010}" dt="2026-10-01T13:00:06.364" v="37" actId="478"/>
+        <pc:sldMkLst>
+          <pc:docMk/>
+          <pc:sldMk cId="0" sldId="270"/>
+        </pc:sldMkLst>
+        <pc:spChg chg="del mod">
+          <ac:chgData name="q q" userId="119e59418752b933" providerId="LiveId" clId="{901C6388-DC03-458C-8BB2-C2734D609010}" dt="2026-10-01T13:00:06.364" v="37" actId="478"/>
+          <ac:spMkLst>
+            <pc:docMk/>
+            <pc:sldMk cId="0" sldId="270"/>
+            <ac:spMk id="6" creationId="{00000000-0000-0000-0000-000000000000}"/>
+          </ac:spMkLst>
+        </pc:spChg>
+        <pc:spChg chg="mod">
+          <ac:chgData name="q q" userId="119e59418752b933" providerId="LiveId" clId="{901C6388-DC03-458C-8BB2-C2734D609010}" dt="2026-10-01T12:59:34.878" v="17" actId="1076"/>
+          <ac:spMkLst>
+            <pc:docMk/>
+            <pc:sldMk cId="0" sldId="270"/>
+            <ac:spMk id="8" creationId="{00000000-0000-0000-0000-000000000000}"/>
+          </ac:spMkLst>
+        </pc:spChg>
+      </pc:sldChg>
+    </pc:docChg>
+  </pc:docChgLst>
+</pc:chgInfo>
+</file>
+
 <file path=ppt/charts/chart1.xml><?xml version="1.0" encoding="utf-8"?>
-<c:chartSpace xmlns:c="http://schemas.openxmlformats.org/drawingml/2006/chart" xmlns:a="http://schemas.openxmlformats.org/drawingml/2006/main" xmlns:r="http://schemas.openxmlformats.org/officeDocument/2006/relationships">
+<c:chartSpace xmlns:c="http://schemas.openxmlformats.org/drawingml/2006/chart" xmlns:a="http://schemas.openxmlformats.org/drawingml/2006/main" xmlns:r="http://schemas.openxmlformats.org/officeDocument/2006/relationships" xmlns:c16r2="http://schemas.microsoft.com/office/drawing/2015/06/chart">
   <c:date1904 val="0"/>
+  <c:lang val="ru-RU"/>
   <c:roundedCorners val="1"/>
+  <c:style val="2"/>
   <c:chart>
     <c:title>
       <c:tx>
@@ -141,7 +396,7 @@
               </a:defRPr>
             </a:pPr>
             <a:r>
-              <a:rPr sz="1200" b="0" i="0" u="none" strike="noStrike">
+              <a:rPr lang="en-US" sz="1200" b="0" i="0" u="none" strike="noStrike">
                 <a:solidFill>
                   <a:srgbClr val="111111"/>
                 </a:solidFill>
@@ -152,7 +407,6 @@
           </a:p>
         </c:rich>
       </c:tx>
-      <c:layout/>
       <c:overlay val="0"/>
     </c:title>
     <c:autoTitleDeleted val="0"/>
@@ -185,18 +439,26 @@
           <c:invertIfNegative val="0"/>
           <c:dLbls>
             <c:numFmt formatCode="0.0#" sourceLinked="0"/>
+            <c:spPr>
+              <a:noFill/>
+              <a:ln>
+                <a:noFill/>
+              </a:ln>
+              <a:effectLst/>
+            </c:spPr>
             <c:txPr>
               <a:bodyPr/>
               <a:lstStyle/>
               <a:p>
                 <a:pPr>
-                  <a:defRPr b="0" i="0" strike="noStrike" sz="800" u="none">
+                  <a:defRPr sz="800" b="0" i="0" u="none" strike="noStrike">
                     <a:solidFill>
                       <a:srgbClr val="111111"/>
                     </a:solidFill>
                     <a:latin typeface="Arial"/>
                   </a:defRPr>
                 </a:pPr>
+                <a:endParaRPr lang="ru-KZ"/>
               </a:p>
             </c:txPr>
             <c:showLegendKey val="0"/>
@@ -206,40 +468,43 @@
             <c:showPercent val="0"/>
             <c:showBubbleSize val="0"/>
             <c:showLeaderLines val="0"/>
+            <c:extLst>
+              <c:ext xmlns:c15="http://schemas.microsoft.com/office/drawing/2012/chart" uri="{CE6537A1-D6FC-4f65-9D91-7224C49458BB}">
+                <c15:showLeaderLines val="0"/>
+              </c:ext>
+            </c:extLst>
           </c:dLbls>
           <c:cat>
-            <c:multiLvlStrRef>
+            <c:strRef>
               <c:f>Sheet1!$A$2:$A$9</c:f>
-              <c:multiLvlStrCache>
+              <c:strCache>
                 <c:ptCount val="8"/>
-                <c:lvl>
-                  <c:pt idx="0">
-                    <c:v>gzip -6</c:v>
-                  </c:pt>
-                  <c:pt idx="1">
-                    <c:v>pigz -9</c:v>
-                  </c:pt>
-                  <c:pt idx="2">
-                    <c:v>bzip2 -9</c:v>
-                  </c:pt>
-                  <c:pt idx="3">
-                    <c:v>xz -6</c:v>
-                  </c:pt>
-                  <c:pt idx="4">
-                    <c:v>zstd -3</c:v>
-                  </c:pt>
-                  <c:pt idx="5">
-                    <c:v>zstd -19</c:v>
-                  </c:pt>
-                  <c:pt idx="6">
-                    <c:v>zstd -19 long</c:v>
-                  </c:pt>
-                  <c:pt idx="7">
-                    <c:v>Spring</c:v>
-                  </c:pt>
-                </c:lvl>
-              </c:multiLvlStrCache>
-            </c:multiLvlStrRef>
+                <c:pt idx="0">
+                  <c:v>gzip -6</c:v>
+                </c:pt>
+                <c:pt idx="1">
+                  <c:v>pigz -9</c:v>
+                </c:pt>
+                <c:pt idx="2">
+                  <c:v>bzip2 -9</c:v>
+                </c:pt>
+                <c:pt idx="3">
+                  <c:v>xz -6</c:v>
+                </c:pt>
+                <c:pt idx="4">
+                  <c:v>zstd -3</c:v>
+                </c:pt>
+                <c:pt idx="5">
+                  <c:v>zstd -19</c:v>
+                </c:pt>
+                <c:pt idx="6">
+                  <c:v>zstd -19 long</c:v>
+                </c:pt>
+                <c:pt idx="7">
+                  <c:v>Spring</c:v>
+                </c:pt>
+              </c:strCache>
+            </c:strRef>
           </c:cat>
           <c:val>
             <c:numRef>
@@ -260,7 +525,7 @@
                   <c:v>2.84</c:v>
                 </c:pt>
                 <c:pt idx="4">
-                  <c:v>4.36</c:v>
+                  <c:v>4.3600000000000003</c:v>
                 </c:pt>
                 <c:pt idx="5">
                   <c:v>2.82</c:v>
@@ -274,6 +539,11 @@
               </c:numCache>
             </c:numRef>
           </c:val>
+          <c:extLst>
+            <c:ext xmlns:c16="http://schemas.microsoft.com/office/drawing/2014/chart" uri="{C3380CC4-5D6E-409C-BE32-E72D297353CC}">
+              <c16:uniqueId val="{00000000-013F-4246-9FC7-ADA2A5FB14C9}"/>
+            </c:ext>
+          </c:extLst>
         </c:ser>
         <c:ser>
           <c:idx val="1"/>
@@ -298,18 +568,26 @@
           <c:invertIfNegative val="0"/>
           <c:dLbls>
             <c:numFmt formatCode="0.0#" sourceLinked="0"/>
+            <c:spPr>
+              <a:noFill/>
+              <a:ln>
+                <a:noFill/>
+              </a:ln>
+              <a:effectLst/>
+            </c:spPr>
             <c:txPr>
               <a:bodyPr/>
               <a:lstStyle/>
               <a:p>
                 <a:pPr>
-                  <a:defRPr b="0" i="0" strike="noStrike" sz="800" u="none">
+                  <a:defRPr sz="800" b="0" i="0" u="none" strike="noStrike">
                     <a:solidFill>
                       <a:srgbClr val="111111"/>
                     </a:solidFill>
                     <a:latin typeface="Arial"/>
                   </a:defRPr>
                 </a:pPr>
+                <a:endParaRPr lang="ru-KZ"/>
               </a:p>
             </c:txPr>
             <c:showLegendKey val="0"/>
@@ -319,40 +597,43 @@
             <c:showPercent val="0"/>
             <c:showBubbleSize val="0"/>
             <c:showLeaderLines val="0"/>
+            <c:extLst>
+              <c:ext xmlns:c15="http://schemas.microsoft.com/office/drawing/2012/chart" uri="{CE6537A1-D6FC-4f65-9D91-7224C49458BB}">
+                <c15:showLeaderLines val="0"/>
+              </c:ext>
+            </c:extLst>
           </c:dLbls>
           <c:cat>
-            <c:multiLvlStrRef>
+            <c:strRef>
               <c:f>Sheet1!$A$2:$A$9</c:f>
-              <c:multiLvlStrCache>
+              <c:strCache>
                 <c:ptCount val="8"/>
-                <c:lvl>
-                  <c:pt idx="0">
-                    <c:v>gzip -6</c:v>
-                  </c:pt>
-                  <c:pt idx="1">
-                    <c:v>pigz -9</c:v>
-                  </c:pt>
-                  <c:pt idx="2">
-                    <c:v>bzip2 -9</c:v>
-                  </c:pt>
-                  <c:pt idx="3">
-                    <c:v>xz -6</c:v>
-                  </c:pt>
-                  <c:pt idx="4">
-                    <c:v>zstd -3</c:v>
-                  </c:pt>
-                  <c:pt idx="5">
-                    <c:v>zstd -19</c:v>
-                  </c:pt>
-                  <c:pt idx="6">
-                    <c:v>zstd -19 long</c:v>
-                  </c:pt>
-                  <c:pt idx="7">
-                    <c:v>Spring</c:v>
-                  </c:pt>
-                </c:lvl>
-              </c:multiLvlStrCache>
-            </c:multiLvlStrRef>
+                <c:pt idx="0">
+                  <c:v>gzip -6</c:v>
+                </c:pt>
+                <c:pt idx="1">
+                  <c:v>pigz -9</c:v>
+                </c:pt>
+                <c:pt idx="2">
+                  <c:v>bzip2 -9</c:v>
+                </c:pt>
+                <c:pt idx="3">
+                  <c:v>xz -6</c:v>
+                </c:pt>
+                <c:pt idx="4">
+                  <c:v>zstd -3</c:v>
+                </c:pt>
+                <c:pt idx="5">
+                  <c:v>zstd -19</c:v>
+                </c:pt>
+                <c:pt idx="6">
+                  <c:v>zstd -19 long</c:v>
+                </c:pt>
+                <c:pt idx="7">
+                  <c:v>Spring</c:v>
+                </c:pt>
+              </c:strCache>
+            </c:strRef>
           </c:cat>
           <c:val>
             <c:numRef>
@@ -387,36 +668,23 @@
               </c:numCache>
             </c:numRef>
           </c:val>
+          <c:extLst>
+            <c:ext xmlns:c16="http://schemas.microsoft.com/office/drawing/2014/chart" uri="{C3380CC4-5D6E-409C-BE32-E72D297353CC}">
+              <c16:uniqueId val="{00000001-013F-4246-9FC7-ADA2A5FB14C9}"/>
+            </c:ext>
+          </c:extLst>
         </c:ser>
         <c:dLbls>
-          <c:numFmt formatCode="0.0#" sourceLinked="0"/>
-          <c:txPr>
-            <a:bodyPr/>
-            <a:lstStyle/>
-            <a:p>
-              <a:pPr>
-                <a:defRPr b="0" i="0" strike="noStrike" sz="800" u="none">
-                  <a:solidFill>
-                    <a:srgbClr val="111111"/>
-                  </a:solidFill>
-                  <a:latin typeface="Arial"/>
-                </a:defRPr>
-              </a:pPr>
-            </a:p>
-          </c:txPr>
           <c:showLegendKey val="0"/>
           <c:showVal val="1"/>
           <c:showCatName val="0"/>
           <c:showSerName val="0"/>
           <c:showPercent val="0"/>
           <c:showBubbleSize val="0"/>
-          <c:showLeaderLines val="0"/>
         </c:dLbls>
         <c:gapWidth val="150"/>
-        <c:overlap val="0"/>
         <c:axId val="2094734554"/>
         <c:axId val="2094734552"/>
-        <c:axId val="2094734556"/>
       </c:barChart>
       <c:catAx>
         <c:axId val="2094734554"/>
@@ -450,13 +718,14 @@
                 <a:latin typeface="Arial"/>
               </a:defRPr>
             </a:pPr>
-            <a:endParaRPr lang="en-US"/>
+            <a:endParaRPr lang="ru-KZ"/>
           </a:p>
         </c:txPr>
         <c:crossAx val="2094734552"/>
         <c:crosses val="autoZero"/>
         <c:auto val="1"/>
         <c:lblAlgn val="ctr"/>
+        <c:lblOffset val="100"/>
         <c:noMultiLvlLbl val="1"/>
       </c:catAx>
       <c:valAx>
@@ -503,7 +772,7 @@
                 <a:latin typeface="Arial"/>
               </a:defRPr>
             </a:pPr>
-            <a:endParaRPr lang="en-US"/>
+            <a:endParaRPr lang="ru-KZ"/>
           </a:p>
         </c:txPr>
         <c:crossAx val="2094734554"/>
@@ -531,12 +800,13 @@
               <a:cs typeface="Arial"/>
             </a:defRPr>
           </a:pPr>
-          <a:endParaRPr lang="en-US"/>
+          <a:endParaRPr lang="ru-KZ"/>
         </a:p>
       </c:txPr>
     </c:legend>
     <c:plotVisOnly val="1"/>
     <c:dispBlanksAs val="span"/>
+    <c:showDLblsOverMax val="1"/>
   </c:chart>
   <c:spPr>
     <a:noFill/>
@@ -552,9 +822,11 @@
 </file>
 
 <file path=ppt/charts/chart2.xml><?xml version="1.0" encoding="utf-8"?>
-<c:chartSpace xmlns:c="http://schemas.openxmlformats.org/drawingml/2006/chart" xmlns:a="http://schemas.openxmlformats.org/drawingml/2006/main" xmlns:r="http://schemas.openxmlformats.org/officeDocument/2006/relationships">
+<c:chartSpace xmlns:c="http://schemas.openxmlformats.org/drawingml/2006/chart" xmlns:a="http://schemas.openxmlformats.org/drawingml/2006/main" xmlns:r="http://schemas.openxmlformats.org/officeDocument/2006/relationships" xmlns:c16r2="http://schemas.microsoft.com/office/drawing/2015/06/chart">
   <c:date1904 val="0"/>
+  <c:lang val="ru-RU"/>
   <c:roundedCorners val="1"/>
+  <c:style val="2"/>
   <c:chart>
     <c:title>
       <c:tx>
@@ -571,7 +843,7 @@
               </a:defRPr>
             </a:pPr>
             <a:r>
-              <a:rPr sz="1200" b="0" i="0" u="none" strike="noStrike">
+              <a:rPr lang="en-US" sz="1200" b="0" i="0" u="none" strike="noStrike">
                 <a:solidFill>
                   <a:srgbClr val="111111"/>
                 </a:solidFill>
@@ -582,7 +854,6 @@
           </a:p>
         </c:rich>
       </c:tx>
-      <c:layout/>
       <c:overlay val="0"/>
     </c:title>
     <c:autoTitleDeleted val="0"/>
@@ -615,18 +886,26 @@
           <c:invertIfNegative val="0"/>
           <c:dLbls>
             <c:numFmt formatCode="0.0&quot;%&quot;" sourceLinked="0"/>
+            <c:spPr>
+              <a:noFill/>
+              <a:ln>
+                <a:noFill/>
+              </a:ln>
+              <a:effectLst/>
+            </c:spPr>
             <c:txPr>
               <a:bodyPr/>
               <a:lstStyle/>
               <a:p>
                 <a:pPr>
-                  <a:defRPr b="0" i="0" strike="noStrike" sz="1000" u="none">
+                  <a:defRPr sz="1000" b="0" i="0" u="none" strike="noStrike">
                     <a:solidFill>
                       <a:srgbClr val="111111"/>
                     </a:solidFill>
                     <a:latin typeface="Arial"/>
                   </a:defRPr>
                 </a:pPr>
+                <a:endParaRPr lang="ru-KZ"/>
               </a:p>
             </c:txPr>
             <c:showLegendKey val="0"/>
@@ -636,31 +915,34 @@
             <c:showPercent val="0"/>
             <c:showBubbleSize val="0"/>
             <c:showLeaderLines val="0"/>
+            <c:extLst>
+              <c:ext xmlns:c15="http://schemas.microsoft.com/office/drawing/2012/chart" uri="{CE6537A1-D6FC-4f65-9D91-7224C49458BB}">
+                <c15:showLeaderLines val="0"/>
+              </c:ext>
+            </c:extLst>
           </c:dLbls>
           <c:cat>
-            <c:multiLvlStrRef>
+            <c:strRef>
               <c:f>Sheet1!$A$2:$A$6</c:f>
-              <c:multiLvlStrCache>
+              <c:strCache>
                 <c:ptCount val="5"/>
-                <c:lvl>
-                  <c:pt idx="0">
-                    <c:v>Age rule: hot 2 yr, then Deep Archive</c:v>
-                  </c:pt>
-                  <c:pt idx="1">
-                    <c:v>All Glacier Instant Retrieval</c:v>
-                  </c:pt>
-                  <c:pt idx="2">
-                    <c:v>Model: Deep Archive if p&lt;0.61</c:v>
-                  </c:pt>
-                  <c:pt idx="3">
-                    <c:v>Oracle (knows the future)</c:v>
-                  </c:pt>
-                  <c:pt idx="4">
-                    <c:v>All Deep Archive</c:v>
-                  </c:pt>
-                </c:lvl>
-              </c:multiLvlStrCache>
-            </c:multiLvlStrRef>
+                <c:pt idx="0">
+                  <c:v>Age rule: hot 2 yr, then Deep Archive</c:v>
+                </c:pt>
+                <c:pt idx="1">
+                  <c:v>All Glacier Instant Retrieval</c:v>
+                </c:pt>
+                <c:pt idx="2">
+                  <c:v>Model: Deep Archive if p&lt;0.61</c:v>
+                </c:pt>
+                <c:pt idx="3">
+                  <c:v>Oracle (knows the future)</c:v>
+                </c:pt>
+                <c:pt idx="4">
+                  <c:v>All Deep Archive</c:v>
+                </c:pt>
+              </c:strCache>
+            </c:strRef>
           </c:cat>
           <c:val>
             <c:numRef>
@@ -686,36 +968,23 @@
               </c:numCache>
             </c:numRef>
           </c:val>
+          <c:extLst>
+            <c:ext xmlns:c16="http://schemas.microsoft.com/office/drawing/2014/chart" uri="{C3380CC4-5D6E-409C-BE32-E72D297353CC}">
+              <c16:uniqueId val="{00000000-B0D3-4E85-9C50-F1A55090FA34}"/>
+            </c:ext>
+          </c:extLst>
         </c:ser>
         <c:dLbls>
-          <c:numFmt formatCode="0.0&quot;%&quot;" sourceLinked="0"/>
-          <c:txPr>
-            <a:bodyPr/>
-            <a:lstStyle/>
-            <a:p>
-              <a:pPr>
-                <a:defRPr b="0" i="0" strike="noStrike" sz="1000" u="none">
-                  <a:solidFill>
-                    <a:srgbClr val="111111"/>
-                  </a:solidFill>
-                  <a:latin typeface="Arial"/>
-                </a:defRPr>
-              </a:pPr>
-            </a:p>
-          </c:txPr>
           <c:showLegendKey val="0"/>
           <c:showVal val="1"/>
           <c:showCatName val="0"/>
           <c:showSerName val="0"/>
           <c:showPercent val="0"/>
           <c:showBubbleSize val="0"/>
-          <c:showLeaderLines val="0"/>
         </c:dLbls>
         <c:gapWidth val="150"/>
-        <c:overlap val="0"/>
         <c:axId val="2094734554"/>
         <c:axId val="2094734552"/>
-        <c:axId val="2094734556"/>
       </c:barChart>
       <c:catAx>
         <c:axId val="2094734554"/>
@@ -749,13 +1018,14 @@
                 <a:latin typeface="Arial"/>
               </a:defRPr>
             </a:pPr>
-            <a:endParaRPr lang="en-US"/>
+            <a:endParaRPr lang="ru-KZ"/>
           </a:p>
         </c:txPr>
         <c:crossAx val="2094734552"/>
         <c:crosses val="autoZero"/>
         <c:auto val="1"/>
         <c:lblAlgn val="ctr"/>
+        <c:lblOffset val="100"/>
         <c:noMultiLvlLbl val="1"/>
       </c:catAx>
       <c:valAx>
@@ -766,7 +1036,7 @@
           <c:min val="0"/>
         </c:scaling>
         <c:delete val="0"/>
-        <c:axPos val="b"/>
+        <c:axPos val="t"/>
         <c:majorGridlines>
           <c:spPr>
             <a:ln w="9525" cap="flat">
@@ -803,7 +1073,7 @@
                 <a:latin typeface="Arial"/>
               </a:defRPr>
             </a:pPr>
-            <a:endParaRPr lang="en-US"/>
+            <a:endParaRPr lang="ru-KZ"/>
           </a:p>
         </c:txPr>
         <c:crossAx val="2094734554"/>
@@ -820,6 +1090,7 @@
     </c:plotArea>
     <c:plotVisOnly val="1"/>
     <c:dispBlanksAs val="span"/>
+    <c:showDLblsOverMax val="1"/>
   </c:chart>
   <c:spPr>
     <a:noFill/>
@@ -856,234 +1127,10 @@
           <a:chExt cx="0" cy="0"/>
         </a:xfrm>
       </p:grpSpPr>
-      <p:sp>
-        <p:nvSpPr>
-          <p:cNvPr id="2" name="Header Placeholder 1"/>
-          <p:cNvSpPr>
-            <a:spLocks noGrp="1"/>
-          </p:cNvSpPr>
-          <p:nvPr>
-            <p:ph type="hdr" sz="quarter"/>
-          </p:nvPr>
-        </p:nvSpPr>
-        <p:spPr>
-          <a:xfrm>
-            <a:off x="0" y="0"/>
-            <a:ext cx="2971800" cy="458788"/>
-          </a:xfrm>
-          <a:prstGeom prst="rect">
-            <a:avLst/>
-          </a:prstGeom>
-        </p:spPr>
-        <p:txBody>
-          <a:bodyPr vert="horz" lIns="91440" tIns="45720" rIns="91440" bIns="45720" rtlCol="0"/>
-          <a:lstStyle>
-            <a:lvl1pPr algn="l">
-              <a:defRPr sz="1200"/>
-            </a:lvl1pPr>
-          </a:lstStyle>
-          <a:p>
-            <a:endParaRPr lang="en-US"/>
-          </a:p>
-        </p:txBody>
-      </p:sp>
-      <p:sp>
-        <p:nvSpPr>
-          <p:cNvPr id="3" name="Date Placeholder 2"/>
-          <p:cNvSpPr>
-            <a:spLocks noGrp="1"/>
-          </p:cNvSpPr>
-          <p:nvPr>
-            <p:ph type="dt" idx="1"/>
-          </p:nvPr>
-        </p:nvSpPr>
-        <p:spPr>
-          <a:xfrm>
-            <a:off x="3884613" y="0"/>
-            <a:ext cx="2971800" cy="458788"/>
-          </a:xfrm>
-          <a:prstGeom prst="rect">
-            <a:avLst/>
-          </a:prstGeom>
-        </p:spPr>
-        <p:txBody>
-          <a:bodyPr vert="horz" lIns="91440" tIns="45720" rIns="91440" bIns="45720" rtlCol="0"/>
-          <a:lstStyle>
-            <a:lvl1pPr algn="r">
-              <a:defRPr sz="1200"/>
-            </a:lvl1pPr>
-          </a:lstStyle>
-          <a:p>
-            <a:fld id="{5282F153-3F37-0F45-9E97-73ACFA13230C}" type="datetimeFigureOut">
-              <a:rPr lang="en-US"/>
-              <a:t>7/23/19</a:t>
-            </a:fld>
-            <a:endParaRPr lang="en-US"/>
-          </a:p>
-        </p:txBody>
-      </p:sp>
-      <p:sp>
-        <p:nvSpPr>
-          <p:cNvPr id="4" name="Slide Image Placeholder 3"/>
-          <p:cNvSpPr>
-            <a:spLocks noGrp="1" noRot="1" noChangeAspect="1"/>
-          </p:cNvSpPr>
-          <p:nvPr>
-            <p:ph type="sldImg" idx="2"/>
-          </p:nvPr>
-        </p:nvSpPr>
-        <p:spPr>
-          <a:xfrm>
-            <a:off x="685800" y="1143000"/>
-            <a:ext cx="5486400" cy="3086100"/>
-          </a:xfrm>
-          <a:prstGeom prst="rect">
-            <a:avLst/>
-          </a:prstGeom>
-          <a:noFill/>
-          <a:ln w="12700">
-            <a:solidFill>
-              <a:prstClr val="black"/>
-            </a:solidFill>
-          </a:ln>
-        </p:spPr>
-        <p:txBody>
-          <a:bodyPr vert="horz" lIns="91440" tIns="45720" rIns="91440" bIns="45720" rtlCol="0" anchor="ctr"/>
-          <a:lstStyle/>
-          <a:p>
-            <a:endParaRPr lang="en-US"/>
-          </a:p>
-        </p:txBody>
-      </p:sp>
-      <p:sp>
-        <p:nvSpPr>
-          <p:cNvPr id="5" name="Notes Placeholder 4"/>
-          <p:cNvSpPr>
-            <a:spLocks noGrp="1"/>
-          </p:cNvSpPr>
-          <p:nvPr>
-            <p:ph type="body" sz="quarter" idx="3"/>
-          </p:nvPr>
-        </p:nvSpPr>
-        <p:spPr>
-          <a:xfrm>
-            <a:off x="685800" y="4400550"/>
-            <a:ext cx="5486400" cy="3600450"/>
-          </a:xfrm>
-          <a:prstGeom prst="rect">
-            <a:avLst/>
-          </a:prstGeom>
-        </p:spPr>
-        <p:txBody>
-          <a:bodyPr vert="horz" lIns="91440" tIns="45720" rIns="91440" bIns="45720" rtlCol="0"/>
-          <a:lstStyle/>
-          <a:p>
-            <a:pPr lvl="0"/>
-            <a:r>
-              <a:rPr lang="en-US"/>
-              <a:t>Click to edit Master text styles</a:t>
-            </a:r>
-          </a:p>
-          <a:p>
-            <a:pPr lvl="1"/>
-            <a:r>
-              <a:rPr lang="en-US"/>
-              <a:t>Second level</a:t>
-            </a:r>
-          </a:p>
-          <a:p>
-            <a:pPr lvl="2"/>
-            <a:r>
-              <a:rPr lang="en-US"/>
-              <a:t>Third level</a:t>
-            </a:r>
-          </a:p>
-          <a:p>
-            <a:pPr lvl="3"/>
-            <a:r>
-              <a:rPr lang="en-US"/>
-              <a:t>Fourth level</a:t>
-            </a:r>
-          </a:p>
-          <a:p>
-            <a:pPr lvl="4"/>
-            <a:r>
-              <a:rPr lang="en-US"/>
-              <a:t>Fifth level</a:t>
-            </a:r>
-          </a:p>
-        </p:txBody>
-      </p:sp>
-      <p:sp>
-        <p:nvSpPr>
-          <p:cNvPr id="6" name="Footer Placeholder 5"/>
-          <p:cNvSpPr>
-            <a:spLocks noGrp="1"/>
-          </p:cNvSpPr>
-          <p:nvPr>
-            <p:ph type="ftr" sz="quarter" idx="4"/>
-          </p:nvPr>
-        </p:nvSpPr>
-        <p:spPr>
-          <a:xfrm>
-            <a:off x="0" y="8685213"/>
-            <a:ext cx="2971800" cy="458787"/>
-          </a:xfrm>
-          <a:prstGeom prst="rect">
-            <a:avLst/>
-          </a:prstGeom>
-        </p:spPr>
-        <p:txBody>
-          <a:bodyPr vert="horz" lIns="91440" tIns="45720" rIns="91440" bIns="45720" rtlCol="0" anchor="b"/>
-          <a:lstStyle>
-            <a:lvl1pPr algn="l">
-              <a:defRPr sz="1200"/>
-            </a:lvl1pPr>
-          </a:lstStyle>
-          <a:p>
-            <a:endParaRPr lang="en-US"/>
-          </a:p>
-        </p:txBody>
-      </p:sp>
-      <p:sp>
-        <p:nvSpPr>
-          <p:cNvPr id="7" name="Slide Number Placeholder 6"/>
-          <p:cNvSpPr>
-            <a:spLocks noGrp="1"/>
-          </p:cNvSpPr>
-          <p:nvPr>
-            <p:ph type="sldNum" sz="quarter" idx="5"/>
-          </p:nvPr>
-        </p:nvSpPr>
-        <p:spPr>
-          <a:xfrm>
-            <a:off x="3884613" y="8685213"/>
-            <a:ext cx="2971800" cy="458787"/>
-          </a:xfrm>
-          <a:prstGeom prst="rect">
-            <a:avLst/>
-          </a:prstGeom>
-        </p:spPr>
-        <p:txBody>
-          <a:bodyPr vert="horz" lIns="91440" tIns="45720" rIns="91440" bIns="45720" rtlCol="0" anchor="b"/>
-          <a:lstStyle>
-            <a:lvl1pPr algn="r">
-              <a:defRPr sz="1200"/>
-            </a:lvl1pPr>
-          </a:lstStyle>
-          <a:p>
-            <a:fld id="{CE5E9CC1-C706-0F49-92D6-E571CC5EEA8F}" type="slidenum">
-              <a:rPr lang="en-US"/>
-              <a:t>‹#›</a:t>
-            </a:fld>
-            <a:endParaRPr lang="en-US"/>
-          </a:p>
-        </p:txBody>
-      </p:sp>
     </p:spTree>
     <p:extLst>
       <p:ext uri="{BB962C8B-B14F-4D97-AF65-F5344CB8AC3E}">
-        <p14:creationId xmlns:p14="http://schemas.microsoft.com/office/powerpoint/2010/main" val="1024086991"/>
+        <p14:creationId xmlns:p14="http://schemas.microsoft.com/office/powerpoint/2010/main" val="398461241"/>
       </p:ext>
     </p:extLst>
   </p:cSld>
@@ -1231,7 +1278,6 @@
               <a:rPr lang="en-US" dirty="0"/>
               <a:t>Говорит Aseke. Представиться, назвать тему. Одна фраза-крючок: по сегодняшним ценам хранить новые данные секвенирования 10 лет уже стоит примерно столько же, сколько их получить. Дальше покажем, откуда эта цифра и что её сдвигает.</a:t>
             </a:r>
-            <a:endParaRPr lang="en-US" dirty="0"/>
           </a:p>
         </p:txBody>
       </p:sp>
@@ -1319,7 +1365,6 @@
               <a:rPr lang="en-US" dirty="0"/>
               <a:t>Ravil. Огрубление quality и его цена. Пять версий одних и тех же ридов: исходные 4 уровня, схема Illumina на 8 уровней, 4, 2 уровня и вообще без quality. Варианты вызывали на глубинах 5, 15, 30x и полной. Эталон получен без ридов: выровняли два готовых генома, K-12 и REL606, и получили 25 952 SNP. Результат: от 15x и выше F1 по SNP меняется не больше чем на 0,001 — для гаплоидной бактерии quality почти бесполезны. Эффект виден только на 5x, и то в калибровке QUAL. Для Nanopore 4 уровня quality уменьшают архив в 2,7 раза без потерь в SNP. Ограничение: диплоидные гетерозиготы и соматика здесь не проверялись.</a:t>
             </a:r>
-            <a:endParaRPr lang="en-US" dirty="0"/>
           </a:p>
         </p:txBody>
       </p:sp>
@@ -1407,7 +1452,6 @@
               <a:rPr lang="en-US" dirty="0"/>
               <a:t>Ravil. Задача 5. Риды Nanopore из того же биообразца. Профили ошибок мы измерили сами по выравниваниям: у Illumina почти только замены, у Nanopore 65% ошибок — инделы, особенно в гомополимерах. Зато по SNP Nanopore не хуже Illumina: полнота выше, потому что длинные риды проходят повторы, точность чуть ниже. Сырой сигнал в 12–15 раз больше ридов и почти не сжимается. Но повторный бейсколлинг того же сигнала моделью sup на нашей видеокарте убрал 58% ошибок. Вывод: сигнал держать в глубоком архиве до выхода следующей модели, потом удалять — кроме эталонных и клинических образцов.</a:t>
             </a:r>
-            <a:endParaRPr lang="en-US" dirty="0"/>
           </a:p>
         </p:txBody>
       </p:sp>
@@ -1495,7 +1539,6 @@
               <a:rPr lang="en-US" dirty="0"/>
               <a:t>Ravil. Задача 6: можно ли искать в сжатом архиве. Один прогон хранили в семи формах и задавали одни и те же вопросы. CRAM — самый компактный формат, 0,73 бита на основание, меньше даже Spring, потому что хранит только отличия от референса. И он же самый быстрый: риды гена за 15 мс, в 360 раз быстрее, чем перебор сжатого FASTQ — потому что у CRAM есть индекс по координатам, а у FASTQ нет. Spring компактен, но чтобы что-то найти, надо распаковать всё — 15 секунд. BLAST быстрый, но его база больше всех и без quality. Цена CRAM — референс становится частью архива.</a:t>
             </a:r>
-            <a:endParaRPr lang="en-US" dirty="0"/>
           </a:p>
         </p:txBody>
       </p:sp>
@@ -1583,7 +1626,6 @@
               <a:rPr lang="en-US" dirty="0"/>
               <a:t>Ravil. Задача 7, тиринг. Повторное использование мерили по статьям, упоминающим проект: Europe PMC, 11 497 запросов, 5 748 проектов E. coli. Модель по метаданным на момент загрузки, обучение до 2017, тест 2018–2021: ROC-AUC 0,75. Главный вывод неожиданный: просто перенести всё из S3 Standard в мгновенный архив Glacier Instant Retrieval — это 81,5% экономии без задержек. Модель добавляет ещё 2 пункта, но 17% запросов ждут восстановления. Правило «два года горячее» — худший вариант: экономит 57% и задерживает 73%, потому что данные возвращаются поздно. Оракул показывает потолок — нужны настоящие логи скачиваний.</a:t>
             </a:r>
-            <a:endParaRPr lang="en-US" dirty="0"/>
           </a:p>
         </p:txBody>
       </p:sp>
@@ -1671,7 +1713,6 @@
               <a:rPr lang="en-US" dirty="0"/>
               <a:t>Ravil. Воспроизводимость. 17 публичных источников, у каждого MD5 и запись о происхождении. Один Snakemake-пайплайн, около 180 задач, у каждой замер времени и памяти. На выходе 40 таблиц и 11 графиков, из которых взято каждое число в отчёте. make test прогоняет весь проект на маленьком срезе реальных данных за 3,5 минуты без сети и GPU — можно показать вживую. Окружение зафиксировано. Масштаб: 607 тысяч записей метаданных качаются по годам с проверкой числа строк, кэш запросов возобновляемый.</a:t>
             </a:r>
-            <a:endParaRPr lang="en-US" dirty="0"/>
           </a:p>
         </p:txBody>
       </p:sp>
@@ -1759,7 +1800,6 @@
               <a:rPr lang="en-US" dirty="0"/>
               <a:t>Оба. Ravil зачитывает выводы 1–4, Aseke — итог и ограничения. Итог: для сегодняшней SRA по прайсу облака пересечение фактически уже наступило; все измеренные меры вместе дают около десяти лет — до 2035; если секвенирование будет дешеветь медленно, пересечения нет до 2060. Ограничения честно: один организм, только гаплоидные SNP, повторное использование через цитирования, прайс-цены и данные NHGRI до 2022. Спасибо, готовы ответить на вопросы.</a:t>
             </a:r>
-            <a:endParaRPr lang="en-US" dirty="0"/>
           </a:p>
         </p:txBody>
       </p:sp>
@@ -1847,7 +1887,6 @@
               <a:rPr lang="en-US" dirty="0"/>
               <a:t>Aseke. Начинаем с результата. Мы сравниваем две цены одного мегабазного объёма: сколько стоит его отсеквенировать и сколько стоит хранить 10 лет. Для SRA в её нынешнем формате, с тремя копиями INSDC и по прайсу облака, хранение уже стоит примерно как секвенирование — медиана пересечения 2023 год. Все измеренные нами меры вместе сдвигают дату к 2035. Но сильнее всего дату двигает то, как быстро будет дешеветь само секвенирование: если темп 2015–2022 сохранится, при всех мерах пересечения не будет до 2060.</a:t>
             </a:r>
-            <a:endParaRPr lang="en-US" dirty="0"/>
           </a:p>
         </p:txBody>
       </p:sp>
@@ -1935,7 +1974,6 @@
               <a:rPr lang="en-US" dirty="0"/>
               <a:t>Aseke. Как устроена модель. Слева — стоимость секвенирования мегабазы по данным NHGRI. Есть два честных прочтения тренда: весь период NGS (минус 37% в год) и последние годы после плато NovaSeq (минус 20% в год). Справа — стоимость хранения: сколько байт занимает одно основание, умножить на число копий и на сумму цены за 120 месяцев. Цена стартует с сегодняшних 2,3 цента за ГБ в месяц у AWS и падает со скоростью дешевения дисков — минус 12,6% в год. Пересечение — первый год, когда хранение не дешевле секвенирования. Мы считаем на мегабазу, потому что прогноз объёма архива ненадёжен — это следующий слайд.</a:t>
             </a:r>
-            <a:endParaRPr lang="en-US" dirty="0"/>
           </a:p>
         </p:txBody>
       </p:sp>
@@ -2023,7 +2061,6 @@
               <a:rPr lang="en-US" dirty="0"/>
               <a:t>Aseke. Задача 1: что хранится на каждом этапе. Все числа на графике мы измерили сами (части B): сырой сигнал Nanopore — 11,5 байта на основание, FASTQ.gz — полбайта, формат SRA — 0,34, CRAM — 0,09. Для 30x генома человека это от терабайта сигнала до 8 ГБ CRAM. Невосполним только образец. Риды нужно хранить — с них начинается любой новый анализ. Всё, что после ридов, пересчитывается. Сигнал стоит хранить только пока он может улучшить риды.</a:t>
             </a:r>
-            <a:endParaRPr lang="en-US" dirty="0"/>
           </a:p>
         </p:txBody>
       </p:sp>
@@ -2111,7 +2148,6 @@
               <a:rPr lang="en-US" dirty="0"/>
               <a:t>Aseke. Задача 2. Данные — собственная статистика NCBI по SRA и release notes GenBank. Рост SRA замедляется: в 2009–2012 архив рос в 4–5 раз за год, сейчас в 1,2 раза; годовой приток почти постоянный, 12–15 петабаз. Мы подогнали три формы: экспоненту, линейную и логистическую, и проверили каждую на отложенных последних 5 годах. Каждая где-то ошиблась в 2–6 раз, а прогнозы на 2045 расходятся в 7000 раз. Поэтому объём архива мы не прогнозируем, а считаем пересечение на одну мегабазу. Квадратичную форму отбросили: она разворачивается вниз, то есть предсказывает уменьшение архива.</a:t>
             </a:r>
-            <a:endParaRPr lang="en-US" dirty="0"/>
           </a:p>
         </p:txBody>
       </p:sp>
@@ -2199,7 +2235,6 @@
               <a:rPr lang="en-US" dirty="0"/>
               <a:t>Aseke. Задача 3. Таблица 15 приборов из спецификаций производителей: мощность Illumina выросла в 24 тысячи раз с 2006 по 2023, удвоение каждые 1,2 года. PromethION по объёму уже обгоняет NovaSeq 6000, но с другой моделью ошибок. По ENA 90–96% публичных запусков — Illumina, длинные риды растут. Если разделить годовой приток SRA на мощность одного флагмана, получится всего 5–12 приборов, работающих круглый год. Значит, в публичный архив попадает малая доля мировых данных — клинические и коммерческие данные туда не идут.</a:t>
             </a:r>
-            <a:endParaRPr lang="en-US" dirty="0"/>
           </a:p>
         </p:txBody>
       </p:sp>
@@ -2287,7 +2322,6 @@
               <a:rPr lang="en-US" dirty="0"/>
               <a:t>Aseke. Главный график. Слева — отношение стоимости хранения к стоимости секвенирования мегабазы; выше единицы хранить дороже. Справа — год пересечения с 90%-интервалом для каждого способа хранения. Внизу — как каждая мера сдвигает медиану: Spring — до 2027, огрубление quality — 2029, тиринг — 2035. Чёрные отрезки — оба тренда вместе; оранжевые — если вернётся темп 2008–2022; зелёные — если сохранится темп 2015–2022, тогда при всех мерах пересечения нет до 2060. Дальше Ravil покажет, откуда эти меры и сколько они реально стоят.</a:t>
             </a:r>
-            <a:endParaRPr lang="en-US" dirty="0"/>
           </a:p>
         </p:txBody>
       </p:sp>
@@ -2375,7 +2409,6 @@
               <a:rPr lang="en-US" dirty="0"/>
               <a:t>Ravil. Переход к части B. Прежде чем что-то сжимать, мы проверили сами архивы — и нашли четыре проблемы, о которых метаданные молчат. ENA отдаёт наш прогон Illumina с quality, заменёнными на Q30 (это SRA Lite). Метаданные называют прибор HiSeq 4000, а по ID проточной ячейки это NovaSeq. ENA молча обрезала выгрузку метаданных. Прогон Nanopore предварительно отфильтрован, и у части баз невозможное Q90. Всё это нашлось только потому, что пайплайн сверяет данные с их описанием.</a:t>
             </a:r>
-            <a:endParaRPr lang="en-US" dirty="0"/>
           </a:p>
         </p:txBody>
       </p:sp>
@@ -2463,7 +2496,6 @@
               <a:rPr lang="en-US" dirty="0"/>
               <a:t>Ravil. Задачи 4 и 5, сжатие. Один и тот же несжатый FASTQ, 8 кодеков, каждый результат распакован и сверен по MD5, бенчмарки шли без других задач на машине. На коротких ридах Spring сжимает в 25,7 раза против 5 у gzip: он переставляет риды так, чтобы перекрывающиеся шли рядом. Nanopore сжимается всего в 3 раза: 78% сжатого файла — это quality, у которых около 40 разных значений. Отсюда вопрос — нужны ли эти quality вообще.</a:t>
             </a:r>
-            <a:endParaRPr lang="en-US" dirty="0"/>
           </a:p>
         </p:txBody>
       </p:sp>
@@ -2536,6 +2568,11 @@
 <file path=ppt/slideMasters/slideMaster1.xml><?xml version="1.0" encoding="utf-8"?>
 <p:sldMaster xmlns:a="http://schemas.openxmlformats.org/drawingml/2006/main" xmlns:r="http://schemas.openxmlformats.org/officeDocument/2006/relationships" xmlns:p="http://schemas.openxmlformats.org/presentationml/2006/main">
   <p:cSld>
+    <p:bg>
+      <p:bgRef idx="1001">
+        <a:schemeClr val="bg1"/>
+      </p:bgRef>
+    </p:bg>
     <p:spTree>
       <p:nvGrpSpPr>
         <p:cNvPr id="1" name=""/>
@@ -2818,6 +2855,7 @@
         <a:solidFill>
           <a:srgbClr val="FFFFFF"/>
         </a:solidFill>
+        <a:effectLst/>
       </p:bgPr>
     </p:bg>
     <p:spTree>
@@ -2880,11 +2918,11 @@
           <a:bodyPr wrap="square" lIns="0" tIns="0" rIns="0" bIns="0" rtlCol="0" anchor="ctr"/>
           <a:lstStyle/>
           <a:p>
-            <a:pPr indent="0" marL="0">
-              <a:buNone/>
-            </a:pPr>
-            <a:r>
-              <a:rPr lang="en-US" sz="1000" spc="300" kern="0" dirty="0">
+            <a:pPr marL="0" indent="0">
+              <a:buNone/>
+            </a:pPr>
+            <a:r>
+              <a:rPr lang="en-US" sz="1000" kern="0" spc="300" dirty="0">
                 <a:solidFill>
                   <a:srgbClr val="E8000D"/>
                 </a:solidFill>
@@ -2919,7 +2957,7 @@
           <a:bodyPr wrap="square" lIns="0" tIns="0" rIns="0" bIns="0" rtlCol="0" anchor="t"/>
           <a:lstStyle/>
           <a:p>
-            <a:pPr indent="0" marL="0">
+            <a:pPr marL="0" indent="0">
               <a:lnSpc>
                 <a:spcPct val="90000"/>
               </a:lnSpc>
@@ -2939,7 +2977,7 @@
             <a:endParaRPr lang="en-US" sz="6600" dirty="0"/>
           </a:p>
           <a:p>
-            <a:pPr indent="0" marL="0">
+            <a:pPr marL="0" indent="0">
               <a:lnSpc>
                 <a:spcPct val="90000"/>
               </a:lnSpc>
@@ -3004,7 +3042,7 @@
           <a:bodyPr wrap="square" lIns="0" tIns="0" rIns="0" bIns="0" rtlCol="0" anchor="t"/>
           <a:lstStyle/>
           <a:p>
-            <a:pPr indent="0" marL="0">
+            <a:pPr marL="0" indent="0">
               <a:buNone/>
             </a:pPr>
             <a:r>
@@ -3043,7 +3081,7 @@
           <a:bodyPr wrap="square" lIns="0" tIns="0" rIns="0" bIns="0" rtlCol="0" anchor="ctr"/>
           <a:lstStyle/>
           <a:p>
-            <a:pPr indent="0" marL="0">
+            <a:pPr marL="0" indent="0">
               <a:buNone/>
             </a:pPr>
             <a:r>
@@ -3082,11 +3120,11 @@
           <a:bodyPr wrap="square" lIns="0" tIns="0" rIns="0" bIns="0" rtlCol="0" anchor="ctr"/>
           <a:lstStyle/>
           <a:p>
-            <a:pPr indent="0" marL="0">
-              <a:buNone/>
-            </a:pPr>
-            <a:r>
-              <a:rPr lang="en-US" sz="900" spc="200" kern="0" dirty="0">
+            <a:pPr marL="0" indent="0">
+              <a:buNone/>
+            </a:pPr>
+            <a:r>
+              <a:rPr lang="en-US" sz="900" kern="0" spc="200" dirty="0">
                 <a:solidFill>
                   <a:srgbClr val="444444"/>
                 </a:solidFill>
@@ -3143,7 +3181,7 @@
           <a:bodyPr wrap="square" lIns="0" tIns="0" rIns="0" bIns="0" rtlCol="0" anchor="ctr"/>
           <a:lstStyle/>
           <a:p>
-            <a:pPr algn="ctr" indent="0" marL="0">
+            <a:pPr marL="0" indent="0" algn="ctr">
               <a:buNone/>
             </a:pPr>
             <a:r>
@@ -3182,11 +3220,11 @@
           <a:bodyPr wrap="square" lIns="0" tIns="0" rIns="0" bIns="0" rtlCol="0" anchor="ctr"/>
           <a:lstStyle/>
           <a:p>
-            <a:pPr algn="ctr" indent="0" marL="0">
-              <a:buNone/>
-            </a:pPr>
-            <a:r>
-              <a:rPr lang="en-US" sz="1000" spc="200" kern="0" dirty="0">
+            <a:pPr marL="0" indent="0" algn="ctr">
+              <a:buNone/>
+            </a:pPr>
+            <a:r>
+              <a:rPr lang="en-US" sz="1000" kern="0" spc="200" dirty="0">
                 <a:solidFill>
                   <a:srgbClr val="444444"/>
                 </a:solidFill>
@@ -3216,6 +3254,7 @@
         <a:solidFill>
           <a:srgbClr val="FFFFFF"/>
         </a:solidFill>
+        <a:effectLst/>
       </p:bgPr>
     </p:bg>
     <p:spTree>
@@ -3278,11 +3317,11 @@
           <a:bodyPr wrap="square" lIns="0" tIns="0" rIns="0" bIns="0" rtlCol="0" anchor="ctr"/>
           <a:lstStyle/>
           <a:p>
-            <a:pPr indent="0" marL="0">
-              <a:buNone/>
-            </a:pPr>
-            <a:r>
-              <a:rPr lang="en-US" sz="1000" spc="300" kern="0" dirty="0">
+            <a:pPr marL="0" indent="0">
+              <a:buNone/>
+            </a:pPr>
+            <a:r>
+              <a:rPr lang="en-US" sz="1000" kern="0" spc="300" dirty="0">
                 <a:solidFill>
                   <a:srgbClr val="E8000D"/>
                 </a:solidFill>
@@ -3317,7 +3356,7 @@
           <a:bodyPr wrap="square" lIns="0" tIns="0" rIns="0" bIns="0" rtlCol="0" anchor="t"/>
           <a:lstStyle/>
           <a:p>
-            <a:pPr indent="0" marL="0">
+            <a:pPr marL="0" indent="0">
               <a:buNone/>
             </a:pPr>
             <a:r>
@@ -3360,28 +3399,6 @@
       </p:sp>
       <p:sp>
         <p:nvSpPr>
-          <p:cNvPr id="6" name="Shape 4"/>
-          <p:cNvSpPr/>
-          <p:nvPr/>
-        </p:nvSpPr>
-        <p:spPr>
-          <a:xfrm>
-            <a:off x="11356848" y="6236208"/>
-            <a:ext cx="384048" cy="384048"/>
-          </a:xfrm>
-          <a:prstGeom prst="ellipse">
-            <a:avLst/>
-          </a:prstGeom>
-          <a:ln w="19050">
-            <a:solidFill>
-              <a:srgbClr val="E8000D"/>
-            </a:solidFill>
-            <a:prstDash val="solid"/>
-          </a:ln>
-        </p:spPr>
-      </p:sp>
-      <p:sp>
-        <p:nvSpPr>
           <p:cNvPr id="7" name="Text 5"/>
           <p:cNvSpPr txBox="1"/>
           <p:nvPr/>
@@ -3401,11 +3418,11 @@
           <a:bodyPr wrap="square" lIns="0" tIns="0" rIns="0" bIns="0" rtlCol="0" anchor="ctr"/>
           <a:lstStyle/>
           <a:p>
-            <a:pPr indent="0" marL="0">
-              <a:buNone/>
-            </a:pPr>
-            <a:r>
-              <a:rPr lang="en-US" sz="800" spc="200" kern="0" dirty="0">
+            <a:pPr marL="0" indent="0">
+              <a:buNone/>
+            </a:pPr>
+            <a:r>
+              <a:rPr lang="en-US" sz="800" kern="0" spc="200" dirty="0">
                 <a:solidFill>
                   <a:srgbClr val="444444"/>
                 </a:solidFill>
@@ -3440,7 +3457,7 @@
           <a:bodyPr wrap="square" lIns="0" tIns="0" rIns="0" bIns="0" rtlCol="0" anchor="ctr"/>
           <a:lstStyle/>
           <a:p>
-            <a:pPr algn="r" indent="0" marL="0">
+            <a:pPr marL="0" indent="0" algn="r">
               <a:buNone/>
             </a:pPr>
             <a:r>
@@ -3460,14 +3477,14 @@
       </p:sp>
       <p:pic>
         <p:nvPicPr>
-          <p:cNvPr id="9" name="Image 0" descr="C:\Users\ravse\OneDrive\Рабочий стол\BioStorageApoc\results\figures\fig_b3_binning_cost.png">    </p:cNvPr>
+          <p:cNvPr id="9" name="Image 0" descr="C:\Users\ravse\OneDrive\Рабочий стол\BioStorageApoc\results\figures\fig_b3_binning_cost.png"/>
           <p:cNvPicPr>
             <a:picLocks noChangeAspect="1"/>
           </p:cNvPicPr>
           <p:nvPr/>
         </p:nvPicPr>
         <p:blipFill>
-          <a:blip r:embed="rId1"/>
+          <a:blip r:embed="rId3"/>
           <a:stretch>
             <a:fillRect/>
           </a:stretch>
@@ -3503,7 +3520,7 @@
           <a:bodyPr wrap="square" lIns="0" tIns="0" rIns="0" bIns="0" rtlCol="0" anchor="b"/>
           <a:lstStyle/>
           <a:p>
-            <a:pPr indent="0" marL="0">
+            <a:pPr marL="0" indent="0">
               <a:buNone/>
             </a:pPr>
             <a:r>
@@ -3542,7 +3559,7 @@
           <a:bodyPr wrap="square" lIns="0" tIns="0" rIns="0" bIns="0" rtlCol="0" anchor="t"/>
           <a:lstStyle/>
           <a:p>
-            <a:pPr indent="0" marL="0">
+            <a:pPr marL="0" indent="0">
               <a:buNone/>
             </a:pPr>
             <a:r>
@@ -3581,7 +3598,7 @@
           <a:bodyPr wrap="square" lIns="0" tIns="0" rIns="0" bIns="0" rtlCol="0" anchor="b"/>
           <a:lstStyle/>
           <a:p>
-            <a:pPr indent="0" marL="0">
+            <a:pPr marL="0" indent="0">
               <a:buNone/>
             </a:pPr>
             <a:r>
@@ -3620,7 +3637,7 @@
           <a:bodyPr wrap="square" lIns="0" tIns="0" rIns="0" bIns="0" rtlCol="0" anchor="t"/>
           <a:lstStyle/>
           <a:p>
-            <a:pPr indent="0" marL="0">
+            <a:pPr marL="0" indent="0">
               <a:buNone/>
             </a:pPr>
             <a:r>
@@ -3659,7 +3676,7 @@
           <a:bodyPr wrap="square" lIns="0" tIns="0" rIns="0" bIns="0" rtlCol="0" anchor="b"/>
           <a:lstStyle/>
           <a:p>
-            <a:pPr indent="0" marL="0">
+            <a:pPr marL="0" indent="0">
               <a:buNone/>
             </a:pPr>
             <a:r>
@@ -3698,7 +3715,7 @@
           <a:bodyPr wrap="square" lIns="0" tIns="0" rIns="0" bIns="0" rtlCol="0" anchor="t"/>
           <a:lstStyle/>
           <a:p>
-            <a:pPr indent="0" marL="0">
+            <a:pPr marL="0" indent="0">
               <a:buNone/>
             </a:pPr>
             <a:r>
@@ -3732,6 +3749,7 @@
         <a:solidFill>
           <a:srgbClr val="FFFFFF"/>
         </a:solidFill>
+        <a:effectLst/>
       </p:bgPr>
     </p:bg>
     <p:spTree>
@@ -3794,11 +3812,11 @@
           <a:bodyPr wrap="square" lIns="0" tIns="0" rIns="0" bIns="0" rtlCol="0" anchor="ctr"/>
           <a:lstStyle/>
           <a:p>
-            <a:pPr indent="0" marL="0">
-              <a:buNone/>
-            </a:pPr>
-            <a:r>
-              <a:rPr lang="en-US" sz="1000" spc="300" kern="0" dirty="0">
+            <a:pPr marL="0" indent="0">
+              <a:buNone/>
+            </a:pPr>
+            <a:r>
+              <a:rPr lang="en-US" sz="1000" kern="0" spc="300" dirty="0">
                 <a:solidFill>
                   <a:srgbClr val="E8000D"/>
                 </a:solidFill>
@@ -3833,7 +3851,7 @@
           <a:bodyPr wrap="square" lIns="0" tIns="0" rIns="0" bIns="0" rtlCol="0" anchor="t"/>
           <a:lstStyle/>
           <a:p>
-            <a:pPr indent="0" marL="0">
+            <a:pPr marL="0" indent="0">
               <a:buNone/>
             </a:pPr>
             <a:r>
@@ -3876,28 +3894,6 @@
       </p:sp>
       <p:sp>
         <p:nvSpPr>
-          <p:cNvPr id="6" name="Shape 4"/>
-          <p:cNvSpPr/>
-          <p:nvPr/>
-        </p:nvSpPr>
-        <p:spPr>
-          <a:xfrm>
-            <a:off x="11356848" y="6236208"/>
-            <a:ext cx="384048" cy="384048"/>
-          </a:xfrm>
-          <a:prstGeom prst="ellipse">
-            <a:avLst/>
-          </a:prstGeom>
-          <a:ln w="19050">
-            <a:solidFill>
-              <a:srgbClr val="E8000D"/>
-            </a:solidFill>
-            <a:prstDash val="solid"/>
-          </a:ln>
-        </p:spPr>
-      </p:sp>
-      <p:sp>
-        <p:nvSpPr>
           <p:cNvPr id="7" name="Text 5"/>
           <p:cNvSpPr txBox="1"/>
           <p:nvPr/>
@@ -3917,11 +3913,11 @@
           <a:bodyPr wrap="square" lIns="0" tIns="0" rIns="0" bIns="0" rtlCol="0" anchor="ctr"/>
           <a:lstStyle/>
           <a:p>
-            <a:pPr indent="0" marL="0">
-              <a:buNone/>
-            </a:pPr>
-            <a:r>
-              <a:rPr lang="en-US" sz="800" spc="200" kern="0" dirty="0">
+            <a:pPr marL="0" indent="0">
+              <a:buNone/>
+            </a:pPr>
+            <a:r>
+              <a:rPr lang="en-US" sz="800" kern="0" spc="200" dirty="0">
                 <a:solidFill>
                   <a:srgbClr val="444444"/>
                 </a:solidFill>
@@ -3956,7 +3952,7 @@
           <a:bodyPr wrap="square" lIns="0" tIns="0" rIns="0" bIns="0" rtlCol="0" anchor="ctr"/>
           <a:lstStyle/>
           <a:p>
-            <a:pPr algn="r" indent="0" marL="0">
+            <a:pPr marL="0" indent="0" algn="r">
               <a:buNone/>
             </a:pPr>
             <a:r>
@@ -3990,16 +3986,34 @@
         </p:nvGraphicFramePr>
         <p:xfrm>
           <a:off x="731520" y="1783080"/>
-          <a:ext cx="6161532" cy="914400"/>
+          <a:ext cx="6161533" cy="3328416"/>
         </p:xfrm>
         <a:graphic>
           <a:graphicData uri="http://schemas.openxmlformats.org/drawingml/2006/table">
             <a:tbl>
               <a:tblPr/>
               <a:tblGrid>
-                <a:gridCol w="2834305"/>
-                <a:gridCol w="1663614"/>
-                <a:gridCol w="1663614"/>
+                <a:gridCol w="2834305">
+                  <a:extLst>
+                    <a:ext uri="{9D8B030D-6E8A-4147-A177-3AD203B41FA5}">
+                      <a16:colId xmlns:a16="http://schemas.microsoft.com/office/drawing/2014/main" val="20000"/>
+                    </a:ext>
+                  </a:extLst>
+                </a:gridCol>
+                <a:gridCol w="1663614">
+                  <a:extLst>
+                    <a:ext uri="{9D8B030D-6E8A-4147-A177-3AD203B41FA5}">
+                      <a16:colId xmlns:a16="http://schemas.microsoft.com/office/drawing/2014/main" val="20001"/>
+                    </a:ext>
+                  </a:extLst>
+                </a:gridCol>
+                <a:gridCol w="1663614">
+                  <a:extLst>
+                    <a:ext uri="{9D8B030D-6E8A-4147-A177-3AD203B41FA5}">
+                      <a16:colId xmlns:a16="http://schemas.microsoft.com/office/drawing/2014/main" val="20002"/>
+                    </a:ext>
+                  </a:extLst>
+                </a:gridCol>
               </a:tblGrid>
               <a:tr h="475488">
                 <a:tc>
@@ -4007,7 +4021,7 @@
                     <a:bodyPr/>
                     <a:lstStyle/>
                     <a:p>
-                      <a:pPr indent="0" marL="0">
+                      <a:pPr marL="0" indent="0">
                         <a:buNone/>
                       </a:pPr>
                       <a:r>
@@ -4075,7 +4089,7 @@
                     <a:bodyPr/>
                     <a:lstStyle/>
                     <a:p>
-                      <a:pPr indent="0" marL="0">
+                      <a:pPr marL="0" indent="0">
                         <a:buNone/>
                       </a:pPr>
                       <a:r>
@@ -4143,7 +4157,7 @@
                     <a:bodyPr/>
                     <a:lstStyle/>
                     <a:p>
-                      <a:pPr indent="0" marL="0">
+                      <a:pPr marL="0" indent="0">
                         <a:buNone/>
                       </a:pPr>
                       <a:r>
@@ -4206,6 +4220,11 @@
                     </a:solidFill>
                   </a:tcPr>
                 </a:tc>
+                <a:extLst>
+                  <a:ext uri="{0D108BD9-81ED-4DB2-BD59-A6C34878D82A}">
+                    <a16:rowId xmlns:a16="http://schemas.microsoft.com/office/drawing/2014/main" val="10000"/>
+                  </a:ext>
+                </a:extLst>
               </a:tr>
               <a:tr h="475488">
                 <a:tc>
@@ -4213,7 +4232,7 @@
                     <a:bodyPr/>
                     <a:lstStyle/>
                     <a:p>
-                      <a:pPr indent="0" marL="0">
+                      <a:pPr marL="0" indent="0">
                         <a:buNone/>
                       </a:pPr>
                       <a:r>
@@ -4278,7 +4297,7 @@
                     <a:bodyPr/>
                     <a:lstStyle/>
                     <a:p>
-                      <a:pPr indent="0" marL="0">
+                      <a:pPr marL="0" indent="0">
                         <a:buNone/>
                       </a:pPr>
                       <a:r>
@@ -4343,7 +4362,7 @@
                     <a:bodyPr/>
                     <a:lstStyle/>
                     <a:p>
-                      <a:pPr indent="0" marL="0">
+                      <a:pPr marL="0" indent="0">
                         <a:buNone/>
                       </a:pPr>
                       <a:r>
@@ -4403,6 +4422,11 @@
                     </a:lnB>
                   </a:tcPr>
                 </a:tc>
+                <a:extLst>
+                  <a:ext uri="{0D108BD9-81ED-4DB2-BD59-A6C34878D82A}">
+                    <a16:rowId xmlns:a16="http://schemas.microsoft.com/office/drawing/2014/main" val="10001"/>
+                  </a:ext>
+                </a:extLst>
               </a:tr>
               <a:tr h="475488">
                 <a:tc>
@@ -4410,7 +4434,7 @@
                     <a:bodyPr/>
                     <a:lstStyle/>
                     <a:p>
-                      <a:pPr indent="0" marL="0">
+                      <a:pPr marL="0" indent="0">
                         <a:buNone/>
                       </a:pPr>
                       <a:r>
@@ -4475,7 +4499,7 @@
                     <a:bodyPr/>
                     <a:lstStyle/>
                     <a:p>
-                      <a:pPr indent="0" marL="0">
+                      <a:pPr marL="0" indent="0">
                         <a:buNone/>
                       </a:pPr>
                       <a:r>
@@ -4540,7 +4564,7 @@
                     <a:bodyPr/>
                     <a:lstStyle/>
                     <a:p>
-                      <a:pPr indent="0" marL="0">
+                      <a:pPr marL="0" indent="0">
                         <a:buNone/>
                       </a:pPr>
                       <a:r>
@@ -4600,6 +4624,11 @@
                     </a:lnB>
                   </a:tcPr>
                 </a:tc>
+                <a:extLst>
+                  <a:ext uri="{0D108BD9-81ED-4DB2-BD59-A6C34878D82A}">
+                    <a16:rowId xmlns:a16="http://schemas.microsoft.com/office/drawing/2014/main" val="10002"/>
+                  </a:ext>
+                </a:extLst>
               </a:tr>
               <a:tr h="475488">
                 <a:tc>
@@ -4607,7 +4636,7 @@
                     <a:bodyPr/>
                     <a:lstStyle/>
                     <a:p>
-                      <a:pPr indent="0" marL="0">
+                      <a:pPr marL="0" indent="0">
                         <a:buNone/>
                       </a:pPr>
                       <a:r>
@@ -4672,7 +4701,7 @@
                     <a:bodyPr/>
                     <a:lstStyle/>
                     <a:p>
-                      <a:pPr indent="0" marL="0">
+                      <a:pPr marL="0" indent="0">
                         <a:buNone/>
                       </a:pPr>
                       <a:r>
@@ -4737,7 +4766,7 @@
                     <a:bodyPr/>
                     <a:lstStyle/>
                     <a:p>
-                      <a:pPr indent="0" marL="0">
+                      <a:pPr marL="0" indent="0">
                         <a:buNone/>
                       </a:pPr>
                       <a:r>
@@ -4797,6 +4826,11 @@
                     </a:lnB>
                   </a:tcPr>
                 </a:tc>
+                <a:extLst>
+                  <a:ext uri="{0D108BD9-81ED-4DB2-BD59-A6C34878D82A}">
+                    <a16:rowId xmlns:a16="http://schemas.microsoft.com/office/drawing/2014/main" val="10003"/>
+                  </a:ext>
+                </a:extLst>
               </a:tr>
               <a:tr h="475488">
                 <a:tc>
@@ -4804,7 +4838,7 @@
                     <a:bodyPr/>
                     <a:lstStyle/>
                     <a:p>
-                      <a:pPr indent="0" marL="0">
+                      <a:pPr marL="0" indent="0">
                         <a:buNone/>
                       </a:pPr>
                       <a:r>
@@ -4869,7 +4903,7 @@
                     <a:bodyPr/>
                     <a:lstStyle/>
                     <a:p>
-                      <a:pPr indent="0" marL="0">
+                      <a:pPr marL="0" indent="0">
                         <a:buNone/>
                       </a:pPr>
                       <a:r>
@@ -4934,7 +4968,7 @@
                     <a:bodyPr/>
                     <a:lstStyle/>
                     <a:p>
-                      <a:pPr indent="0" marL="0">
+                      <a:pPr marL="0" indent="0">
                         <a:buNone/>
                       </a:pPr>
                       <a:r>
@@ -4994,6 +5028,11 @@
                     </a:lnB>
                   </a:tcPr>
                 </a:tc>
+                <a:extLst>
+                  <a:ext uri="{0D108BD9-81ED-4DB2-BD59-A6C34878D82A}">
+                    <a16:rowId xmlns:a16="http://schemas.microsoft.com/office/drawing/2014/main" val="10004"/>
+                  </a:ext>
+                </a:extLst>
               </a:tr>
               <a:tr h="475488">
                 <a:tc>
@@ -5001,7 +5040,7 @@
                     <a:bodyPr/>
                     <a:lstStyle/>
                     <a:p>
-                      <a:pPr indent="0" marL="0">
+                      <a:pPr marL="0" indent="0">
                         <a:buNone/>
                       </a:pPr>
                       <a:r>
@@ -5066,7 +5105,7 @@
                     <a:bodyPr/>
                     <a:lstStyle/>
                     <a:p>
-                      <a:pPr indent="0" marL="0">
+                      <a:pPr marL="0" indent="0">
                         <a:buNone/>
                       </a:pPr>
                       <a:r>
@@ -5131,7 +5170,7 @@
                     <a:bodyPr/>
                     <a:lstStyle/>
                     <a:p>
-                      <a:pPr indent="0" marL="0">
+                      <a:pPr marL="0" indent="0">
                         <a:buNone/>
                       </a:pPr>
                       <a:r>
@@ -5191,6 +5230,11 @@
                     </a:lnB>
                   </a:tcPr>
                 </a:tc>
+                <a:extLst>
+                  <a:ext uri="{0D108BD9-81ED-4DB2-BD59-A6C34878D82A}">
+                    <a16:rowId xmlns:a16="http://schemas.microsoft.com/office/drawing/2014/main" val="10005"/>
+                  </a:ext>
+                </a:extLst>
               </a:tr>
               <a:tr h="475488">
                 <a:tc>
@@ -5198,7 +5242,7 @@
                     <a:bodyPr/>
                     <a:lstStyle/>
                     <a:p>
-                      <a:pPr indent="0" marL="0">
+                      <a:pPr marL="0" indent="0">
                         <a:buNone/>
                       </a:pPr>
                       <a:r>
@@ -5263,7 +5307,7 @@
                     <a:bodyPr/>
                     <a:lstStyle/>
                     <a:p>
-                      <a:pPr indent="0" marL="0">
+                      <a:pPr marL="0" indent="0">
                         <a:buNone/>
                       </a:pPr>
                       <a:r>
@@ -5328,7 +5372,7 @@
                     <a:bodyPr/>
                     <a:lstStyle/>
                     <a:p>
-                      <a:pPr indent="0" marL="0">
+                      <a:pPr marL="0" indent="0">
                         <a:buNone/>
                       </a:pPr>
                       <a:r>
@@ -5388,6 +5432,11 @@
                     </a:lnB>
                   </a:tcPr>
                 </a:tc>
+                <a:extLst>
+                  <a:ext uri="{0D108BD9-81ED-4DB2-BD59-A6C34878D82A}">
+                    <a16:rowId xmlns:a16="http://schemas.microsoft.com/office/drawing/2014/main" val="10006"/>
+                  </a:ext>
+                </a:extLst>
               </a:tr>
             </a:tbl>
           </a:graphicData>
@@ -5414,7 +5463,7 @@
           <a:bodyPr wrap="square" lIns="0" tIns="0" rIns="0" bIns="0" rtlCol="0" anchor="b"/>
           <a:lstStyle/>
           <a:p>
-            <a:pPr indent="0" marL="0">
+            <a:pPr marL="0" indent="0">
               <a:buNone/>
             </a:pPr>
             <a:r>
@@ -5453,7 +5502,7 @@
           <a:bodyPr wrap="square" lIns="0" tIns="0" rIns="0" bIns="0" rtlCol="0" anchor="t"/>
           <a:lstStyle/>
           <a:p>
-            <a:pPr indent="0" marL="0">
+            <a:pPr marL="0" indent="0">
               <a:buNone/>
             </a:pPr>
             <a:r>
@@ -5473,7 +5522,7 @@
       </p:sp>
       <p:sp>
         <p:nvSpPr>
-          <p:cNvPr id="12" name="Text 9"/>
+          <p:cNvPr id="9" name="Text 9"/>
           <p:cNvSpPr txBox="1"/>
           <p:nvPr/>
         </p:nvSpPr>
@@ -5492,7 +5541,7 @@
           <a:bodyPr wrap="square" lIns="0" tIns="0" rIns="0" bIns="0" rtlCol="0" anchor="b"/>
           <a:lstStyle/>
           <a:p>
-            <a:pPr indent="0" marL="0">
+            <a:pPr marL="0" indent="0">
               <a:buNone/>
             </a:pPr>
             <a:r>
@@ -5531,7 +5580,7 @@
           <a:bodyPr wrap="square" lIns="0" tIns="0" rIns="0" bIns="0" rtlCol="0" anchor="t"/>
           <a:lstStyle/>
           <a:p>
-            <a:pPr indent="0" marL="0">
+            <a:pPr marL="0" indent="0">
               <a:buNone/>
             </a:pPr>
             <a:r>
@@ -5570,7 +5619,7 @@
           <a:bodyPr wrap="square" lIns="0" tIns="0" rIns="0" bIns="0" rtlCol="0" anchor="b"/>
           <a:lstStyle/>
           <a:p>
-            <a:pPr indent="0" marL="0">
+            <a:pPr marL="0" indent="0">
               <a:buNone/>
             </a:pPr>
             <a:r>
@@ -5609,7 +5658,7 @@
           <a:bodyPr wrap="square" lIns="0" tIns="0" rIns="0" bIns="0" rtlCol="0" anchor="t"/>
           <a:lstStyle/>
           <a:p>
-            <a:pPr indent="0" marL="0">
+            <a:pPr marL="0" indent="0">
               <a:buNone/>
             </a:pPr>
             <a:r>
@@ -5643,6 +5692,7 @@
         <a:solidFill>
           <a:srgbClr val="FFFFFF"/>
         </a:solidFill>
+        <a:effectLst/>
       </p:bgPr>
     </p:bg>
     <p:spTree>
@@ -5705,11 +5755,11 @@
           <a:bodyPr wrap="square" lIns="0" tIns="0" rIns="0" bIns="0" rtlCol="0" anchor="ctr"/>
           <a:lstStyle/>
           <a:p>
-            <a:pPr indent="0" marL="0">
-              <a:buNone/>
-            </a:pPr>
-            <a:r>
-              <a:rPr lang="en-US" sz="1000" spc="300" kern="0" dirty="0">
+            <a:pPr marL="0" indent="0">
+              <a:buNone/>
+            </a:pPr>
+            <a:r>
+              <a:rPr lang="en-US" sz="1000" kern="0" spc="300" dirty="0">
                 <a:solidFill>
                   <a:srgbClr val="E8000D"/>
                 </a:solidFill>
@@ -5744,7 +5794,7 @@
           <a:bodyPr wrap="square" lIns="0" tIns="0" rIns="0" bIns="0" rtlCol="0" anchor="t"/>
           <a:lstStyle/>
           <a:p>
-            <a:pPr indent="0" marL="0">
+            <a:pPr marL="0" indent="0">
               <a:buNone/>
             </a:pPr>
             <a:r>
@@ -5787,28 +5837,6 @@
       </p:sp>
       <p:sp>
         <p:nvSpPr>
-          <p:cNvPr id="6" name="Shape 4"/>
-          <p:cNvSpPr/>
-          <p:nvPr/>
-        </p:nvSpPr>
-        <p:spPr>
-          <a:xfrm>
-            <a:off x="11356848" y="6236208"/>
-            <a:ext cx="384048" cy="384048"/>
-          </a:xfrm>
-          <a:prstGeom prst="ellipse">
-            <a:avLst/>
-          </a:prstGeom>
-          <a:ln w="19050">
-            <a:solidFill>
-              <a:srgbClr val="E8000D"/>
-            </a:solidFill>
-            <a:prstDash val="solid"/>
-          </a:ln>
-        </p:spPr>
-      </p:sp>
-      <p:sp>
-        <p:nvSpPr>
           <p:cNvPr id="7" name="Text 5"/>
           <p:cNvSpPr txBox="1"/>
           <p:nvPr/>
@@ -5828,11 +5856,11 @@
           <a:bodyPr wrap="square" lIns="0" tIns="0" rIns="0" bIns="0" rtlCol="0" anchor="ctr"/>
           <a:lstStyle/>
           <a:p>
-            <a:pPr indent="0" marL="0">
-              <a:buNone/>
-            </a:pPr>
-            <a:r>
-              <a:rPr lang="en-US" sz="800" spc="200" kern="0" dirty="0">
+            <a:pPr marL="0" indent="0">
+              <a:buNone/>
+            </a:pPr>
+            <a:r>
+              <a:rPr lang="en-US" sz="800" kern="0" spc="200" dirty="0">
                 <a:solidFill>
                   <a:srgbClr val="444444"/>
                 </a:solidFill>
@@ -5867,7 +5895,7 @@
           <a:bodyPr wrap="square" lIns="0" tIns="0" rIns="0" bIns="0" rtlCol="0" anchor="ctr"/>
           <a:lstStyle/>
           <a:p>
-            <a:pPr algn="r" indent="0" marL="0">
+            <a:pPr marL="0" indent="0" algn="r">
               <a:buNone/>
             </a:pPr>
             <a:r>
@@ -5906,7 +5934,7 @@
           <a:bodyPr wrap="square" lIns="0" tIns="0" rIns="0" bIns="0" rtlCol="0" anchor="ctr"/>
           <a:lstStyle/>
           <a:p>
-            <a:pPr indent="0" marL="0">
+            <a:pPr marL="0" indent="0">
               <a:buNone/>
             </a:pPr>
             <a:r>
@@ -5968,7 +5996,7 @@
           <a:bodyPr wrap="square" lIns="0" tIns="0" rIns="0" bIns="0" rtlCol="0" anchor="ctr"/>
           <a:lstStyle/>
           <a:p>
-            <a:pPr algn="ctr" indent="0" marL="0">
+            <a:pPr marL="0" indent="0" algn="ctr">
               <a:buNone/>
             </a:pPr>
             <a:r>
@@ -6030,7 +6058,7 @@
           <a:bodyPr wrap="square" lIns="0" tIns="0" rIns="0" bIns="0" rtlCol="0" anchor="ctr"/>
           <a:lstStyle/>
           <a:p>
-            <a:pPr algn="ctr" indent="0" marL="0">
+            <a:pPr marL="0" indent="0" algn="ctr">
               <a:buNone/>
             </a:pPr>
             <a:r>
@@ -6092,7 +6120,7 @@
           <a:bodyPr wrap="square" lIns="0" tIns="0" rIns="0" bIns="0" rtlCol="0" anchor="ctr"/>
           <a:lstStyle/>
           <a:p>
-            <a:pPr algn="ctr" indent="0" marL="0">
+            <a:pPr marL="0" indent="0" algn="ctr">
               <a:buNone/>
             </a:pPr>
             <a:r>
@@ -6154,7 +6182,7 @@
           <a:bodyPr wrap="square" lIns="0" tIns="0" rIns="0" bIns="0" rtlCol="0" anchor="ctr"/>
           <a:lstStyle/>
           <a:p>
-            <a:pPr algn="ctr" indent="0" marL="0">
+            <a:pPr marL="0" indent="0" algn="ctr">
               <a:buNone/>
             </a:pPr>
             <a:r>
@@ -6216,7 +6244,7 @@
           <a:bodyPr wrap="square" lIns="0" tIns="0" rIns="0" bIns="0" rtlCol="0" anchor="ctr"/>
           <a:lstStyle/>
           <a:p>
-            <a:pPr algn="ctr" indent="0" marL="0">
+            <a:pPr marL="0" indent="0" algn="ctr">
               <a:buNone/>
             </a:pPr>
             <a:r>
@@ -6255,7 +6283,7 @@
           <a:bodyPr wrap="square" lIns="0" tIns="0" rIns="0" bIns="0" rtlCol="0" anchor="ctr"/>
           <a:lstStyle/>
           <a:p>
-            <a:pPr algn="r" indent="0" marL="0">
+            <a:pPr marL="0" indent="0" algn="r">
               <a:buNone/>
             </a:pPr>
             <a:r>
@@ -6319,7 +6347,7 @@
           <a:bodyPr wrap="square" lIns="0" tIns="0" rIns="0" bIns="0" rtlCol="0" anchor="ctr"/>
           <a:lstStyle/>
           <a:p>
-            <a:pPr indent="0" marL="0">
+            <a:pPr marL="0" indent="0">
               <a:buNone/>
             </a:pPr>
             <a:r>
@@ -6358,7 +6386,7 @@
           <a:bodyPr wrap="square" lIns="0" tIns="0" rIns="0" bIns="0" rtlCol="0" anchor="ctr"/>
           <a:lstStyle/>
           <a:p>
-            <a:pPr algn="r" indent="0" marL="0">
+            <a:pPr marL="0" indent="0" algn="r">
               <a:buNone/>
             </a:pPr>
             <a:r>
@@ -6422,7 +6450,7 @@
           <a:bodyPr wrap="square" lIns="0" tIns="0" rIns="0" bIns="0" rtlCol="0" anchor="ctr"/>
           <a:lstStyle/>
           <a:p>
-            <a:pPr indent="0" marL="0">
+            <a:pPr marL="0" indent="0">
               <a:buNone/>
             </a:pPr>
             <a:r>
@@ -6461,7 +6489,7 @@
           <a:bodyPr wrap="square" lIns="0" tIns="0" rIns="0" bIns="0" rtlCol="0" anchor="ctr"/>
           <a:lstStyle/>
           <a:p>
-            <a:pPr algn="r" indent="0" marL="0">
+            <a:pPr marL="0" indent="0" algn="r">
               <a:buNone/>
             </a:pPr>
             <a:r>
@@ -6525,7 +6553,7 @@
           <a:bodyPr wrap="square" lIns="0" tIns="0" rIns="0" bIns="0" rtlCol="0" anchor="ctr"/>
           <a:lstStyle/>
           <a:p>
-            <a:pPr indent="0" marL="0">
+            <a:pPr marL="0" indent="0">
               <a:buNone/>
             </a:pPr>
             <a:r>
@@ -6564,7 +6592,7 @@
           <a:bodyPr wrap="square" lIns="0" tIns="0" rIns="0" bIns="0" rtlCol="0" anchor="ctr"/>
           <a:lstStyle/>
           <a:p>
-            <a:pPr algn="r" indent="0" marL="0">
+            <a:pPr marL="0" indent="0" algn="r">
               <a:buNone/>
             </a:pPr>
             <a:r>
@@ -6628,7 +6656,7 @@
           <a:bodyPr wrap="square" lIns="0" tIns="0" rIns="0" bIns="0" rtlCol="0" anchor="ctr"/>
           <a:lstStyle/>
           <a:p>
-            <a:pPr indent="0" marL="0">
+            <a:pPr marL="0" indent="0">
               <a:buNone/>
             </a:pPr>
             <a:r>
@@ -6667,7 +6695,7 @@
           <a:bodyPr wrap="square" lIns="0" tIns="0" rIns="0" bIns="0" rtlCol="0" anchor="ctr"/>
           <a:lstStyle/>
           <a:p>
-            <a:pPr algn="r" indent="0" marL="0">
+            <a:pPr marL="0" indent="0" algn="r">
               <a:buNone/>
             </a:pPr>
             <a:r>
@@ -6731,7 +6759,7 @@
           <a:bodyPr wrap="square" lIns="0" tIns="0" rIns="0" bIns="0" rtlCol="0" anchor="ctr"/>
           <a:lstStyle/>
           <a:p>
-            <a:pPr indent="0" marL="0">
+            <a:pPr marL="0" indent="0">
               <a:buNone/>
             </a:pPr>
             <a:r>
@@ -6770,7 +6798,7 @@
           <a:bodyPr wrap="square" lIns="0" tIns="0" rIns="0" bIns="0" rtlCol="0" anchor="ctr"/>
           <a:lstStyle/>
           <a:p>
-            <a:pPr algn="r" indent="0" marL="0">
+            <a:pPr marL="0" indent="0" algn="r">
               <a:buNone/>
             </a:pPr>
             <a:r>
@@ -6834,7 +6862,7 @@
           <a:bodyPr wrap="square" lIns="0" tIns="0" rIns="0" bIns="0" rtlCol="0" anchor="ctr"/>
           <a:lstStyle/>
           <a:p>
-            <a:pPr indent="0" marL="0">
+            <a:pPr marL="0" indent="0">
               <a:buNone/>
             </a:pPr>
             <a:r>
@@ -6873,7 +6901,7 @@
           <a:bodyPr wrap="square" lIns="0" tIns="0" rIns="0" bIns="0" rtlCol="0" anchor="ctr"/>
           <a:lstStyle/>
           <a:p>
-            <a:pPr algn="r" indent="0" marL="0">
+            <a:pPr marL="0" indent="0" algn="r">
               <a:buNone/>
             </a:pPr>
             <a:r>
@@ -6937,7 +6965,7 @@
           <a:bodyPr wrap="square" lIns="0" tIns="0" rIns="0" bIns="0" rtlCol="0" anchor="ctr"/>
           <a:lstStyle/>
           <a:p>
-            <a:pPr indent="0" marL="0">
+            <a:pPr marL="0" indent="0">
               <a:buNone/>
             </a:pPr>
             <a:r>
@@ -6976,7 +7004,7 @@
           <a:bodyPr wrap="square" lIns="0" tIns="0" rIns="0" bIns="0" rtlCol="0" anchor="b"/>
           <a:lstStyle/>
           <a:p>
-            <a:pPr indent="0" marL="0">
+            <a:pPr marL="0" indent="0">
               <a:buNone/>
             </a:pPr>
             <a:r>
@@ -7015,7 +7043,7 @@
           <a:bodyPr wrap="square" lIns="0" tIns="0" rIns="0" bIns="0" rtlCol="0" anchor="t"/>
           <a:lstStyle/>
           <a:p>
-            <a:pPr indent="0" marL="0">
+            <a:pPr marL="0" indent="0">
               <a:buNone/>
             </a:pPr>
             <a:r>
@@ -7054,7 +7082,7 @@
           <a:bodyPr wrap="square" lIns="0" tIns="0" rIns="0" bIns="0" rtlCol="0" anchor="b"/>
           <a:lstStyle/>
           <a:p>
-            <a:pPr indent="0" marL="0">
+            <a:pPr marL="0" indent="0">
               <a:buNone/>
             </a:pPr>
             <a:r>
@@ -7093,7 +7121,7 @@
           <a:bodyPr wrap="square" lIns="0" tIns="0" rIns="0" bIns="0" rtlCol="0" anchor="t"/>
           <a:lstStyle/>
           <a:p>
-            <a:pPr indent="0" marL="0">
+            <a:pPr marL="0" indent="0">
               <a:buNone/>
             </a:pPr>
             <a:r>
@@ -7132,7 +7160,7 @@
           <a:bodyPr wrap="square" lIns="0" tIns="0" rIns="0" bIns="0" rtlCol="0" anchor="b"/>
           <a:lstStyle/>
           <a:p>
-            <a:pPr indent="0" marL="0">
+            <a:pPr marL="0" indent="0">
               <a:buNone/>
             </a:pPr>
             <a:r>
@@ -7171,7 +7199,7 @@
           <a:bodyPr wrap="square" lIns="0" tIns="0" rIns="0" bIns="0" rtlCol="0" anchor="t"/>
           <a:lstStyle/>
           <a:p>
-            <a:pPr indent="0" marL="0">
+            <a:pPr marL="0" indent="0">
               <a:buNone/>
             </a:pPr>
             <a:r>
@@ -7205,6 +7233,7 @@
         <a:solidFill>
           <a:srgbClr val="FFFFFF"/>
         </a:solidFill>
+        <a:effectLst/>
       </p:bgPr>
     </p:bg>
     <p:spTree>
@@ -7267,11 +7296,11 @@
           <a:bodyPr wrap="square" lIns="0" tIns="0" rIns="0" bIns="0" rtlCol="0" anchor="ctr"/>
           <a:lstStyle/>
           <a:p>
-            <a:pPr indent="0" marL="0">
-              <a:buNone/>
-            </a:pPr>
-            <a:r>
-              <a:rPr lang="en-US" sz="1000" spc="300" kern="0" dirty="0">
+            <a:pPr marL="0" indent="0">
+              <a:buNone/>
+            </a:pPr>
+            <a:r>
+              <a:rPr lang="en-US" sz="1000" kern="0" spc="300" dirty="0">
                 <a:solidFill>
                   <a:srgbClr val="E8000D"/>
                 </a:solidFill>
@@ -7306,7 +7335,7 @@
           <a:bodyPr wrap="square" lIns="0" tIns="0" rIns="0" bIns="0" rtlCol="0" anchor="t"/>
           <a:lstStyle/>
           <a:p>
-            <a:pPr indent="0" marL="0">
+            <a:pPr marL="0" indent="0">
               <a:buNone/>
             </a:pPr>
             <a:r>
@@ -7349,28 +7378,6 @@
       </p:sp>
       <p:sp>
         <p:nvSpPr>
-          <p:cNvPr id="6" name="Shape 4"/>
-          <p:cNvSpPr/>
-          <p:nvPr/>
-        </p:nvSpPr>
-        <p:spPr>
-          <a:xfrm>
-            <a:off x="11356848" y="6236208"/>
-            <a:ext cx="384048" cy="384048"/>
-          </a:xfrm>
-          <a:prstGeom prst="ellipse">
-            <a:avLst/>
-          </a:prstGeom>
-          <a:ln w="19050">
-            <a:solidFill>
-              <a:srgbClr val="E8000D"/>
-            </a:solidFill>
-            <a:prstDash val="solid"/>
-          </a:ln>
-        </p:spPr>
-      </p:sp>
-      <p:sp>
-        <p:nvSpPr>
           <p:cNvPr id="7" name="Text 5"/>
           <p:cNvSpPr txBox="1"/>
           <p:nvPr/>
@@ -7390,11 +7397,11 @@
           <a:bodyPr wrap="square" lIns="0" tIns="0" rIns="0" bIns="0" rtlCol="0" anchor="ctr"/>
           <a:lstStyle/>
           <a:p>
-            <a:pPr indent="0" marL="0">
-              <a:buNone/>
-            </a:pPr>
-            <a:r>
-              <a:rPr lang="en-US" sz="800" spc="200" kern="0" dirty="0">
+            <a:pPr marL="0" indent="0">
+              <a:buNone/>
+            </a:pPr>
+            <a:r>
+              <a:rPr lang="en-US" sz="800" kern="0" spc="200" dirty="0">
                 <a:solidFill>
                   <a:srgbClr val="444444"/>
                 </a:solidFill>
@@ -7429,7 +7436,7 @@
           <a:bodyPr wrap="square" lIns="0" tIns="0" rIns="0" bIns="0" rtlCol="0" anchor="ctr"/>
           <a:lstStyle/>
           <a:p>
-            <a:pPr algn="r" indent="0" marL="0">
+            <a:pPr marL="0" indent="0" algn="r">
               <a:buNone/>
             </a:pPr>
             <a:r>
@@ -7449,7 +7456,7 @@
       </p:sp>
       <p:graphicFrame>
         <p:nvGraphicFramePr>
-          <p:cNvPr id="9" name="Chart 0" descr=""/>
+          <p:cNvPr id="9" name="Chart 0"/>
           <p:cNvGraphicFramePr/>
           <p:nvPr/>
         </p:nvGraphicFramePr>
@@ -7457,9 +7464,9 @@
           <a:off x="731520" y="1737360"/>
           <a:ext cx="6161532" cy="4389120"/>
         </p:xfrm>
-        <a:graphic xmlns:a="http://schemas.openxmlformats.org/drawingml/2006/main">
+        <a:graphic>
           <a:graphicData uri="http://schemas.openxmlformats.org/drawingml/2006/chart">
-            <c:chart xmlns:c="http://schemas.openxmlformats.org/drawingml/2006/chart" r:id="rId1"/>
+            <c:chart xmlns:c="http://schemas.openxmlformats.org/drawingml/2006/chart" xmlns:r="http://schemas.openxmlformats.org/officeDocument/2006/relationships" r:id="rId3"/>
           </a:graphicData>
         </a:graphic>
       </p:graphicFrame>
@@ -7484,11 +7491,11 @@
           <a:bodyPr wrap="square" lIns="0" tIns="0" rIns="0" bIns="0" rtlCol="0" anchor="ctr"/>
           <a:lstStyle/>
           <a:p>
-            <a:pPr indent="0" marL="0">
-              <a:buNone/>
-            </a:pPr>
-            <a:r>
-              <a:rPr lang="en-US" sz="900" spc="200" kern="0" dirty="0">
+            <a:pPr marL="0" indent="0">
+              <a:buNone/>
+            </a:pPr>
+            <a:r>
+              <a:rPr lang="en-US" sz="900" kern="0" spc="200" dirty="0">
                 <a:solidFill>
                   <a:srgbClr val="E8000D"/>
                 </a:solidFill>
@@ -7523,7 +7530,7 @@
           <a:bodyPr wrap="square" lIns="0" tIns="0" rIns="0" bIns="0" rtlCol="0" anchor="t"/>
           <a:lstStyle/>
           <a:p>
-            <a:pPr indent="0" marL="0">
+            <a:pPr marL="0" indent="0">
               <a:buNone/>
             </a:pPr>
             <a:r>
@@ -7562,11 +7569,11 @@
           <a:bodyPr wrap="square" lIns="0" tIns="0" rIns="0" bIns="0" rtlCol="0" anchor="ctr"/>
           <a:lstStyle/>
           <a:p>
-            <a:pPr indent="0" marL="0">
-              <a:buNone/>
-            </a:pPr>
-            <a:r>
-              <a:rPr lang="en-US" sz="900" spc="200" kern="0" dirty="0">
+            <a:pPr marL="0" indent="0">
+              <a:buNone/>
+            </a:pPr>
+            <a:r>
+              <a:rPr lang="en-US" sz="900" kern="0" spc="200" dirty="0">
                 <a:solidFill>
                   <a:srgbClr val="444444"/>
                 </a:solidFill>
@@ -7601,7 +7608,7 @@
           <a:bodyPr wrap="square" lIns="0" tIns="0" rIns="0" bIns="0" rtlCol="0" anchor="t"/>
           <a:lstStyle/>
           <a:p>
-            <a:pPr indent="0" marL="0">
+            <a:pPr marL="0" indent="0">
               <a:buNone/>
             </a:pPr>
             <a:r>
@@ -7640,11 +7647,11 @@
           <a:bodyPr wrap="square" lIns="0" tIns="0" rIns="0" bIns="0" rtlCol="0" anchor="ctr"/>
           <a:lstStyle/>
           <a:p>
-            <a:pPr indent="0" marL="0">
-              <a:buNone/>
-            </a:pPr>
-            <a:r>
-              <a:rPr lang="en-US" sz="900" spc="200" kern="0" dirty="0">
+            <a:pPr marL="0" indent="0">
+              <a:buNone/>
+            </a:pPr>
+            <a:r>
+              <a:rPr lang="en-US" sz="900" kern="0" spc="200" dirty="0">
                 <a:solidFill>
                   <a:srgbClr val="444444"/>
                 </a:solidFill>
@@ -7679,7 +7686,7 @@
           <a:bodyPr wrap="square" lIns="0" tIns="0" rIns="0" bIns="0" rtlCol="0" anchor="t"/>
           <a:lstStyle/>
           <a:p>
-            <a:pPr indent="0" marL="0">
+            <a:pPr marL="0" indent="0">
               <a:buNone/>
             </a:pPr>
             <a:r>
@@ -7713,6 +7720,7 @@
         <a:solidFill>
           <a:srgbClr val="FFFFFF"/>
         </a:solidFill>
+        <a:effectLst/>
       </p:bgPr>
     </p:bg>
     <p:spTree>
@@ -7775,11 +7783,11 @@
           <a:bodyPr wrap="square" lIns="0" tIns="0" rIns="0" bIns="0" rtlCol="0" anchor="ctr"/>
           <a:lstStyle/>
           <a:p>
-            <a:pPr indent="0" marL="0">
-              <a:buNone/>
-            </a:pPr>
-            <a:r>
-              <a:rPr lang="en-US" sz="1000" spc="300" kern="0" dirty="0">
+            <a:pPr marL="0" indent="0">
+              <a:buNone/>
+            </a:pPr>
+            <a:r>
+              <a:rPr lang="en-US" sz="1000" kern="0" spc="300" dirty="0">
                 <a:solidFill>
                   <a:srgbClr val="E8000D"/>
                 </a:solidFill>
@@ -7814,7 +7822,7 @@
           <a:bodyPr wrap="square" lIns="0" tIns="0" rIns="0" bIns="0" rtlCol="0" anchor="t"/>
           <a:lstStyle/>
           <a:p>
-            <a:pPr indent="0" marL="0">
+            <a:pPr marL="0" indent="0">
               <a:buNone/>
             </a:pPr>
             <a:r>
@@ -7857,28 +7865,6 @@
       </p:sp>
       <p:sp>
         <p:nvSpPr>
-          <p:cNvPr id="6" name="Shape 4"/>
-          <p:cNvSpPr/>
-          <p:nvPr/>
-        </p:nvSpPr>
-        <p:spPr>
-          <a:xfrm>
-            <a:off x="11356848" y="6236208"/>
-            <a:ext cx="384048" cy="384048"/>
-          </a:xfrm>
-          <a:prstGeom prst="ellipse">
-            <a:avLst/>
-          </a:prstGeom>
-          <a:ln w="19050">
-            <a:solidFill>
-              <a:srgbClr val="E8000D"/>
-            </a:solidFill>
-            <a:prstDash val="solid"/>
-          </a:ln>
-        </p:spPr>
-      </p:sp>
-      <p:sp>
-        <p:nvSpPr>
           <p:cNvPr id="7" name="Text 5"/>
           <p:cNvSpPr txBox="1"/>
           <p:nvPr/>
@@ -7898,11 +7884,11 @@
           <a:bodyPr wrap="square" lIns="0" tIns="0" rIns="0" bIns="0" rtlCol="0" anchor="ctr"/>
           <a:lstStyle/>
           <a:p>
-            <a:pPr indent="0" marL="0">
-              <a:buNone/>
-            </a:pPr>
-            <a:r>
-              <a:rPr lang="en-US" sz="800" spc="200" kern="0" dirty="0">
+            <a:pPr marL="0" indent="0">
+              <a:buNone/>
+            </a:pPr>
+            <a:r>
+              <a:rPr lang="en-US" sz="800" kern="0" spc="200" dirty="0">
                 <a:solidFill>
                   <a:srgbClr val="444444"/>
                 </a:solidFill>
@@ -7937,7 +7923,7 @@
           <a:bodyPr wrap="square" lIns="0" tIns="0" rIns="0" bIns="0" rtlCol="0" anchor="ctr"/>
           <a:lstStyle/>
           <a:p>
-            <a:pPr algn="r" indent="0" marL="0">
+            <a:pPr marL="0" indent="0" algn="r">
               <a:buNone/>
             </a:pPr>
             <a:r>
@@ -8001,7 +7987,7 @@
           <a:bodyPr wrap="square" lIns="0" tIns="0" rIns="0" bIns="0" rtlCol="0" anchor="ctr"/>
           <a:lstStyle/>
           <a:p>
-            <a:pPr indent="0" marL="0">
+            <a:pPr marL="0" indent="0">
               <a:buNone/>
             </a:pPr>
             <a:r>
@@ -8040,7 +8026,7 @@
           <a:bodyPr wrap="square" lIns="0" tIns="0" rIns="0" bIns="0" rtlCol="0" anchor="ctr"/>
           <a:lstStyle/>
           <a:p>
-            <a:pPr indent="0" marL="0">
+            <a:pPr marL="0" indent="0">
               <a:buNone/>
             </a:pPr>
             <a:r>
@@ -8079,7 +8065,7 @@
           <a:bodyPr wrap="square" lIns="0" tIns="0" rIns="0" bIns="0" rtlCol="0" anchor="ctr"/>
           <a:lstStyle/>
           <a:p>
-            <a:pPr indent="0" marL="0">
+            <a:pPr marL="0" indent="0">
               <a:buNone/>
             </a:pPr>
             <a:r>
@@ -8118,7 +8104,7 @@
           <a:bodyPr wrap="square" lIns="0" tIns="0" rIns="0" bIns="0" rtlCol="0" anchor="ctr"/>
           <a:lstStyle/>
           <a:p>
-            <a:pPr algn="ctr" indent="0" marL="0">
+            <a:pPr marL="0" indent="0" algn="ctr">
               <a:buNone/>
             </a:pPr>
             <a:r>
@@ -8182,7 +8168,7 @@
           <a:bodyPr wrap="square" lIns="0" tIns="0" rIns="0" bIns="0" rtlCol="0" anchor="ctr"/>
           <a:lstStyle/>
           <a:p>
-            <a:pPr indent="0" marL="0">
+            <a:pPr marL="0" indent="0">
               <a:buNone/>
             </a:pPr>
             <a:r>
@@ -8221,7 +8207,7 @@
           <a:bodyPr wrap="square" lIns="0" tIns="0" rIns="0" bIns="0" rtlCol="0" anchor="ctr"/>
           <a:lstStyle/>
           <a:p>
-            <a:pPr indent="0" marL="0">
+            <a:pPr marL="0" indent="0">
               <a:buNone/>
             </a:pPr>
             <a:r>
@@ -8260,7 +8246,7 @@
           <a:bodyPr wrap="square" lIns="0" tIns="0" rIns="0" bIns="0" rtlCol="0" anchor="ctr"/>
           <a:lstStyle/>
           <a:p>
-            <a:pPr indent="0" marL="0">
+            <a:pPr marL="0" indent="0">
               <a:buNone/>
             </a:pPr>
             <a:r>
@@ -8299,7 +8285,7 @@
           <a:bodyPr wrap="square" lIns="0" tIns="0" rIns="0" bIns="0" rtlCol="0" anchor="ctr"/>
           <a:lstStyle/>
           <a:p>
-            <a:pPr algn="ctr" indent="0" marL="0">
+            <a:pPr marL="0" indent="0" algn="ctr">
               <a:buNone/>
             </a:pPr>
             <a:r>
@@ -8363,7 +8349,7 @@
           <a:bodyPr wrap="square" lIns="0" tIns="0" rIns="0" bIns="0" rtlCol="0" anchor="ctr"/>
           <a:lstStyle/>
           <a:p>
-            <a:pPr indent="0" marL="0">
+            <a:pPr marL="0" indent="0">
               <a:buNone/>
             </a:pPr>
             <a:r>
@@ -8402,7 +8388,7 @@
           <a:bodyPr wrap="square" lIns="0" tIns="0" rIns="0" bIns="0" rtlCol="0" anchor="ctr"/>
           <a:lstStyle/>
           <a:p>
-            <a:pPr indent="0" marL="0">
+            <a:pPr marL="0" indent="0">
               <a:buNone/>
             </a:pPr>
             <a:r>
@@ -8441,7 +8427,7 @@
           <a:bodyPr wrap="square" lIns="0" tIns="0" rIns="0" bIns="0" rtlCol="0" anchor="ctr"/>
           <a:lstStyle/>
           <a:p>
-            <a:pPr indent="0" marL="0">
+            <a:pPr marL="0" indent="0">
               <a:buNone/>
             </a:pPr>
             <a:r>
@@ -8480,7 +8466,7 @@
           <a:bodyPr wrap="square" lIns="0" tIns="0" rIns="0" bIns="0" rtlCol="0" anchor="ctr"/>
           <a:lstStyle/>
           <a:p>
-            <a:pPr algn="ctr" indent="0" marL="0">
+            <a:pPr marL="0" indent="0" algn="ctr">
               <a:buNone/>
             </a:pPr>
             <a:r>
@@ -8544,7 +8530,7 @@
           <a:bodyPr wrap="square" lIns="0" tIns="0" rIns="0" bIns="0" rtlCol="0" anchor="ctr"/>
           <a:lstStyle/>
           <a:p>
-            <a:pPr indent="0" marL="0">
+            <a:pPr marL="0" indent="0">
               <a:buNone/>
             </a:pPr>
             <a:r>
@@ -8583,7 +8569,7 @@
           <a:bodyPr wrap="square" lIns="0" tIns="0" rIns="0" bIns="0" rtlCol="0" anchor="ctr"/>
           <a:lstStyle/>
           <a:p>
-            <a:pPr indent="0" marL="0">
+            <a:pPr marL="0" indent="0">
               <a:buNone/>
             </a:pPr>
             <a:r>
@@ -8622,7 +8608,7 @@
           <a:bodyPr wrap="square" lIns="0" tIns="0" rIns="0" bIns="0" rtlCol="0" anchor="ctr"/>
           <a:lstStyle/>
           <a:p>
-            <a:pPr indent="0" marL="0">
+            <a:pPr marL="0" indent="0">
               <a:buNone/>
             </a:pPr>
             <a:r>
@@ -8661,7 +8647,7 @@
           <a:bodyPr wrap="square" lIns="0" tIns="0" rIns="0" bIns="0" rtlCol="0" anchor="ctr"/>
           <a:lstStyle/>
           <a:p>
-            <a:pPr indent="0" marL="0">
+            <a:pPr marL="0" indent="0">
               <a:buNone/>
             </a:pPr>
             <a:r>
@@ -8700,7 +8686,7 @@
           <a:bodyPr wrap="square" lIns="0" tIns="0" rIns="0" bIns="0" rtlCol="0" anchor="ctr"/>
           <a:lstStyle/>
           <a:p>
-            <a:pPr indent="0" marL="0">
+            <a:pPr marL="0" indent="0">
               <a:buNone/>
             </a:pPr>
             <a:r>
@@ -8739,7 +8725,7 @@
           <a:bodyPr wrap="square" lIns="0" tIns="0" rIns="0" bIns="0" rtlCol="0" anchor="ctr"/>
           <a:lstStyle/>
           <a:p>
-            <a:pPr indent="0" marL="0">
+            <a:pPr marL="0" indent="0">
               <a:buNone/>
             </a:pPr>
             <a:r>
@@ -8778,7 +8764,7 @@
           <a:bodyPr wrap="square" lIns="0" tIns="0" rIns="0" bIns="0" rtlCol="0" anchor="ctr"/>
           <a:lstStyle/>
           <a:p>
-            <a:pPr indent="0" marL="0">
+            <a:pPr marL="0" indent="0">
               <a:buNone/>
             </a:pPr>
             <a:r>
@@ -8817,7 +8803,7 @@
           <a:bodyPr wrap="square" lIns="0" tIns="0" rIns="0" bIns="0" rtlCol="0" anchor="ctr"/>
           <a:lstStyle/>
           <a:p>
-            <a:pPr indent="0" marL="0">
+            <a:pPr marL="0" indent="0">
               <a:buNone/>
             </a:pPr>
             <a:r>
@@ -8856,7 +8842,7 @@
           <a:bodyPr wrap="square" lIns="0" tIns="0" rIns="0" bIns="0" rtlCol="0" anchor="ctr"/>
           <a:lstStyle/>
           <a:p>
-            <a:pPr indent="0" marL="0">
+            <a:pPr marL="0" indent="0">
               <a:buNone/>
             </a:pPr>
             <a:r>
@@ -8890,6 +8876,7 @@
         <a:solidFill>
           <a:srgbClr val="FFFFFF"/>
         </a:solidFill>
+        <a:effectLst/>
       </p:bgPr>
     </p:bg>
     <p:spTree>
@@ -8952,11 +8939,11 @@
           <a:bodyPr wrap="square" lIns="0" tIns="0" rIns="0" bIns="0" rtlCol="0" anchor="ctr"/>
           <a:lstStyle/>
           <a:p>
-            <a:pPr indent="0" marL="0">
-              <a:buNone/>
-            </a:pPr>
-            <a:r>
-              <a:rPr lang="en-US" sz="1000" spc="300" kern="0" dirty="0">
+            <a:pPr marL="0" indent="0">
+              <a:buNone/>
+            </a:pPr>
+            <a:r>
+              <a:rPr lang="en-US" sz="1000" kern="0" spc="300" dirty="0">
                 <a:solidFill>
                   <a:srgbClr val="E8000D"/>
                 </a:solidFill>
@@ -8991,7 +8978,7 @@
           <a:bodyPr wrap="square" lIns="0" tIns="0" rIns="0" bIns="0" rtlCol="0" anchor="t"/>
           <a:lstStyle/>
           <a:p>
-            <a:pPr indent="0" marL="0">
+            <a:pPr marL="0" indent="0">
               <a:buNone/>
             </a:pPr>
             <a:r>
@@ -9034,28 +9021,6 @@
       </p:sp>
       <p:sp>
         <p:nvSpPr>
-          <p:cNvPr id="6" name="Shape 4"/>
-          <p:cNvSpPr/>
-          <p:nvPr/>
-        </p:nvSpPr>
-        <p:spPr>
-          <a:xfrm>
-            <a:off x="11356848" y="6236208"/>
-            <a:ext cx="384048" cy="384048"/>
-          </a:xfrm>
-          <a:prstGeom prst="ellipse">
-            <a:avLst/>
-          </a:prstGeom>
-          <a:ln w="19050">
-            <a:solidFill>
-              <a:srgbClr val="E8000D"/>
-            </a:solidFill>
-            <a:prstDash val="solid"/>
-          </a:ln>
-        </p:spPr>
-      </p:sp>
-      <p:sp>
-        <p:nvSpPr>
           <p:cNvPr id="7" name="Text 5"/>
           <p:cNvSpPr txBox="1"/>
           <p:nvPr/>
@@ -9075,11 +9040,11 @@
           <a:bodyPr wrap="square" lIns="0" tIns="0" rIns="0" bIns="0" rtlCol="0" anchor="ctr"/>
           <a:lstStyle/>
           <a:p>
-            <a:pPr indent="0" marL="0">
-              <a:buNone/>
-            </a:pPr>
-            <a:r>
-              <a:rPr lang="en-US" sz="800" spc="200" kern="0" dirty="0">
+            <a:pPr marL="0" indent="0">
+              <a:buNone/>
+            </a:pPr>
+            <a:r>
+              <a:rPr lang="en-US" sz="800" kern="0" spc="200" dirty="0">
                 <a:solidFill>
                   <a:srgbClr val="444444"/>
                 </a:solidFill>
@@ -9114,7 +9079,7 @@
           <a:bodyPr wrap="square" lIns="0" tIns="0" rIns="0" bIns="0" rtlCol="0" anchor="ctr"/>
           <a:lstStyle/>
           <a:p>
-            <a:pPr algn="r" indent="0" marL="0">
+            <a:pPr marL="0" indent="0" algn="r">
               <a:buNone/>
             </a:pPr>
             <a:r>
@@ -9153,7 +9118,7 @@
           <a:bodyPr wrap="square" lIns="0" tIns="0" rIns="0" bIns="0" rtlCol="0" anchor="ctr"/>
           <a:lstStyle/>
           <a:p>
-            <a:pPr indent="0" marL="0">
+            <a:pPr marL="0" indent="0">
               <a:buNone/>
             </a:pPr>
             <a:r>
@@ -9192,7 +9157,7 @@
           <a:bodyPr wrap="square" lIns="0" tIns="0" rIns="0" bIns="0" rtlCol="0" anchor="ctr"/>
           <a:lstStyle/>
           <a:p>
-            <a:pPr indent="0" marL="0">
+            <a:pPr marL="0" indent="0">
               <a:buNone/>
             </a:pPr>
             <a:r>
@@ -9231,7 +9196,7 @@
           <a:bodyPr wrap="square" lIns="0" tIns="0" rIns="0" bIns="0" rtlCol="0" anchor="t"/>
           <a:lstStyle/>
           <a:p>
-            <a:pPr indent="0" marL="0">
+            <a:pPr marL="0" indent="0">
               <a:buNone/>
             </a:pPr>
             <a:r>
@@ -9270,7 +9235,7 @@
           <a:bodyPr wrap="square" lIns="0" tIns="0" rIns="0" bIns="0" rtlCol="0" anchor="ctr"/>
           <a:lstStyle/>
           <a:p>
-            <a:pPr indent="0" marL="0">
+            <a:pPr marL="0" indent="0">
               <a:buNone/>
             </a:pPr>
             <a:r>
@@ -9309,7 +9274,7 @@
           <a:bodyPr wrap="square" lIns="0" tIns="0" rIns="0" bIns="0" rtlCol="0" anchor="ctr"/>
           <a:lstStyle/>
           <a:p>
-            <a:pPr indent="0" marL="0">
+            <a:pPr marL="0" indent="0">
               <a:buNone/>
             </a:pPr>
             <a:r>
@@ -9348,7 +9313,7 @@
           <a:bodyPr wrap="square" lIns="0" tIns="0" rIns="0" bIns="0" rtlCol="0" anchor="t"/>
           <a:lstStyle/>
           <a:p>
-            <a:pPr indent="0" marL="0">
+            <a:pPr marL="0" indent="0">
               <a:buNone/>
             </a:pPr>
             <a:r>
@@ -9387,7 +9352,7 @@
           <a:bodyPr wrap="square" lIns="0" tIns="0" rIns="0" bIns="0" rtlCol="0" anchor="ctr"/>
           <a:lstStyle/>
           <a:p>
-            <a:pPr indent="0" marL="0">
+            <a:pPr marL="0" indent="0">
               <a:buNone/>
             </a:pPr>
             <a:r>
@@ -9426,7 +9391,7 @@
           <a:bodyPr wrap="square" lIns="0" tIns="0" rIns="0" bIns="0" rtlCol="0" anchor="ctr"/>
           <a:lstStyle/>
           <a:p>
-            <a:pPr indent="0" marL="0">
+            <a:pPr marL="0" indent="0">
               <a:buNone/>
             </a:pPr>
             <a:r>
@@ -9465,7 +9430,7 @@
           <a:bodyPr wrap="square" lIns="0" tIns="0" rIns="0" bIns="0" rtlCol="0" anchor="t"/>
           <a:lstStyle/>
           <a:p>
-            <a:pPr indent="0" marL="0">
+            <a:pPr marL="0" indent="0">
               <a:buNone/>
             </a:pPr>
             <a:r>
@@ -9504,7 +9469,7 @@
           <a:bodyPr wrap="square" lIns="0" tIns="0" rIns="0" bIns="0" rtlCol="0" anchor="ctr"/>
           <a:lstStyle/>
           <a:p>
-            <a:pPr indent="0" marL="0">
+            <a:pPr marL="0" indent="0">
               <a:buNone/>
             </a:pPr>
             <a:r>
@@ -9543,7 +9508,7 @@
           <a:bodyPr wrap="square" lIns="0" tIns="0" rIns="0" bIns="0" rtlCol="0" anchor="ctr"/>
           <a:lstStyle/>
           <a:p>
-            <a:pPr indent="0" marL="0">
+            <a:pPr marL="0" indent="0">
               <a:buNone/>
             </a:pPr>
             <a:r>
@@ -9582,7 +9547,7 @@
           <a:bodyPr wrap="square" lIns="0" tIns="0" rIns="0" bIns="0" rtlCol="0" anchor="t"/>
           <a:lstStyle/>
           <a:p>
-            <a:pPr indent="0" marL="0">
+            <a:pPr marL="0" indent="0">
               <a:buNone/>
             </a:pPr>
             <a:r>
@@ -9646,11 +9611,11 @@
           <a:bodyPr wrap="square" lIns="0" tIns="0" rIns="0" bIns="0" rtlCol="0" anchor="ctr"/>
           <a:lstStyle/>
           <a:p>
-            <a:pPr indent="0" marL="0">
-              <a:buNone/>
-            </a:pPr>
-            <a:r>
-              <a:rPr lang="en-US" sz="900" spc="200" kern="0" dirty="0">
+            <a:pPr marL="0" indent="0">
+              <a:buNone/>
+            </a:pPr>
+            <a:r>
+              <a:rPr lang="en-US" sz="900" kern="0" spc="200" dirty="0">
                 <a:solidFill>
                   <a:srgbClr val="E8000D"/>
                 </a:solidFill>
@@ -9807,6 +9772,7 @@
         <a:solidFill>
           <a:srgbClr val="FFFFFF"/>
         </a:solidFill>
+        <a:effectLst/>
       </p:bgPr>
     </p:bg>
     <p:spTree>
@@ -9869,11 +9835,11 @@
           <a:bodyPr wrap="square" lIns="0" tIns="0" rIns="0" bIns="0" rtlCol="0" anchor="ctr"/>
           <a:lstStyle/>
           <a:p>
-            <a:pPr indent="0" marL="0">
-              <a:buNone/>
-            </a:pPr>
-            <a:r>
-              <a:rPr lang="en-US" sz="1000" spc="300" kern="0" dirty="0">
+            <a:pPr marL="0" indent="0">
+              <a:buNone/>
+            </a:pPr>
+            <a:r>
+              <a:rPr lang="en-US" sz="1000" kern="0" spc="300" dirty="0">
                 <a:solidFill>
                   <a:srgbClr val="E8000D"/>
                 </a:solidFill>
@@ -9908,7 +9874,7 @@
           <a:bodyPr wrap="square" lIns="0" tIns="0" rIns="0" bIns="0" rtlCol="0" anchor="t"/>
           <a:lstStyle/>
           <a:p>
-            <a:pPr indent="0" marL="0">
+            <a:pPr marL="0" indent="0">
               <a:buNone/>
             </a:pPr>
             <a:r>
@@ -9951,28 +9917,6 @@
       </p:sp>
       <p:sp>
         <p:nvSpPr>
-          <p:cNvPr id="6" name="Shape 4"/>
-          <p:cNvSpPr/>
-          <p:nvPr/>
-        </p:nvSpPr>
-        <p:spPr>
-          <a:xfrm>
-            <a:off x="11356848" y="6236208"/>
-            <a:ext cx="384048" cy="384048"/>
-          </a:xfrm>
-          <a:prstGeom prst="ellipse">
-            <a:avLst/>
-          </a:prstGeom>
-          <a:ln w="19050">
-            <a:solidFill>
-              <a:srgbClr val="E8000D"/>
-            </a:solidFill>
-            <a:prstDash val="solid"/>
-          </a:ln>
-        </p:spPr>
-      </p:sp>
-      <p:sp>
-        <p:nvSpPr>
           <p:cNvPr id="7" name="Text 5"/>
           <p:cNvSpPr txBox="1"/>
           <p:nvPr/>
@@ -9992,11 +9936,11 @@
           <a:bodyPr wrap="square" lIns="0" tIns="0" rIns="0" bIns="0" rtlCol="0" anchor="ctr"/>
           <a:lstStyle/>
           <a:p>
-            <a:pPr indent="0" marL="0">
-              <a:buNone/>
-            </a:pPr>
-            <a:r>
-              <a:rPr lang="en-US" sz="800" spc="200" kern="0" dirty="0">
+            <a:pPr marL="0" indent="0">
+              <a:buNone/>
+            </a:pPr>
+            <a:r>
+              <a:rPr lang="en-US" sz="800" kern="0" spc="200" dirty="0">
                 <a:solidFill>
                   <a:srgbClr val="444444"/>
                 </a:solidFill>
@@ -10031,7 +9975,7 @@
           <a:bodyPr wrap="square" lIns="0" tIns="0" rIns="0" bIns="0" rtlCol="0" anchor="ctr"/>
           <a:lstStyle/>
           <a:p>
-            <a:pPr algn="r" indent="0" marL="0">
+            <a:pPr marL="0" indent="0" algn="r">
               <a:buNone/>
             </a:pPr>
             <a:r>
@@ -10070,7 +10014,7 @@
           <a:bodyPr wrap="square" lIns="0" tIns="0" rIns="0" bIns="0" rtlCol="0" anchor="b"/>
           <a:lstStyle/>
           <a:p>
-            <a:pPr indent="0" marL="0">
+            <a:pPr marL="0" indent="0">
               <a:buNone/>
             </a:pPr>
             <a:r>
@@ -10109,7 +10053,7 @@
           <a:bodyPr wrap="square" lIns="0" tIns="0" rIns="0" bIns="0" rtlCol="0" anchor="t"/>
           <a:lstStyle/>
           <a:p>
-            <a:pPr indent="0" marL="0">
+            <a:pPr marL="0" indent="0">
               <a:buNone/>
             </a:pPr>
             <a:r>
@@ -10126,7 +10070,7 @@
             <a:endParaRPr lang="en-US" sz="1400" dirty="0"/>
           </a:p>
           <a:p>
-            <a:pPr indent="0" marL="0">
+            <a:pPr marL="0" indent="0">
               <a:buNone/>
             </a:pPr>
             <a:r>
@@ -10165,7 +10109,7 @@
           <a:bodyPr wrap="square" lIns="0" tIns="0" rIns="0" bIns="0" rtlCol="0" anchor="b"/>
           <a:lstStyle/>
           <a:p>
-            <a:pPr indent="0" marL="0">
+            <a:pPr marL="0" indent="0">
               <a:buNone/>
             </a:pPr>
             <a:r>
@@ -10204,7 +10148,7 @@
           <a:bodyPr wrap="square" lIns="0" tIns="0" rIns="0" bIns="0" rtlCol="0" anchor="t"/>
           <a:lstStyle/>
           <a:p>
-            <a:pPr indent="0" marL="0">
+            <a:pPr marL="0" indent="0">
               <a:buNone/>
             </a:pPr>
             <a:r>
@@ -10221,7 +10165,7 @@
             <a:endParaRPr lang="en-US" sz="1400" dirty="0"/>
           </a:p>
           <a:p>
-            <a:pPr indent="0" marL="0">
+            <a:pPr marL="0" indent="0">
               <a:buNone/>
             </a:pPr>
             <a:r>
@@ -10260,7 +10204,7 @@
           <a:bodyPr wrap="square" lIns="0" tIns="0" rIns="0" bIns="0" rtlCol="0" anchor="b"/>
           <a:lstStyle/>
           <a:p>
-            <a:pPr indent="0" marL="0">
+            <a:pPr marL="0" indent="0">
               <a:buNone/>
             </a:pPr>
             <a:r>
@@ -10299,7 +10243,7 @@
           <a:bodyPr wrap="square" lIns="0" tIns="0" rIns="0" bIns="0" rtlCol="0" anchor="t"/>
           <a:lstStyle/>
           <a:p>
-            <a:pPr indent="0" marL="0">
+            <a:pPr marL="0" indent="0">
               <a:buNone/>
             </a:pPr>
             <a:r>
@@ -10361,11 +10305,11 @@
           <a:bodyPr wrap="square" lIns="0" tIns="0" rIns="0" bIns="0" rtlCol="0" anchor="ctr"/>
           <a:lstStyle/>
           <a:p>
-            <a:pPr indent="0" marL="0">
-              <a:buNone/>
-            </a:pPr>
-            <a:r>
-              <a:rPr lang="en-US" sz="900" spc="200" kern="0" dirty="0">
+            <a:pPr marL="0" indent="0">
+              <a:buNone/>
+            </a:pPr>
+            <a:r>
+              <a:rPr lang="en-US" sz="900" kern="0" spc="200" dirty="0">
                 <a:solidFill>
                   <a:srgbClr val="444444"/>
                 </a:solidFill>
@@ -10400,7 +10344,7 @@
           <a:bodyPr wrap="square" lIns="0" tIns="0" rIns="0" bIns="0" rtlCol="0" anchor="ctr"/>
           <a:lstStyle/>
           <a:p>
-            <a:pPr indent="0" marL="0">
+            <a:pPr marL="0" indent="0">
               <a:buNone/>
             </a:pPr>
             <a:r>
@@ -10439,11 +10383,11 @@
           <a:bodyPr wrap="square" lIns="0" tIns="0" rIns="0" bIns="0" rtlCol="0" anchor="ctr"/>
           <a:lstStyle/>
           <a:p>
-            <a:pPr indent="0" marL="0">
-              <a:buNone/>
-            </a:pPr>
-            <a:r>
-              <a:rPr lang="en-US" sz="900" spc="200" kern="0" dirty="0">
+            <a:pPr marL="0" indent="0">
+              <a:buNone/>
+            </a:pPr>
+            <a:r>
+              <a:rPr lang="en-US" sz="900" kern="0" spc="200" dirty="0">
                 <a:solidFill>
                   <a:srgbClr val="444444"/>
                 </a:solidFill>
@@ -10478,7 +10422,7 @@
           <a:bodyPr wrap="square" lIns="0" tIns="0" rIns="0" bIns="0" rtlCol="0" anchor="t"/>
           <a:lstStyle/>
           <a:p>
-            <a:pPr indent="0" marL="0">
+            <a:pPr marL="0" indent="0">
               <a:buNone/>
             </a:pPr>
             <a:r>
@@ -10517,11 +10461,11 @@
           <a:bodyPr wrap="square" lIns="0" tIns="0" rIns="0" bIns="0" rtlCol="0" anchor="ctr"/>
           <a:lstStyle/>
           <a:p>
-            <a:pPr indent="0" marL="0">
-              <a:buNone/>
-            </a:pPr>
-            <a:r>
-              <a:rPr lang="en-US" sz="900" spc="200" kern="0" dirty="0">
+            <a:pPr marL="0" indent="0">
+              <a:buNone/>
+            </a:pPr>
+            <a:r>
+              <a:rPr lang="en-US" sz="900" kern="0" spc="200" dirty="0">
                 <a:solidFill>
                   <a:srgbClr val="444444"/>
                 </a:solidFill>
@@ -10556,7 +10500,7 @@
           <a:bodyPr wrap="square" lIns="0" tIns="0" rIns="0" bIns="0" rtlCol="0" anchor="t"/>
           <a:lstStyle/>
           <a:p>
-            <a:pPr indent="0" marL="0">
+            <a:pPr marL="0" indent="0">
               <a:buNone/>
             </a:pPr>
             <a:r>
@@ -10590,6 +10534,7 @@
         <a:solidFill>
           <a:srgbClr val="FFFFFF"/>
         </a:solidFill>
+        <a:effectLst/>
       </p:bgPr>
     </p:bg>
     <p:spTree>
@@ -10652,11 +10597,11 @@
           <a:bodyPr wrap="square" lIns="0" tIns="0" rIns="0" bIns="0" rtlCol="0" anchor="ctr"/>
           <a:lstStyle/>
           <a:p>
-            <a:pPr indent="0" marL="0">
-              <a:buNone/>
-            </a:pPr>
-            <a:r>
-              <a:rPr lang="en-US" sz="1000" spc="300" kern="0" dirty="0">
+            <a:pPr marL="0" indent="0">
+              <a:buNone/>
+            </a:pPr>
+            <a:r>
+              <a:rPr lang="en-US" sz="1000" kern="0" spc="300" dirty="0">
                 <a:solidFill>
                   <a:srgbClr val="E8000D"/>
                 </a:solidFill>
@@ -10691,7 +10636,7 @@
           <a:bodyPr wrap="square" lIns="0" tIns="0" rIns="0" bIns="0" rtlCol="0" anchor="t"/>
           <a:lstStyle/>
           <a:p>
-            <a:pPr indent="0" marL="0">
+            <a:pPr marL="0" indent="0">
               <a:buNone/>
             </a:pPr>
             <a:r>
@@ -10734,28 +10679,6 @@
       </p:sp>
       <p:sp>
         <p:nvSpPr>
-          <p:cNvPr id="6" name="Shape 4"/>
-          <p:cNvSpPr/>
-          <p:nvPr/>
-        </p:nvSpPr>
-        <p:spPr>
-          <a:xfrm>
-            <a:off x="11356848" y="6236208"/>
-            <a:ext cx="384048" cy="384048"/>
-          </a:xfrm>
-          <a:prstGeom prst="ellipse">
-            <a:avLst/>
-          </a:prstGeom>
-          <a:ln w="19050">
-            <a:solidFill>
-              <a:srgbClr val="E8000D"/>
-            </a:solidFill>
-            <a:prstDash val="solid"/>
-          </a:ln>
-        </p:spPr>
-      </p:sp>
-      <p:sp>
-        <p:nvSpPr>
           <p:cNvPr id="7" name="Text 5"/>
           <p:cNvSpPr txBox="1"/>
           <p:nvPr/>
@@ -10775,11 +10698,11 @@
           <a:bodyPr wrap="square" lIns="0" tIns="0" rIns="0" bIns="0" rtlCol="0" anchor="ctr"/>
           <a:lstStyle/>
           <a:p>
-            <a:pPr indent="0" marL="0">
-              <a:buNone/>
-            </a:pPr>
-            <a:r>
-              <a:rPr lang="en-US" sz="800" spc="200" kern="0" dirty="0">
+            <a:pPr marL="0" indent="0">
+              <a:buNone/>
+            </a:pPr>
+            <a:r>
+              <a:rPr lang="en-US" sz="800" kern="0" spc="200" dirty="0">
                 <a:solidFill>
                   <a:srgbClr val="444444"/>
                 </a:solidFill>
@@ -10814,7 +10737,7 @@
           <a:bodyPr wrap="square" lIns="0" tIns="0" rIns="0" bIns="0" rtlCol="0" anchor="ctr"/>
           <a:lstStyle/>
           <a:p>
-            <a:pPr algn="r" indent="0" marL="0">
+            <a:pPr marL="0" indent="0" algn="r">
               <a:buNone/>
             </a:pPr>
             <a:r>
@@ -10878,11 +10801,11 @@
           <a:bodyPr wrap="square" lIns="0" tIns="0" rIns="0" bIns="0" rtlCol="0" anchor="ctr"/>
           <a:lstStyle/>
           <a:p>
-            <a:pPr indent="0" marL="0">
-              <a:buNone/>
-            </a:pPr>
-            <a:r>
-              <a:rPr lang="en-US" sz="1000" spc="200" kern="0" dirty="0">
+            <a:pPr marL="0" indent="0">
+              <a:buNone/>
+            </a:pPr>
+            <a:r>
+              <a:rPr lang="en-US" sz="1000" kern="0" spc="200" dirty="0">
                 <a:solidFill>
                   <a:srgbClr val="E8000D"/>
                 </a:solidFill>
@@ -10917,7 +10840,7 @@
           <a:bodyPr wrap="square" lIns="0" tIns="0" rIns="0" bIns="0" rtlCol="0" anchor="t"/>
           <a:lstStyle/>
           <a:p>
-            <a:pPr indent="0" marL="0">
+            <a:pPr marL="0" indent="0">
               <a:buNone/>
             </a:pPr>
             <a:r>
@@ -10934,7 +10857,7 @@
             <a:endParaRPr lang="en-US" sz="1300" dirty="0"/>
           </a:p>
           <a:p>
-            <a:pPr indent="0" marL="0">
+            <a:pPr marL="0" indent="0">
               <a:buNone/>
             </a:pPr>
             <a:r>
@@ -10998,11 +10921,11 @@
           <a:bodyPr wrap="square" lIns="0" tIns="0" rIns="0" bIns="0" rtlCol="0" anchor="ctr"/>
           <a:lstStyle/>
           <a:p>
-            <a:pPr indent="0" marL="0">
-              <a:buNone/>
-            </a:pPr>
-            <a:r>
-              <a:rPr lang="en-US" sz="1000" spc="200" kern="0" dirty="0">
+            <a:pPr marL="0" indent="0">
+              <a:buNone/>
+            </a:pPr>
+            <a:r>
+              <a:rPr lang="en-US" sz="1000" kern="0" spc="200" dirty="0">
                 <a:solidFill>
                   <a:srgbClr val="E8000D"/>
                 </a:solidFill>
@@ -11037,7 +10960,7 @@
           <a:bodyPr wrap="square" lIns="0" tIns="0" rIns="0" bIns="0" rtlCol="0" anchor="t"/>
           <a:lstStyle/>
           <a:p>
-            <a:pPr indent="0" marL="0">
+            <a:pPr marL="0" indent="0">
               <a:buNone/>
             </a:pPr>
             <a:r>
@@ -11054,7 +10977,7 @@
             <a:endParaRPr lang="en-US" sz="1300" dirty="0"/>
           </a:p>
           <a:p>
-            <a:pPr indent="0" marL="0">
+            <a:pPr marL="0" indent="0">
               <a:buNone/>
             </a:pPr>
             <a:r>
@@ -11093,7 +11016,7 @@
           <a:bodyPr wrap="square" lIns="0" tIns="0" rIns="0" bIns="0" rtlCol="0" anchor="ctr"/>
           <a:lstStyle/>
           <a:p>
-            <a:pPr algn="ctr" indent="0" marL="0">
+            <a:pPr marL="0" indent="0" algn="ctr">
               <a:buNone/>
             </a:pPr>
             <a:r>
@@ -11113,14 +11036,14 @@
       </p:sp>
       <p:pic>
         <p:nvPicPr>
-          <p:cNvPr id="16" name="Image 0" descr="C:\Users\ravse\OneDrive\Рабочий стол\BioStorageApoc\results\figures\fig_a3_prices.png">    </p:cNvPr>
+          <p:cNvPr id="16" name="Image 0" descr="C:\Users\ravse\OneDrive\Рабочий стол\BioStorageApoc\results\figures\fig_a3_prices.png"/>
           <p:cNvPicPr>
             <a:picLocks noChangeAspect="1"/>
           </p:cNvPicPr>
           <p:nvPr/>
         </p:nvPicPr>
         <p:blipFill>
-          <a:blip r:embed="rId1"/>
+          <a:blip r:embed="rId3"/>
           <a:stretch>
             <a:fillRect/>
           </a:stretch>
@@ -11151,6 +11074,7 @@
         <a:solidFill>
           <a:srgbClr val="FFFFFF"/>
         </a:solidFill>
+        <a:effectLst/>
       </p:bgPr>
     </p:bg>
     <p:spTree>
@@ -11213,11 +11137,11 @@
           <a:bodyPr wrap="square" lIns="0" tIns="0" rIns="0" bIns="0" rtlCol="0" anchor="ctr"/>
           <a:lstStyle/>
           <a:p>
-            <a:pPr indent="0" marL="0">
-              <a:buNone/>
-            </a:pPr>
-            <a:r>
-              <a:rPr lang="en-US" sz="1000" spc="300" kern="0" dirty="0">
+            <a:pPr marL="0" indent="0">
+              <a:buNone/>
+            </a:pPr>
+            <a:r>
+              <a:rPr lang="en-US" sz="1000" kern="0" spc="300" dirty="0">
                 <a:solidFill>
                   <a:srgbClr val="E8000D"/>
                 </a:solidFill>
@@ -11252,7 +11176,7 @@
           <a:bodyPr wrap="square" lIns="0" tIns="0" rIns="0" bIns="0" rtlCol="0" anchor="t"/>
           <a:lstStyle/>
           <a:p>
-            <a:pPr indent="0" marL="0">
+            <a:pPr marL="0" indent="0">
               <a:buNone/>
             </a:pPr>
             <a:r>
@@ -11295,28 +11219,6 @@
       </p:sp>
       <p:sp>
         <p:nvSpPr>
-          <p:cNvPr id="6" name="Shape 4"/>
-          <p:cNvSpPr/>
-          <p:nvPr/>
-        </p:nvSpPr>
-        <p:spPr>
-          <a:xfrm>
-            <a:off x="11356848" y="6236208"/>
-            <a:ext cx="384048" cy="384048"/>
-          </a:xfrm>
-          <a:prstGeom prst="ellipse">
-            <a:avLst/>
-          </a:prstGeom>
-          <a:ln w="19050">
-            <a:solidFill>
-              <a:srgbClr val="E8000D"/>
-            </a:solidFill>
-            <a:prstDash val="solid"/>
-          </a:ln>
-        </p:spPr>
-      </p:sp>
-      <p:sp>
-        <p:nvSpPr>
           <p:cNvPr id="7" name="Text 5"/>
           <p:cNvSpPr txBox="1"/>
           <p:nvPr/>
@@ -11336,11 +11238,11 @@
           <a:bodyPr wrap="square" lIns="0" tIns="0" rIns="0" bIns="0" rtlCol="0" anchor="ctr"/>
           <a:lstStyle/>
           <a:p>
-            <a:pPr indent="0" marL="0">
-              <a:buNone/>
-            </a:pPr>
-            <a:r>
-              <a:rPr lang="en-US" sz="800" spc="200" kern="0" dirty="0">
+            <a:pPr marL="0" indent="0">
+              <a:buNone/>
+            </a:pPr>
+            <a:r>
+              <a:rPr lang="en-US" sz="800" kern="0" spc="200" dirty="0">
                 <a:solidFill>
                   <a:srgbClr val="444444"/>
                 </a:solidFill>
@@ -11375,7 +11277,7 @@
           <a:bodyPr wrap="square" lIns="0" tIns="0" rIns="0" bIns="0" rtlCol="0" anchor="ctr"/>
           <a:lstStyle/>
           <a:p>
-            <a:pPr algn="r" indent="0" marL="0">
+            <a:pPr marL="0" indent="0" algn="r">
               <a:buNone/>
             </a:pPr>
             <a:r>
@@ -11414,7 +11316,7 @@
           <a:bodyPr wrap="square" lIns="0" tIns="0" rIns="0" bIns="0" rtlCol="0" anchor="ctr"/>
           <a:lstStyle/>
           <a:p>
-            <a:pPr indent="0" marL="0">
+            <a:pPr marL="0" indent="0">
               <a:buNone/>
             </a:pPr>
             <a:r>
@@ -11476,7 +11378,7 @@
           <a:bodyPr wrap="square" lIns="0" tIns="0" rIns="0" bIns="0" rtlCol="0" anchor="ctr"/>
           <a:lstStyle/>
           <a:p>
-            <a:pPr algn="ctr" indent="0" marL="0">
+            <a:pPr marL="0" indent="0" algn="ctr">
               <a:buNone/>
             </a:pPr>
             <a:r>
@@ -11538,7 +11440,7 @@
           <a:bodyPr wrap="square" lIns="0" tIns="0" rIns="0" bIns="0" rtlCol="0" anchor="ctr"/>
           <a:lstStyle/>
           <a:p>
-            <a:pPr algn="ctr" indent="0" marL="0">
+            <a:pPr marL="0" indent="0" algn="ctr">
               <a:buNone/>
             </a:pPr>
             <a:r>
@@ -11600,7 +11502,7 @@
           <a:bodyPr wrap="square" lIns="0" tIns="0" rIns="0" bIns="0" rtlCol="0" anchor="ctr"/>
           <a:lstStyle/>
           <a:p>
-            <a:pPr algn="ctr" indent="0" marL="0">
+            <a:pPr marL="0" indent="0" algn="ctr">
               <a:buNone/>
             </a:pPr>
             <a:r>
@@ -11662,7 +11564,7 @@
           <a:bodyPr wrap="square" lIns="0" tIns="0" rIns="0" bIns="0" rtlCol="0" anchor="ctr"/>
           <a:lstStyle/>
           <a:p>
-            <a:pPr algn="ctr" indent="0" marL="0">
+            <a:pPr marL="0" indent="0" algn="ctr">
               <a:buNone/>
             </a:pPr>
             <a:r>
@@ -11701,7 +11603,7 @@
           <a:bodyPr wrap="square" lIns="0" tIns="0" rIns="0" bIns="0" rtlCol="0" anchor="ctr"/>
           <a:lstStyle/>
           <a:p>
-            <a:pPr algn="r" indent="0" marL="0">
+            <a:pPr marL="0" indent="0" algn="r">
               <a:buNone/>
             </a:pPr>
             <a:r>
@@ -11765,7 +11667,7 @@
           <a:bodyPr wrap="square" lIns="0" tIns="0" rIns="0" bIns="0" rtlCol="0" anchor="ctr"/>
           <a:lstStyle/>
           <a:p>
-            <a:pPr indent="0" marL="0">
+            <a:pPr marL="0" indent="0">
               <a:buNone/>
             </a:pPr>
             <a:r>
@@ -11804,7 +11706,7 @@
           <a:bodyPr wrap="square" lIns="0" tIns="0" rIns="0" bIns="0" rtlCol="0" anchor="ctr"/>
           <a:lstStyle/>
           <a:p>
-            <a:pPr algn="r" indent="0" marL="0">
+            <a:pPr marL="0" indent="0" algn="r">
               <a:buNone/>
             </a:pPr>
             <a:r>
@@ -11868,7 +11770,7 @@
           <a:bodyPr wrap="square" lIns="0" tIns="0" rIns="0" bIns="0" rtlCol="0" anchor="ctr"/>
           <a:lstStyle/>
           <a:p>
-            <a:pPr indent="0" marL="0">
+            <a:pPr marL="0" indent="0">
               <a:buNone/>
             </a:pPr>
             <a:r>
@@ -11907,7 +11809,7 @@
           <a:bodyPr wrap="square" lIns="0" tIns="0" rIns="0" bIns="0" rtlCol="0" anchor="ctr"/>
           <a:lstStyle/>
           <a:p>
-            <a:pPr algn="r" indent="0" marL="0">
+            <a:pPr marL="0" indent="0" algn="r">
               <a:buNone/>
             </a:pPr>
             <a:r>
@@ -11971,7 +11873,7 @@
           <a:bodyPr wrap="square" lIns="0" tIns="0" rIns="0" bIns="0" rtlCol="0" anchor="ctr"/>
           <a:lstStyle/>
           <a:p>
-            <a:pPr indent="0" marL="0">
+            <a:pPr marL="0" indent="0">
               <a:buNone/>
             </a:pPr>
             <a:r>
@@ -12010,7 +11912,7 @@
           <a:bodyPr wrap="square" lIns="0" tIns="0" rIns="0" bIns="0" rtlCol="0" anchor="ctr"/>
           <a:lstStyle/>
           <a:p>
-            <a:pPr algn="r" indent="0" marL="0">
+            <a:pPr marL="0" indent="0" algn="r">
               <a:buNone/>
             </a:pPr>
             <a:r>
@@ -12074,7 +11976,7 @@
           <a:bodyPr wrap="square" lIns="0" tIns="0" rIns="0" bIns="0" rtlCol="0" anchor="ctr"/>
           <a:lstStyle/>
           <a:p>
-            <a:pPr indent="0" marL="0">
+            <a:pPr marL="0" indent="0">
               <a:buNone/>
             </a:pPr>
             <a:r>
@@ -12113,7 +12015,7 @@
           <a:bodyPr wrap="square" lIns="0" tIns="0" rIns="0" bIns="0" rtlCol="0" anchor="ctr"/>
           <a:lstStyle/>
           <a:p>
-            <a:pPr algn="r" indent="0" marL="0">
+            <a:pPr marL="0" indent="0" algn="r">
               <a:buNone/>
             </a:pPr>
             <a:r>
@@ -12177,7 +12079,7 @@
           <a:bodyPr wrap="square" lIns="0" tIns="0" rIns="0" bIns="0" rtlCol="0" anchor="ctr"/>
           <a:lstStyle/>
           <a:p>
-            <a:pPr indent="0" marL="0">
+            <a:pPr marL="0" indent="0">
               <a:buNone/>
             </a:pPr>
             <a:r>
@@ -12216,7 +12118,7 @@
           <a:bodyPr wrap="square" lIns="0" tIns="0" rIns="0" bIns="0" rtlCol="0" anchor="ctr"/>
           <a:lstStyle/>
           <a:p>
-            <a:pPr algn="r" indent="0" marL="0">
+            <a:pPr marL="0" indent="0" algn="r">
               <a:buNone/>
             </a:pPr>
             <a:r>
@@ -12280,7 +12182,7 @@
           <a:bodyPr wrap="square" lIns="0" tIns="0" rIns="0" bIns="0" rtlCol="0" anchor="ctr"/>
           <a:lstStyle/>
           <a:p>
-            <a:pPr indent="0" marL="0">
+            <a:pPr marL="0" indent="0">
               <a:buNone/>
             </a:pPr>
             <a:r>
@@ -12319,7 +12221,7 @@
           <a:bodyPr wrap="square" lIns="0" tIns="0" rIns="0" bIns="0" rtlCol="0" anchor="ctr"/>
           <a:lstStyle/>
           <a:p>
-            <a:pPr algn="r" indent="0" marL="0">
+            <a:pPr marL="0" indent="0" algn="r">
               <a:buNone/>
             </a:pPr>
             <a:r>
@@ -12383,7 +12285,7 @@
           <a:bodyPr wrap="square" lIns="0" tIns="0" rIns="0" bIns="0" rtlCol="0" anchor="ctr"/>
           <a:lstStyle/>
           <a:p>
-            <a:pPr indent="0" marL="0">
+            <a:pPr marL="0" indent="0">
               <a:buNone/>
             </a:pPr>
             <a:r>
@@ -12422,11 +12324,11 @@
           <a:bodyPr wrap="square" lIns="0" tIns="0" rIns="0" bIns="0" rtlCol="0" anchor="ctr"/>
           <a:lstStyle/>
           <a:p>
-            <a:pPr indent="0" marL="0">
-              <a:buNone/>
-            </a:pPr>
-            <a:r>
-              <a:rPr lang="en-US" sz="900" spc="200" kern="0" dirty="0">
+            <a:pPr marL="0" indent="0">
+              <a:buNone/>
+            </a:pPr>
+            <a:r>
+              <a:rPr lang="en-US" sz="900" kern="0" spc="200" dirty="0">
                 <a:solidFill>
                   <a:srgbClr val="E8000D"/>
                 </a:solidFill>
@@ -12461,7 +12363,7 @@
           <a:bodyPr wrap="square" lIns="0" tIns="0" rIns="0" bIns="0" rtlCol="0" anchor="t"/>
           <a:lstStyle/>
           <a:p>
-            <a:pPr indent="0" marL="0">
+            <a:pPr marL="0" indent="0">
               <a:buNone/>
             </a:pPr>
             <a:r>
@@ -12500,11 +12402,11 @@
           <a:bodyPr wrap="square" lIns="0" tIns="0" rIns="0" bIns="0" rtlCol="0" anchor="ctr"/>
           <a:lstStyle/>
           <a:p>
-            <a:pPr indent="0" marL="0">
-              <a:buNone/>
-            </a:pPr>
-            <a:r>
-              <a:rPr lang="en-US" sz="900" spc="200" kern="0" dirty="0">
+            <a:pPr marL="0" indent="0">
+              <a:buNone/>
+            </a:pPr>
+            <a:r>
+              <a:rPr lang="en-US" sz="900" kern="0" spc="200" dirty="0">
                 <a:solidFill>
                   <a:srgbClr val="444444"/>
                 </a:solidFill>
@@ -12539,7 +12441,7 @@
           <a:bodyPr wrap="square" lIns="0" tIns="0" rIns="0" bIns="0" rtlCol="0" anchor="t"/>
           <a:lstStyle/>
           <a:p>
-            <a:pPr indent="0" marL="0">
+            <a:pPr marL="0" indent="0">
               <a:buNone/>
             </a:pPr>
             <a:r>
@@ -12578,11 +12480,11 @@
           <a:bodyPr wrap="square" lIns="0" tIns="0" rIns="0" bIns="0" rtlCol="0" anchor="ctr"/>
           <a:lstStyle/>
           <a:p>
-            <a:pPr indent="0" marL="0">
-              <a:buNone/>
-            </a:pPr>
-            <a:r>
-              <a:rPr lang="en-US" sz="900" spc="200" kern="0" dirty="0">
+            <a:pPr marL="0" indent="0">
+              <a:buNone/>
+            </a:pPr>
+            <a:r>
+              <a:rPr lang="en-US" sz="900" kern="0" spc="200" dirty="0">
                 <a:solidFill>
                   <a:srgbClr val="444444"/>
                 </a:solidFill>
@@ -12617,7 +12519,7 @@
           <a:bodyPr wrap="square" lIns="0" tIns="0" rIns="0" bIns="0" rtlCol="0" anchor="t"/>
           <a:lstStyle/>
           <a:p>
-            <a:pPr indent="0" marL="0">
+            <a:pPr marL="0" indent="0">
               <a:buNone/>
             </a:pPr>
             <a:r>
@@ -12656,11 +12558,11 @@
           <a:bodyPr wrap="square" lIns="0" tIns="0" rIns="0" bIns="0" rtlCol="0" anchor="ctr"/>
           <a:lstStyle/>
           <a:p>
-            <a:pPr indent="0" marL="0">
-              <a:buNone/>
-            </a:pPr>
-            <a:r>
-              <a:rPr lang="en-US" sz="900" spc="200" kern="0" dirty="0">
+            <a:pPr marL="0" indent="0">
+              <a:buNone/>
+            </a:pPr>
+            <a:r>
+              <a:rPr lang="en-US" sz="900" kern="0" spc="200" dirty="0">
                 <a:solidFill>
                   <a:srgbClr val="444444"/>
                 </a:solidFill>
@@ -12695,7 +12597,7 @@
           <a:bodyPr wrap="square" lIns="0" tIns="0" rIns="0" bIns="0" rtlCol="0" anchor="t"/>
           <a:lstStyle/>
           <a:p>
-            <a:pPr indent="0" marL="0">
+            <a:pPr marL="0" indent="0">
               <a:buNone/>
             </a:pPr>
             <a:r>
@@ -12729,6 +12631,7 @@
         <a:solidFill>
           <a:srgbClr val="FFFFFF"/>
         </a:solidFill>
+        <a:effectLst/>
       </p:bgPr>
     </p:bg>
     <p:spTree>
@@ -12791,11 +12694,11 @@
           <a:bodyPr wrap="square" lIns="0" tIns="0" rIns="0" bIns="0" rtlCol="0" anchor="ctr"/>
           <a:lstStyle/>
           <a:p>
-            <a:pPr indent="0" marL="0">
-              <a:buNone/>
-            </a:pPr>
-            <a:r>
-              <a:rPr lang="en-US" sz="1000" spc="300" kern="0" dirty="0">
+            <a:pPr marL="0" indent="0">
+              <a:buNone/>
+            </a:pPr>
+            <a:r>
+              <a:rPr lang="en-US" sz="1000" kern="0" spc="300" dirty="0">
                 <a:solidFill>
                   <a:srgbClr val="E8000D"/>
                 </a:solidFill>
@@ -12830,7 +12733,7 @@
           <a:bodyPr wrap="square" lIns="0" tIns="0" rIns="0" bIns="0" rtlCol="0" anchor="t"/>
           <a:lstStyle/>
           <a:p>
-            <a:pPr indent="0" marL="0">
+            <a:pPr marL="0" indent="0">
               <a:buNone/>
             </a:pPr>
             <a:r>
@@ -12873,28 +12776,6 @@
       </p:sp>
       <p:sp>
         <p:nvSpPr>
-          <p:cNvPr id="6" name="Shape 4"/>
-          <p:cNvSpPr/>
-          <p:nvPr/>
-        </p:nvSpPr>
-        <p:spPr>
-          <a:xfrm>
-            <a:off x="11356848" y="6236208"/>
-            <a:ext cx="384048" cy="384048"/>
-          </a:xfrm>
-          <a:prstGeom prst="ellipse">
-            <a:avLst/>
-          </a:prstGeom>
-          <a:ln w="19050">
-            <a:solidFill>
-              <a:srgbClr val="E8000D"/>
-            </a:solidFill>
-            <a:prstDash val="solid"/>
-          </a:ln>
-        </p:spPr>
-      </p:sp>
-      <p:sp>
-        <p:nvSpPr>
           <p:cNvPr id="7" name="Text 5"/>
           <p:cNvSpPr txBox="1"/>
           <p:nvPr/>
@@ -12914,11 +12795,11 @@
           <a:bodyPr wrap="square" lIns="0" tIns="0" rIns="0" bIns="0" rtlCol="0" anchor="ctr"/>
           <a:lstStyle/>
           <a:p>
-            <a:pPr indent="0" marL="0">
-              <a:buNone/>
-            </a:pPr>
-            <a:r>
-              <a:rPr lang="en-US" sz="800" spc="200" kern="0" dirty="0">
+            <a:pPr marL="0" indent="0">
+              <a:buNone/>
+            </a:pPr>
+            <a:r>
+              <a:rPr lang="en-US" sz="800" kern="0" spc="200" dirty="0">
                 <a:solidFill>
                   <a:srgbClr val="444444"/>
                 </a:solidFill>
@@ -12953,7 +12834,7 @@
           <a:bodyPr wrap="square" lIns="0" tIns="0" rIns="0" bIns="0" rtlCol="0" anchor="ctr"/>
           <a:lstStyle/>
           <a:p>
-            <a:pPr algn="r" indent="0" marL="0">
+            <a:pPr marL="0" indent="0" algn="r">
               <a:buNone/>
             </a:pPr>
             <a:r>
@@ -12973,14 +12854,14 @@
       </p:sp>
       <p:pic>
         <p:nvPicPr>
-          <p:cNvPr id="9" name="Image 0" descr="C:\Users\ravse\OneDrive\Рабочий стол\BioStorageApoc\results\figures\fig_a1_archive_growth.png">    </p:cNvPr>
+          <p:cNvPr id="9" name="Image 0" descr="C:\Users\ravse\OneDrive\Рабочий стол\BioStorageApoc\results\figures\fig_a1_archive_growth.png"/>
           <p:cNvPicPr>
             <a:picLocks noChangeAspect="1"/>
           </p:cNvPicPr>
           <p:nvPr/>
         </p:nvPicPr>
         <p:blipFill>
-          <a:blip r:embed="rId1"/>
+          <a:blip r:embed="rId3"/>
           <a:stretch>
             <a:fillRect/>
           </a:stretch>
@@ -13016,7 +12897,7 @@
           <a:bodyPr wrap="square" lIns="0" tIns="0" rIns="0" bIns="0" rtlCol="0" anchor="b"/>
           <a:lstStyle/>
           <a:p>
-            <a:pPr indent="0" marL="0">
+            <a:pPr marL="0" indent="0">
               <a:buNone/>
             </a:pPr>
             <a:r>
@@ -13055,7 +12936,7 @@
           <a:bodyPr wrap="square" lIns="0" tIns="0" rIns="0" bIns="0" rtlCol="0" anchor="t"/>
           <a:lstStyle/>
           <a:p>
-            <a:pPr indent="0" marL="0">
+            <a:pPr marL="0" indent="0">
               <a:buNone/>
             </a:pPr>
             <a:r>
@@ -13094,7 +12975,7 @@
           <a:bodyPr wrap="square" lIns="0" tIns="0" rIns="0" bIns="0" rtlCol="0" anchor="b"/>
           <a:lstStyle/>
           <a:p>
-            <a:pPr indent="0" marL="0">
+            <a:pPr marL="0" indent="0">
               <a:buNone/>
             </a:pPr>
             <a:r>
@@ -13133,7 +13014,7 @@
           <a:bodyPr wrap="square" lIns="0" tIns="0" rIns="0" bIns="0" rtlCol="0" anchor="t"/>
           <a:lstStyle/>
           <a:p>
-            <a:pPr indent="0" marL="0">
+            <a:pPr marL="0" indent="0">
               <a:buNone/>
             </a:pPr>
             <a:r>
@@ -13172,7 +13053,7 @@
           <a:bodyPr wrap="square" lIns="0" tIns="0" rIns="0" bIns="0" rtlCol="0" anchor="b"/>
           <a:lstStyle/>
           <a:p>
-            <a:pPr indent="0" marL="0">
+            <a:pPr marL="0" indent="0">
               <a:buNone/>
             </a:pPr>
             <a:r>
@@ -13211,7 +13092,7 @@
           <a:bodyPr wrap="square" lIns="0" tIns="0" rIns="0" bIns="0" rtlCol="0" anchor="t"/>
           <a:lstStyle/>
           <a:p>
-            <a:pPr indent="0" marL="0">
+            <a:pPr marL="0" indent="0">
               <a:buNone/>
             </a:pPr>
             <a:r>
@@ -13245,6 +13126,7 @@
         <a:solidFill>
           <a:srgbClr val="FFFFFF"/>
         </a:solidFill>
+        <a:effectLst/>
       </p:bgPr>
     </p:bg>
     <p:spTree>
@@ -13307,11 +13189,11 @@
           <a:bodyPr wrap="square" lIns="0" tIns="0" rIns="0" bIns="0" rtlCol="0" anchor="ctr"/>
           <a:lstStyle/>
           <a:p>
-            <a:pPr indent="0" marL="0">
-              <a:buNone/>
-            </a:pPr>
-            <a:r>
-              <a:rPr lang="en-US" sz="1000" spc="300" kern="0" dirty="0">
+            <a:pPr marL="0" indent="0">
+              <a:buNone/>
+            </a:pPr>
+            <a:r>
+              <a:rPr lang="en-US" sz="1000" kern="0" spc="300" dirty="0">
                 <a:solidFill>
                   <a:srgbClr val="E8000D"/>
                 </a:solidFill>
@@ -13346,7 +13228,7 @@
           <a:bodyPr wrap="square" lIns="0" tIns="0" rIns="0" bIns="0" rtlCol="0" anchor="t"/>
           <a:lstStyle/>
           <a:p>
-            <a:pPr indent="0" marL="0">
+            <a:pPr marL="0" indent="0">
               <a:buNone/>
             </a:pPr>
             <a:r>
@@ -13389,28 +13271,6 @@
       </p:sp>
       <p:sp>
         <p:nvSpPr>
-          <p:cNvPr id="6" name="Shape 4"/>
-          <p:cNvSpPr/>
-          <p:nvPr/>
-        </p:nvSpPr>
-        <p:spPr>
-          <a:xfrm>
-            <a:off x="11356848" y="6236208"/>
-            <a:ext cx="384048" cy="384048"/>
-          </a:xfrm>
-          <a:prstGeom prst="ellipse">
-            <a:avLst/>
-          </a:prstGeom>
-          <a:ln w="19050">
-            <a:solidFill>
-              <a:srgbClr val="E8000D"/>
-            </a:solidFill>
-            <a:prstDash val="solid"/>
-          </a:ln>
-        </p:spPr>
-      </p:sp>
-      <p:sp>
-        <p:nvSpPr>
           <p:cNvPr id="7" name="Text 5"/>
           <p:cNvSpPr txBox="1"/>
           <p:nvPr/>
@@ -13430,11 +13290,11 @@
           <a:bodyPr wrap="square" lIns="0" tIns="0" rIns="0" bIns="0" rtlCol="0" anchor="ctr"/>
           <a:lstStyle/>
           <a:p>
-            <a:pPr indent="0" marL="0">
-              <a:buNone/>
-            </a:pPr>
-            <a:r>
-              <a:rPr lang="en-US" sz="800" spc="200" kern="0" dirty="0">
+            <a:pPr marL="0" indent="0">
+              <a:buNone/>
+            </a:pPr>
+            <a:r>
+              <a:rPr lang="en-US" sz="800" kern="0" spc="200" dirty="0">
                 <a:solidFill>
                   <a:srgbClr val="444444"/>
                 </a:solidFill>
@@ -13469,7 +13329,7 @@
           <a:bodyPr wrap="square" lIns="0" tIns="0" rIns="0" bIns="0" rtlCol="0" anchor="ctr"/>
           <a:lstStyle/>
           <a:p>
-            <a:pPr algn="r" indent="0" marL="0">
+            <a:pPr marL="0" indent="0" algn="r">
               <a:buNone/>
             </a:pPr>
             <a:r>
@@ -13489,14 +13349,14 @@
       </p:sp>
       <p:pic>
         <p:nvPicPr>
-          <p:cNvPr id="9" name="Image 0" descr="C:\Users\ravse\OneDrive\Рабочий стол\BioStorageApoc\results\figures\fig_a2_instruments_platforms.png">    </p:cNvPr>
+          <p:cNvPr id="9" name="Image 0" descr="C:\Users\ravse\OneDrive\Рабочий стол\BioStorageApoc\results\figures\fig_a2_instruments_platforms.png"/>
           <p:cNvPicPr>
             <a:picLocks noChangeAspect="1"/>
           </p:cNvPicPr>
           <p:nvPr/>
         </p:nvPicPr>
         <p:blipFill>
-          <a:blip r:embed="rId1"/>
+          <a:blip r:embed="rId3"/>
           <a:stretch>
             <a:fillRect/>
           </a:stretch>
@@ -13532,7 +13392,7 @@
           <a:bodyPr wrap="square" lIns="0" tIns="0" rIns="0" bIns="0" rtlCol="0" anchor="b"/>
           <a:lstStyle/>
           <a:p>
-            <a:pPr indent="0" marL="0">
+            <a:pPr marL="0" indent="0">
               <a:buNone/>
             </a:pPr>
             <a:r>
@@ -13571,7 +13431,7 @@
           <a:bodyPr wrap="square" lIns="0" tIns="0" rIns="0" bIns="0" rtlCol="0" anchor="t"/>
           <a:lstStyle/>
           <a:p>
-            <a:pPr indent="0" marL="0">
+            <a:pPr marL="0" indent="0">
               <a:buNone/>
             </a:pPr>
             <a:r>
@@ -13610,7 +13470,7 @@
           <a:bodyPr wrap="square" lIns="0" tIns="0" rIns="0" bIns="0" rtlCol="0" anchor="b"/>
           <a:lstStyle/>
           <a:p>
-            <a:pPr indent="0" marL="0">
+            <a:pPr marL="0" indent="0">
               <a:buNone/>
             </a:pPr>
             <a:r>
@@ -13649,7 +13509,7 @@
           <a:bodyPr wrap="square" lIns="0" tIns="0" rIns="0" bIns="0" rtlCol="0" anchor="t"/>
           <a:lstStyle/>
           <a:p>
-            <a:pPr indent="0" marL="0">
+            <a:pPr marL="0" indent="0">
               <a:buNone/>
             </a:pPr>
             <a:r>
@@ -13688,7 +13548,7 @@
           <a:bodyPr wrap="square" lIns="0" tIns="0" rIns="0" bIns="0" rtlCol="0" anchor="b"/>
           <a:lstStyle/>
           <a:p>
-            <a:pPr indent="0" marL="0">
+            <a:pPr marL="0" indent="0">
               <a:buNone/>
             </a:pPr>
             <a:r>
@@ -13727,7 +13587,7 @@
           <a:bodyPr wrap="square" lIns="0" tIns="0" rIns="0" bIns="0" rtlCol="0" anchor="t"/>
           <a:lstStyle/>
           <a:p>
-            <a:pPr indent="0" marL="0">
+            <a:pPr marL="0" indent="0">
               <a:buNone/>
             </a:pPr>
             <a:r>
@@ -13761,6 +13621,7 @@
         <a:solidFill>
           <a:srgbClr val="FFFFFF"/>
         </a:solidFill>
+        <a:effectLst/>
       </p:bgPr>
     </p:bg>
     <p:spTree>
@@ -13823,11 +13684,11 @@
           <a:bodyPr wrap="square" lIns="0" tIns="0" rIns="0" bIns="0" rtlCol="0" anchor="ctr"/>
           <a:lstStyle/>
           <a:p>
-            <a:pPr indent="0" marL="0">
-              <a:buNone/>
-            </a:pPr>
-            <a:r>
-              <a:rPr lang="en-US" sz="1000" spc="300" kern="0" dirty="0">
+            <a:pPr marL="0" indent="0">
+              <a:buNone/>
+            </a:pPr>
+            <a:r>
+              <a:rPr lang="en-US" sz="1000" kern="0" spc="300" dirty="0">
                 <a:solidFill>
                   <a:srgbClr val="E8000D"/>
                 </a:solidFill>
@@ -13862,7 +13723,7 @@
           <a:bodyPr wrap="square" lIns="0" tIns="0" rIns="0" bIns="0" rtlCol="0" anchor="t"/>
           <a:lstStyle/>
           <a:p>
-            <a:pPr indent="0" marL="0">
+            <a:pPr marL="0" indent="0">
               <a:buNone/>
             </a:pPr>
             <a:r>
@@ -13905,28 +13766,6 @@
       </p:sp>
       <p:sp>
         <p:nvSpPr>
-          <p:cNvPr id="6" name="Shape 4"/>
-          <p:cNvSpPr/>
-          <p:nvPr/>
-        </p:nvSpPr>
-        <p:spPr>
-          <a:xfrm>
-            <a:off x="11356848" y="6236208"/>
-            <a:ext cx="384048" cy="384048"/>
-          </a:xfrm>
-          <a:prstGeom prst="ellipse">
-            <a:avLst/>
-          </a:prstGeom>
-          <a:ln w="19050">
-            <a:solidFill>
-              <a:srgbClr val="E8000D"/>
-            </a:solidFill>
-            <a:prstDash val="solid"/>
-          </a:ln>
-        </p:spPr>
-      </p:sp>
-      <p:sp>
-        <p:nvSpPr>
           <p:cNvPr id="7" name="Text 5"/>
           <p:cNvSpPr txBox="1"/>
           <p:nvPr/>
@@ -13946,11 +13785,11 @@
           <a:bodyPr wrap="square" lIns="0" tIns="0" rIns="0" bIns="0" rtlCol="0" anchor="ctr"/>
           <a:lstStyle/>
           <a:p>
-            <a:pPr indent="0" marL="0">
-              <a:buNone/>
-            </a:pPr>
-            <a:r>
-              <a:rPr lang="en-US" sz="800" spc="200" kern="0" dirty="0">
+            <a:pPr marL="0" indent="0">
+              <a:buNone/>
+            </a:pPr>
+            <a:r>
+              <a:rPr lang="en-US" sz="800" kern="0" spc="200" dirty="0">
                 <a:solidFill>
                   <a:srgbClr val="444444"/>
                 </a:solidFill>
@@ -13985,7 +13824,7 @@
           <a:bodyPr wrap="square" lIns="0" tIns="0" rIns="0" bIns="0" rtlCol="0" anchor="ctr"/>
           <a:lstStyle/>
           <a:p>
-            <a:pPr algn="r" indent="0" marL="0">
+            <a:pPr marL="0" indent="0" algn="r">
               <a:buNone/>
             </a:pPr>
             <a:r>
@@ -14005,14 +13844,14 @@
       </p:sp>
       <p:pic>
         <p:nvPicPr>
-          <p:cNvPr id="9" name="Image 0" descr="C:\Users\ravse\OneDrive\Рабочий стол\BioStorageApoc\results\figures\fig_a4_crossover.png">    </p:cNvPr>
+          <p:cNvPr id="9" name="Image 0" descr="C:\Users\ravse\OneDrive\Рабочий стол\BioStorageApoc\results\figures\fig_a4_crossover.png"/>
           <p:cNvPicPr>
             <a:picLocks noChangeAspect="1"/>
           </p:cNvPicPr>
           <p:nvPr/>
         </p:nvPicPr>
         <p:blipFill>
-          <a:blip r:embed="rId1"/>
+          <a:blip r:embed="rId3"/>
           <a:stretch>
             <a:fillRect/>
           </a:stretch>
@@ -14048,11 +13887,11 @@
           <a:bodyPr wrap="square" lIns="0" tIns="0" rIns="0" bIns="0" rtlCol="0" anchor="ctr"/>
           <a:lstStyle/>
           <a:p>
-            <a:pPr indent="0" marL="0">
-              <a:buNone/>
-            </a:pPr>
-            <a:r>
-              <a:rPr lang="en-US" sz="900" spc="200" kern="0" dirty="0">
+            <a:pPr marL="0" indent="0">
+              <a:buNone/>
+            </a:pPr>
+            <a:r>
+              <a:rPr lang="en-US" sz="900" kern="0" spc="200" dirty="0">
                 <a:solidFill>
                   <a:srgbClr val="E8000D"/>
                 </a:solidFill>
@@ -14087,7 +13926,7 @@
           <a:bodyPr wrap="square" lIns="0" tIns="0" rIns="0" bIns="0" rtlCol="0" anchor="ctr"/>
           <a:lstStyle/>
           <a:p>
-            <a:pPr indent="0" marL="0">
+            <a:pPr marL="0" indent="0">
               <a:buNone/>
             </a:pPr>
             <a:r>
@@ -14126,11 +13965,11 @@
           <a:bodyPr wrap="square" lIns="0" tIns="0" rIns="0" bIns="0" rtlCol="0" anchor="ctr"/>
           <a:lstStyle/>
           <a:p>
-            <a:pPr indent="0" marL="0">
-              <a:buNone/>
-            </a:pPr>
-            <a:r>
-              <a:rPr lang="en-US" sz="900" spc="200" kern="0" dirty="0">
+            <a:pPr marL="0" indent="0">
+              <a:buNone/>
+            </a:pPr>
+            <a:r>
+              <a:rPr lang="en-US" sz="900" kern="0" spc="200" dirty="0">
                 <a:solidFill>
                   <a:srgbClr val="444444"/>
                 </a:solidFill>
@@ -14165,7 +14004,7 @@
           <a:bodyPr wrap="square" lIns="0" tIns="0" rIns="0" bIns="0" rtlCol="0" anchor="ctr"/>
           <a:lstStyle/>
           <a:p>
-            <a:pPr indent="0" marL="0">
+            <a:pPr marL="0" indent="0">
               <a:buNone/>
             </a:pPr>
             <a:r>
@@ -14204,11 +14043,11 @@
           <a:bodyPr wrap="square" lIns="0" tIns="0" rIns="0" bIns="0" rtlCol="0" anchor="ctr"/>
           <a:lstStyle/>
           <a:p>
-            <a:pPr indent="0" marL="0">
-              <a:buNone/>
-            </a:pPr>
-            <a:r>
-              <a:rPr lang="en-US" sz="900" spc="200" kern="0" dirty="0">
+            <a:pPr marL="0" indent="0">
+              <a:buNone/>
+            </a:pPr>
+            <a:r>
+              <a:rPr lang="en-US" sz="900" kern="0" spc="200" dirty="0">
                 <a:solidFill>
                   <a:srgbClr val="444444"/>
                 </a:solidFill>
@@ -14243,7 +14082,7 @@
           <a:bodyPr wrap="square" lIns="0" tIns="0" rIns="0" bIns="0" rtlCol="0" anchor="ctr"/>
           <a:lstStyle/>
           <a:p>
-            <a:pPr indent="0" marL="0">
+            <a:pPr marL="0" indent="0">
               <a:buNone/>
             </a:pPr>
             <a:r>
@@ -14282,11 +14121,11 @@
           <a:bodyPr wrap="square" lIns="0" tIns="0" rIns="0" bIns="0" rtlCol="0" anchor="ctr"/>
           <a:lstStyle/>
           <a:p>
-            <a:pPr indent="0" marL="0">
-              <a:buNone/>
-            </a:pPr>
-            <a:r>
-              <a:rPr lang="en-US" sz="900" spc="200" kern="0" dirty="0">
+            <a:pPr marL="0" indent="0">
+              <a:buNone/>
+            </a:pPr>
+            <a:r>
+              <a:rPr lang="en-US" sz="900" kern="0" spc="200" dirty="0">
                 <a:solidFill>
                   <a:srgbClr val="444444"/>
                 </a:solidFill>
@@ -14321,7 +14160,7 @@
           <a:bodyPr wrap="square" lIns="0" tIns="0" rIns="0" bIns="0" rtlCol="0" anchor="ctr"/>
           <a:lstStyle/>
           <a:p>
-            <a:pPr indent="0" marL="0">
+            <a:pPr marL="0" indent="0">
               <a:buNone/>
             </a:pPr>
             <a:r>
@@ -14355,6 +14194,7 @@
         <a:solidFill>
           <a:srgbClr val="FFFFFF"/>
         </a:solidFill>
+        <a:effectLst/>
       </p:bgPr>
     </p:bg>
     <p:spTree>
@@ -14417,11 +14257,11 @@
           <a:bodyPr wrap="square" lIns="0" tIns="0" rIns="0" bIns="0" rtlCol="0" anchor="ctr"/>
           <a:lstStyle/>
           <a:p>
-            <a:pPr indent="0" marL="0">
-              <a:buNone/>
-            </a:pPr>
-            <a:r>
-              <a:rPr lang="en-US" sz="1000" spc="300" kern="0" dirty="0">
+            <a:pPr marL="0" indent="0">
+              <a:buNone/>
+            </a:pPr>
+            <a:r>
+              <a:rPr lang="en-US" sz="1000" kern="0" spc="300" dirty="0">
                 <a:solidFill>
                   <a:srgbClr val="E8000D"/>
                 </a:solidFill>
@@ -14456,7 +14296,7 @@
           <a:bodyPr wrap="square" lIns="0" tIns="0" rIns="0" bIns="0" rtlCol="0" anchor="t"/>
           <a:lstStyle/>
           <a:p>
-            <a:pPr indent="0" marL="0">
+            <a:pPr marL="0" indent="0">
               <a:buNone/>
             </a:pPr>
             <a:r>
@@ -14499,28 +14339,6 @@
       </p:sp>
       <p:sp>
         <p:nvSpPr>
-          <p:cNvPr id="6" name="Shape 4"/>
-          <p:cNvSpPr/>
-          <p:nvPr/>
-        </p:nvSpPr>
-        <p:spPr>
-          <a:xfrm>
-            <a:off x="11356848" y="6236208"/>
-            <a:ext cx="384048" cy="384048"/>
-          </a:xfrm>
-          <a:prstGeom prst="ellipse">
-            <a:avLst/>
-          </a:prstGeom>
-          <a:ln w="19050">
-            <a:solidFill>
-              <a:srgbClr val="E8000D"/>
-            </a:solidFill>
-            <a:prstDash val="solid"/>
-          </a:ln>
-        </p:spPr>
-      </p:sp>
-      <p:sp>
-        <p:nvSpPr>
           <p:cNvPr id="7" name="Text 5"/>
           <p:cNvSpPr txBox="1"/>
           <p:nvPr/>
@@ -14540,11 +14358,11 @@
           <a:bodyPr wrap="square" lIns="0" tIns="0" rIns="0" bIns="0" rtlCol="0" anchor="ctr"/>
           <a:lstStyle/>
           <a:p>
-            <a:pPr indent="0" marL="0">
-              <a:buNone/>
-            </a:pPr>
-            <a:r>
-              <a:rPr lang="en-US" sz="800" spc="200" kern="0" dirty="0">
+            <a:pPr marL="0" indent="0">
+              <a:buNone/>
+            </a:pPr>
+            <a:r>
+              <a:rPr lang="en-US" sz="800" kern="0" spc="200" dirty="0">
                 <a:solidFill>
                   <a:srgbClr val="444444"/>
                 </a:solidFill>
@@ -14579,7 +14397,7 @@
           <a:bodyPr wrap="square" lIns="0" tIns="0" rIns="0" bIns="0" rtlCol="0" anchor="ctr"/>
           <a:lstStyle/>
           <a:p>
-            <a:pPr algn="r" indent="0" marL="0">
+            <a:pPr marL="0" indent="0" algn="r">
               <a:buNone/>
             </a:pPr>
             <a:r>
@@ -14643,7 +14461,7 @@
           <a:bodyPr wrap="square" lIns="0" tIns="0" rIns="0" bIns="0" rtlCol="0" anchor="t"/>
           <a:lstStyle/>
           <a:p>
-            <a:pPr indent="0" marL="0">
+            <a:pPr marL="0" indent="0">
               <a:buNone/>
             </a:pPr>
             <a:r>
@@ -14682,7 +14500,7 @@
           <a:bodyPr wrap="square" lIns="0" tIns="0" rIns="0" bIns="0" rtlCol="0" anchor="ctr"/>
           <a:lstStyle/>
           <a:p>
-            <a:pPr indent="0" marL="0">
+            <a:pPr marL="0" indent="0">
               <a:buNone/>
             </a:pPr>
             <a:r>
@@ -14721,7 +14539,7 @@
           <a:bodyPr wrap="square" lIns="0" tIns="0" rIns="0" bIns="0" rtlCol="0" anchor="t"/>
           <a:lstStyle/>
           <a:p>
-            <a:pPr indent="0" marL="0">
+            <a:pPr marL="0" indent="0">
               <a:buNone/>
             </a:pPr>
             <a:r>
@@ -14785,7 +14603,7 @@
           <a:bodyPr wrap="square" lIns="0" tIns="0" rIns="0" bIns="0" rtlCol="0" anchor="t"/>
           <a:lstStyle/>
           <a:p>
-            <a:pPr indent="0" marL="0">
+            <a:pPr marL="0" indent="0">
               <a:buNone/>
             </a:pPr>
             <a:r>
@@ -14824,7 +14642,7 @@
           <a:bodyPr wrap="square" lIns="0" tIns="0" rIns="0" bIns="0" rtlCol="0" anchor="ctr"/>
           <a:lstStyle/>
           <a:p>
-            <a:pPr indent="0" marL="0">
+            <a:pPr marL="0" indent="0">
               <a:buNone/>
             </a:pPr>
             <a:r>
@@ -14863,7 +14681,7 @@
           <a:bodyPr wrap="square" lIns="0" tIns="0" rIns="0" bIns="0" rtlCol="0" anchor="t"/>
           <a:lstStyle/>
           <a:p>
-            <a:pPr indent="0" marL="0">
+            <a:pPr marL="0" indent="0">
               <a:buNone/>
             </a:pPr>
             <a:r>
@@ -14927,7 +14745,7 @@
           <a:bodyPr wrap="square" lIns="0" tIns="0" rIns="0" bIns="0" rtlCol="0" anchor="t"/>
           <a:lstStyle/>
           <a:p>
-            <a:pPr indent="0" marL="0">
+            <a:pPr marL="0" indent="0">
               <a:buNone/>
             </a:pPr>
             <a:r>
@@ -14966,7 +14784,7 @@
           <a:bodyPr wrap="square" lIns="0" tIns="0" rIns="0" bIns="0" rtlCol="0" anchor="ctr"/>
           <a:lstStyle/>
           <a:p>
-            <a:pPr indent="0" marL="0">
+            <a:pPr marL="0" indent="0">
               <a:buNone/>
             </a:pPr>
             <a:r>
@@ -15005,7 +14823,7 @@
           <a:bodyPr wrap="square" lIns="0" tIns="0" rIns="0" bIns="0" rtlCol="0" anchor="t"/>
           <a:lstStyle/>
           <a:p>
-            <a:pPr indent="0" marL="0">
+            <a:pPr marL="0" indent="0">
               <a:buNone/>
             </a:pPr>
             <a:r>
@@ -15069,7 +14887,7 @@
           <a:bodyPr wrap="square" lIns="0" tIns="0" rIns="0" bIns="0" rtlCol="0" anchor="t"/>
           <a:lstStyle/>
           <a:p>
-            <a:pPr indent="0" marL="0">
+            <a:pPr marL="0" indent="0">
               <a:buNone/>
             </a:pPr>
             <a:r>
@@ -15108,7 +14926,7 @@
           <a:bodyPr wrap="square" lIns="0" tIns="0" rIns="0" bIns="0" rtlCol="0" anchor="ctr"/>
           <a:lstStyle/>
           <a:p>
-            <a:pPr indent="0" marL="0">
+            <a:pPr marL="0" indent="0">
               <a:buNone/>
             </a:pPr>
             <a:r>
@@ -15147,7 +14965,7 @@
           <a:bodyPr wrap="square" lIns="0" tIns="0" rIns="0" bIns="0" rtlCol="0" anchor="t"/>
           <a:lstStyle/>
           <a:p>
-            <a:pPr indent="0" marL="0">
+            <a:pPr marL="0" indent="0">
               <a:buNone/>
             </a:pPr>
             <a:r>
@@ -15181,6 +14999,7 @@
         <a:solidFill>
           <a:srgbClr val="FFFFFF"/>
         </a:solidFill>
+        <a:effectLst/>
       </p:bgPr>
     </p:bg>
     <p:spTree>
@@ -15243,11 +15062,11 @@
           <a:bodyPr wrap="square" lIns="0" tIns="0" rIns="0" bIns="0" rtlCol="0" anchor="ctr"/>
           <a:lstStyle/>
           <a:p>
-            <a:pPr indent="0" marL="0">
-              <a:buNone/>
-            </a:pPr>
-            <a:r>
-              <a:rPr lang="en-US" sz="1000" spc="300" kern="0" dirty="0">
+            <a:pPr marL="0" indent="0">
+              <a:buNone/>
+            </a:pPr>
+            <a:r>
+              <a:rPr lang="en-US" sz="1000" kern="0" spc="300" dirty="0">
                 <a:solidFill>
                   <a:srgbClr val="E8000D"/>
                 </a:solidFill>
@@ -15282,7 +15101,7 @@
           <a:bodyPr wrap="square" lIns="0" tIns="0" rIns="0" bIns="0" rtlCol="0" anchor="t"/>
           <a:lstStyle/>
           <a:p>
-            <a:pPr indent="0" marL="0">
+            <a:pPr marL="0" indent="0">
               <a:buNone/>
             </a:pPr>
             <a:r>
@@ -15325,28 +15144,6 @@
       </p:sp>
       <p:sp>
         <p:nvSpPr>
-          <p:cNvPr id="6" name="Shape 4"/>
-          <p:cNvSpPr/>
-          <p:nvPr/>
-        </p:nvSpPr>
-        <p:spPr>
-          <a:xfrm>
-            <a:off x="11356848" y="6236208"/>
-            <a:ext cx="384048" cy="384048"/>
-          </a:xfrm>
-          <a:prstGeom prst="ellipse">
-            <a:avLst/>
-          </a:prstGeom>
-          <a:ln w="19050">
-            <a:solidFill>
-              <a:srgbClr val="E8000D"/>
-            </a:solidFill>
-            <a:prstDash val="solid"/>
-          </a:ln>
-        </p:spPr>
-      </p:sp>
-      <p:sp>
-        <p:nvSpPr>
           <p:cNvPr id="7" name="Text 5"/>
           <p:cNvSpPr txBox="1"/>
           <p:nvPr/>
@@ -15366,11 +15163,11 @@
           <a:bodyPr wrap="square" lIns="0" tIns="0" rIns="0" bIns="0" rtlCol="0" anchor="ctr"/>
           <a:lstStyle/>
           <a:p>
-            <a:pPr indent="0" marL="0">
-              <a:buNone/>
-            </a:pPr>
-            <a:r>
-              <a:rPr lang="en-US" sz="800" spc="200" kern="0" dirty="0">
+            <a:pPr marL="0" indent="0">
+              <a:buNone/>
+            </a:pPr>
+            <a:r>
+              <a:rPr lang="en-US" sz="800" kern="0" spc="200" dirty="0">
                 <a:solidFill>
                   <a:srgbClr val="444444"/>
                 </a:solidFill>
@@ -15405,7 +15202,7 @@
           <a:bodyPr wrap="square" lIns="0" tIns="0" rIns="0" bIns="0" rtlCol="0" anchor="ctr"/>
           <a:lstStyle/>
           <a:p>
-            <a:pPr algn="r" indent="0" marL="0">
+            <a:pPr marL="0" indent="0" algn="r">
               <a:buNone/>
             </a:pPr>
             <a:r>
@@ -15425,7 +15222,7 @@
       </p:sp>
       <p:graphicFrame>
         <p:nvGraphicFramePr>
-          <p:cNvPr id="9" name="Chart 0" descr=""/>
+          <p:cNvPr id="9" name="Chart 0"/>
           <p:cNvGraphicFramePr/>
           <p:nvPr/>
         </p:nvGraphicFramePr>
@@ -15433,9 +15230,9 @@
           <a:off x="731520" y="1737360"/>
           <a:ext cx="7074408" cy="4389120"/>
         </p:xfrm>
-        <a:graphic xmlns:a="http://schemas.openxmlformats.org/drawingml/2006/main">
+        <a:graphic>
           <a:graphicData uri="http://schemas.openxmlformats.org/drawingml/2006/chart">
-            <c:chart xmlns:c="http://schemas.openxmlformats.org/drawingml/2006/chart" r:id="rId1"/>
+            <c:chart xmlns:c="http://schemas.openxmlformats.org/drawingml/2006/chart" xmlns:r="http://schemas.openxmlformats.org/officeDocument/2006/relationships" r:id="rId3"/>
           </a:graphicData>
         </a:graphic>
       </p:graphicFrame>
@@ -15460,7 +15257,7 @@
           <a:bodyPr wrap="square" lIns="0" tIns="0" rIns="0" bIns="0" rtlCol="0" anchor="b"/>
           <a:lstStyle/>
           <a:p>
-            <a:pPr indent="0" marL="0">
+            <a:pPr marL="0" indent="0">
               <a:buNone/>
             </a:pPr>
             <a:r>
@@ -15499,7 +15296,7 @@
           <a:bodyPr wrap="square" lIns="0" tIns="0" rIns="0" bIns="0" rtlCol="0" anchor="t"/>
           <a:lstStyle/>
           <a:p>
-            <a:pPr indent="0" marL="0">
+            <a:pPr marL="0" indent="0">
               <a:buNone/>
             </a:pPr>
             <a:r>
@@ -15538,7 +15335,7 @@
           <a:bodyPr wrap="square" lIns="0" tIns="0" rIns="0" bIns="0" rtlCol="0" anchor="b"/>
           <a:lstStyle/>
           <a:p>
-            <a:pPr indent="0" marL="0">
+            <a:pPr marL="0" indent="0">
               <a:buNone/>
             </a:pPr>
             <a:r>
@@ -15577,7 +15374,7 @@
           <a:bodyPr wrap="square" lIns="0" tIns="0" rIns="0" bIns="0" rtlCol="0" anchor="t"/>
           <a:lstStyle/>
           <a:p>
-            <a:pPr indent="0" marL="0">
+            <a:pPr marL="0" indent="0">
               <a:buNone/>
             </a:pPr>
             <a:r>
@@ -15616,7 +15413,7 @@
           <a:bodyPr wrap="square" lIns="0" tIns="0" rIns="0" bIns="0" rtlCol="0" anchor="b"/>
           <a:lstStyle/>
           <a:p>
-            <a:pPr indent="0" marL="0">
+            <a:pPr marL="0" indent="0">
               <a:buNone/>
             </a:pPr>
             <a:r>
@@ -15655,7 +15452,7 @@
           <a:bodyPr wrap="square" lIns="0" tIns="0" rIns="0" bIns="0" rtlCol="0" anchor="t"/>
           <a:lstStyle/>
           <a:p>
-            <a:pPr indent="0" marL="0">
+            <a:pPr marL="0" indent="0">
               <a:buNone/>
             </a:pPr>
             <a:r>
@@ -15974,4 +15771,299 @@
     </a:ext>
   </a:extLst>
 </a:theme>
+</file>
+
+<file path=ppt/theme/theme2.xml><?xml version="1.0" encoding="utf-8"?>
+<a:theme xmlns:a="http://schemas.openxmlformats.org/drawingml/2006/main" name="Тема Office">
+  <a:themeElements>
+    <a:clrScheme name="Стандартная">
+      <a:dk1>
+        <a:sysClr val="windowText" lastClr="000000"/>
+      </a:dk1>
+      <a:lt1>
+        <a:sysClr val="window" lastClr="FFFFFF"/>
+      </a:lt1>
+      <a:dk2>
+        <a:srgbClr val="44546A"/>
+      </a:dk2>
+      <a:lt2>
+        <a:srgbClr val="E7E6E6"/>
+      </a:lt2>
+      <a:accent1>
+        <a:srgbClr val="4472C4"/>
+      </a:accent1>
+      <a:accent2>
+        <a:srgbClr val="ED7D31"/>
+      </a:accent2>
+      <a:accent3>
+        <a:srgbClr val="A5A5A5"/>
+      </a:accent3>
+      <a:accent4>
+        <a:srgbClr val="FFC000"/>
+      </a:accent4>
+      <a:accent5>
+        <a:srgbClr val="5B9BD5"/>
+      </a:accent5>
+      <a:accent6>
+        <a:srgbClr val="70AD47"/>
+      </a:accent6>
+      <a:hlink>
+        <a:srgbClr val="0563C1"/>
+      </a:hlink>
+      <a:folHlink>
+        <a:srgbClr val="954F72"/>
+      </a:folHlink>
+    </a:clrScheme>
+    <a:fontScheme name="Стандартная">
+      <a:majorFont>
+        <a:latin typeface="Calibri Light" panose="020F0302020204030204"/>
+        <a:ea typeface=""/>
+        <a:cs typeface=""/>
+        <a:font script="Jpan" typeface="游ゴシック Light"/>
+        <a:font script="Hang" typeface="맑은 고딕"/>
+        <a:font script="Hans" typeface="等线 Light"/>
+        <a:font script="Hant" typeface="新細明體"/>
+        <a:font script="Arab" typeface="Times New Roman"/>
+        <a:font script="Hebr" typeface="Times New Roman"/>
+        <a:font script="Thai" typeface="Angsana New"/>
+        <a:font script="Ethi" typeface="Nyala"/>
+        <a:font script="Beng" typeface="Vrinda"/>
+        <a:font script="Gujr" typeface="Shruti"/>
+        <a:font script="Khmr" typeface="MoolBoran"/>
+        <a:font script="Knda" typeface="Tunga"/>
+        <a:font script="Guru" typeface="Raavi"/>
+        <a:font script="Cans" typeface="Euphemia"/>
+        <a:font script="Cher" typeface="Plantagenet Cherokee"/>
+        <a:font script="Yiii" typeface="Microsoft Yi Baiti"/>
+        <a:font script="Tibt" typeface="Microsoft Himalaya"/>
+        <a:font script="Thaa" typeface="MV Boli"/>
+        <a:font script="Deva" typeface="Mangal"/>
+        <a:font script="Telu" typeface="Gautami"/>
+        <a:font script="Taml" typeface="Latha"/>
+        <a:font script="Syrc" typeface="Estrangelo Edessa"/>
+        <a:font script="Orya" typeface="Kalinga"/>
+        <a:font script="Mlym" typeface="Kartika"/>
+        <a:font script="Laoo" typeface="DokChampa"/>
+        <a:font script="Sinh" typeface="Iskoola Pota"/>
+        <a:font script="Mong" typeface="Mongolian Baiti"/>
+        <a:font script="Viet" typeface="Times New Roman"/>
+        <a:font script="Uigh" typeface="Microsoft Uighur"/>
+        <a:font script="Geor" typeface="Sylfaen"/>
+        <a:font script="Armn" typeface="Arial"/>
+        <a:font script="Bugi" typeface="Leelawadee UI"/>
+        <a:font script="Bopo" typeface="Microsoft JhengHei"/>
+        <a:font script="Java" typeface="Javanese Text"/>
+        <a:font script="Lisu" typeface="Segoe UI"/>
+        <a:font script="Mymr" typeface="Myanmar Text"/>
+        <a:font script="Nkoo" typeface="Ebrima"/>
+        <a:font script="Olck" typeface="Nirmala UI"/>
+        <a:font script="Osma" typeface="Ebrima"/>
+        <a:font script="Phag" typeface="Phagspa"/>
+        <a:font script="Syrn" typeface="Estrangelo Edessa"/>
+        <a:font script="Syrj" typeface="Estrangelo Edessa"/>
+        <a:font script="Syre" typeface="Estrangelo Edessa"/>
+        <a:font script="Sora" typeface="Nirmala UI"/>
+        <a:font script="Tale" typeface="Microsoft Tai Le"/>
+        <a:font script="Talu" typeface="Microsoft New Tai Lue"/>
+        <a:font script="Tfng" typeface="Ebrima"/>
+      </a:majorFont>
+      <a:minorFont>
+        <a:latin typeface="Calibri" panose="020F0502020204030204"/>
+        <a:ea typeface=""/>
+        <a:cs typeface=""/>
+        <a:font script="Jpan" typeface="游ゴシック"/>
+        <a:font script="Hang" typeface="맑은 고딕"/>
+        <a:font script="Hans" typeface="等线"/>
+        <a:font script="Hant" typeface="新細明體"/>
+        <a:font script="Arab" typeface="Arial"/>
+        <a:font script="Hebr" typeface="Arial"/>
+        <a:font script="Thai" typeface="Cordia New"/>
+        <a:font script="Ethi" typeface="Nyala"/>
+        <a:font script="Beng" typeface="Vrinda"/>
+        <a:font script="Gujr" typeface="Shruti"/>
+        <a:font script="Khmr" typeface="DaunPenh"/>
+        <a:font script="Knda" typeface="Tunga"/>
+        <a:font script="Guru" typeface="Raavi"/>
+        <a:font script="Cans" typeface="Euphemia"/>
+        <a:font script="Cher" typeface="Plantagenet Cherokee"/>
+        <a:font script="Yiii" typeface="Microsoft Yi Baiti"/>
+        <a:font script="Tibt" typeface="Microsoft Himalaya"/>
+        <a:font script="Thaa" typeface="MV Boli"/>
+        <a:font script="Deva" typeface="Mangal"/>
+        <a:font script="Telu" typeface="Gautami"/>
+        <a:font script="Taml" typeface="Latha"/>
+        <a:font script="Syrc" typeface="Estrangelo Edessa"/>
+        <a:font script="Orya" typeface="Kalinga"/>
+        <a:font script="Mlym" typeface="Kartika"/>
+        <a:font script="Laoo" typeface="DokChampa"/>
+        <a:font script="Sinh" typeface="Iskoola Pota"/>
+        <a:font script="Mong" typeface="Mongolian Baiti"/>
+        <a:font script="Viet" typeface="Arial"/>
+        <a:font script="Uigh" typeface="Microsoft Uighur"/>
+        <a:font script="Geor" typeface="Sylfaen"/>
+        <a:font script="Armn" typeface="Arial"/>
+        <a:font script="Bugi" typeface="Leelawadee UI"/>
+        <a:font script="Bopo" typeface="Microsoft JhengHei"/>
+        <a:font script="Java" typeface="Javanese Text"/>
+        <a:font script="Lisu" typeface="Segoe UI"/>
+        <a:font script="Mymr" typeface="Myanmar Text"/>
+        <a:font script="Nkoo" typeface="Ebrima"/>
+        <a:font script="Olck" typeface="Nirmala UI"/>
+        <a:font script="Osma" typeface="Ebrima"/>
+        <a:font script="Phag" typeface="Phagspa"/>
+        <a:font script="Syrn" typeface="Estrangelo Edessa"/>
+        <a:font script="Syrj" typeface="Estrangelo Edessa"/>
+        <a:font script="Syre" typeface="Estrangelo Edessa"/>
+        <a:font script="Sora" typeface="Nirmala UI"/>
+        <a:font script="Tale" typeface="Microsoft Tai Le"/>
+        <a:font script="Talu" typeface="Microsoft New Tai Lue"/>
+        <a:font script="Tfng" typeface="Ebrima"/>
+      </a:minorFont>
+    </a:fontScheme>
+    <a:fmtScheme name="Стандартная">
+      <a:fillStyleLst>
+        <a:solidFill>
+          <a:schemeClr val="phClr"/>
+        </a:solidFill>
+        <a:gradFill rotWithShape="1">
+          <a:gsLst>
+            <a:gs pos="0">
+              <a:schemeClr val="phClr">
+                <a:lumMod val="110000"/>
+                <a:satMod val="105000"/>
+                <a:tint val="67000"/>
+              </a:schemeClr>
+            </a:gs>
+            <a:gs pos="50000">
+              <a:schemeClr val="phClr">
+                <a:lumMod val="105000"/>
+                <a:satMod val="103000"/>
+                <a:tint val="73000"/>
+              </a:schemeClr>
+            </a:gs>
+            <a:gs pos="100000">
+              <a:schemeClr val="phClr">
+                <a:lumMod val="105000"/>
+                <a:satMod val="109000"/>
+                <a:tint val="81000"/>
+              </a:schemeClr>
+            </a:gs>
+          </a:gsLst>
+          <a:lin ang="5400000" scaled="0"/>
+        </a:gradFill>
+        <a:gradFill rotWithShape="1">
+          <a:gsLst>
+            <a:gs pos="0">
+              <a:schemeClr val="phClr">
+                <a:satMod val="103000"/>
+                <a:lumMod val="102000"/>
+                <a:tint val="94000"/>
+              </a:schemeClr>
+            </a:gs>
+            <a:gs pos="50000">
+              <a:schemeClr val="phClr">
+                <a:satMod val="110000"/>
+                <a:lumMod val="100000"/>
+                <a:shade val="100000"/>
+              </a:schemeClr>
+            </a:gs>
+            <a:gs pos="100000">
+              <a:schemeClr val="phClr">
+                <a:lumMod val="99000"/>
+                <a:satMod val="120000"/>
+                <a:shade val="78000"/>
+              </a:schemeClr>
+            </a:gs>
+          </a:gsLst>
+          <a:lin ang="5400000" scaled="0"/>
+        </a:gradFill>
+      </a:fillStyleLst>
+      <a:lnStyleLst>
+        <a:ln w="6350" cap="flat" cmpd="sng" algn="ctr">
+          <a:solidFill>
+            <a:schemeClr val="phClr"/>
+          </a:solidFill>
+          <a:prstDash val="solid"/>
+          <a:miter lim="800000"/>
+        </a:ln>
+        <a:ln w="12700" cap="flat" cmpd="sng" algn="ctr">
+          <a:solidFill>
+            <a:schemeClr val="phClr"/>
+          </a:solidFill>
+          <a:prstDash val="solid"/>
+          <a:miter lim="800000"/>
+        </a:ln>
+        <a:ln w="19050" cap="flat" cmpd="sng" algn="ctr">
+          <a:solidFill>
+            <a:schemeClr val="phClr"/>
+          </a:solidFill>
+          <a:prstDash val="solid"/>
+          <a:miter lim="800000"/>
+        </a:ln>
+      </a:lnStyleLst>
+      <a:effectStyleLst>
+        <a:effectStyle>
+          <a:effectLst/>
+        </a:effectStyle>
+        <a:effectStyle>
+          <a:effectLst/>
+        </a:effectStyle>
+        <a:effectStyle>
+          <a:effectLst>
+            <a:outerShdw blurRad="57150" dist="19050" dir="5400000" algn="ctr" rotWithShape="0">
+              <a:srgbClr val="000000">
+                <a:alpha val="63000"/>
+              </a:srgbClr>
+            </a:outerShdw>
+          </a:effectLst>
+        </a:effectStyle>
+      </a:effectStyleLst>
+      <a:bgFillStyleLst>
+        <a:solidFill>
+          <a:schemeClr val="phClr"/>
+        </a:solidFill>
+        <a:solidFill>
+          <a:schemeClr val="phClr">
+            <a:tint val="95000"/>
+            <a:satMod val="170000"/>
+          </a:schemeClr>
+        </a:solidFill>
+        <a:gradFill rotWithShape="1">
+          <a:gsLst>
+            <a:gs pos="0">
+              <a:schemeClr val="phClr">
+                <a:tint val="93000"/>
+                <a:satMod val="150000"/>
+                <a:shade val="98000"/>
+                <a:lumMod val="102000"/>
+              </a:schemeClr>
+            </a:gs>
+            <a:gs pos="50000">
+              <a:schemeClr val="phClr">
+                <a:tint val="98000"/>
+                <a:satMod val="130000"/>
+                <a:shade val="90000"/>
+                <a:lumMod val="103000"/>
+              </a:schemeClr>
+            </a:gs>
+            <a:gs pos="100000">
+              <a:schemeClr val="phClr">
+                <a:shade val="63000"/>
+                <a:satMod val="120000"/>
+              </a:schemeClr>
+            </a:gs>
+          </a:gsLst>
+          <a:lin ang="5400000" scaled="0"/>
+        </a:gradFill>
+      </a:bgFillStyleLst>
+    </a:fmtScheme>
+  </a:themeElements>
+  <a:objectDefaults/>
+  <a:extraClrSchemeLst/>
+  <a:extLst>
+    <a:ext uri="{05A4C25C-085E-4340-85A3-A5531E510DB2}">
+      <thm15:themeFamily xmlns:thm15="http://schemas.microsoft.com/office/thememl/2012/main" name="Office Theme" id="{62F939B6-93AF-4DB8-9C6B-D6C7DFDC589F}" vid="{4A3C46E8-61CC-4603-A589-7422A47A8E4A}"/>
+    </a:ext>
+  </a:extLst>
+</a:theme>
 </file>
--- a/report/presentation.pptx
+++ b/report/presentation.pptx
@@ -1276,7 +1276,7 @@
           <a:p>
             <a:r>
               <a:rPr lang="en-US" dirty="0"/>
-              <a:t>Говорит Aseke. Представиться, назвать тему. Одна фраза-крючок: по сегодняшним ценам хранить новые данные секвенирования 10 лет уже стоит примерно столько же, сколько их получить. Дальше покажем, откуда эта цифра и что её сдвигает.</a:t>
+              <a:t>Говорит Asulkhan. Представиться, назвать тему. Одна фраза-крючок: по сегодняшним ценам хранить новые данные секвенирования 10 лет уже стоит примерно столько же, сколько их получить. Дальше покажем, откуда эта цифра и что её сдвигает.</a:t>
             </a:r>
           </a:p>
         </p:txBody>
@@ -1798,7 +1798,7 @@
           <a:p>
             <a:r>
               <a:rPr lang="en-US" dirty="0"/>
-              <a:t>Оба. Ravil зачитывает выводы 1–4, Aseke — итог и ограничения. Итог: для сегодняшней SRA по прайсу облака пересечение фактически уже наступило; все измеренные меры вместе дают около десяти лет — до 2035; если секвенирование будет дешеветь медленно, пересечения нет до 2060. Ограничения честно: один организм, только гаплоидные SNP, повторное использование через цитирования, прайс-цены и данные NHGRI до 2022. Спасибо, готовы ответить на вопросы.</a:t>
+              <a:t>Оба. Ravil зачитывает выводы 1–4, Asulkhan — итог и ограничения. Итог: для сегодняшней SRA по прайсу облака пересечение фактически уже наступило; все измеренные меры вместе дают около десяти лет — до 2035; если секвенирование будет дешеветь медленно, пересечения нет до 2060. Ограничения честно: один организм, только гаплоидные SNP, повторное использование через цитирования, прайс-цены и данные NHGRI до 2022. Спасибо, готовы ответить на вопросы.</a:t>
             </a:r>
           </a:p>
         </p:txBody>
@@ -1885,7 +1885,7 @@
           <a:p>
             <a:r>
               <a:rPr lang="en-US" dirty="0"/>
-              <a:t>Aseke. Начинаем с результата. Мы сравниваем две цены одного мегабазного объёма: сколько стоит его отсеквенировать и сколько стоит хранить 10 лет. Для SRA в её нынешнем формате, с тремя копиями INSDC и по прайсу облака, хранение уже стоит примерно как секвенирование — медиана пересечения 2023 год. Все измеренные нами меры вместе сдвигают дату к 2035. Но сильнее всего дату двигает то, как быстро будет дешеветь само секвенирование: если темп 2015–2022 сохранится, при всех мерах пересечения не будет до 2060.</a:t>
+              <a:t>Asulkhan. Начинаем с результата. Мы сравниваем две цены одного мегабазного объёма: сколько стоит его отсеквенировать и сколько стоит хранить 10 лет. Для SRA в её нынешнем формате, с тремя копиями INSDC и по прайсу облака, хранение уже стоит примерно как секвенирование — медиана пересечения 2023 год. Все измеренные нами меры вместе сдвигают дату к 2035. Но сильнее всего дату двигает то, как быстро будет дешеветь само секвенирование: если темп 2015–2022 сохранится, при всех мерах пересечения не будет до 2060.</a:t>
             </a:r>
           </a:p>
         </p:txBody>
@@ -1972,7 +1972,7 @@
           <a:p>
             <a:r>
               <a:rPr lang="en-US" dirty="0"/>
-              <a:t>Aseke. Как устроена модель. Слева — стоимость секвенирования мегабазы по данным NHGRI. Есть два честных прочтения тренда: весь период NGS (минус 37% в год) и последние годы после плато NovaSeq (минус 20% в год). Справа — стоимость хранения: сколько байт занимает одно основание, умножить на число копий и на сумму цены за 120 месяцев. Цена стартует с сегодняшних 2,3 цента за ГБ в месяц у AWS и падает со скоростью дешевения дисков — минус 12,6% в год. Пересечение — первый год, когда хранение не дешевле секвенирования. Мы считаем на мегабазу, потому что прогноз объёма архива ненадёжен — это следующий слайд.</a:t>
+              <a:t>Asulkhan. Как устроена модель. Слева — стоимость секвенирования мегабазы по данным NHGRI. Есть два честных прочтения тренда: весь период NGS (минус 37% в год) и последние годы после плато NovaSeq (минус 20% в год). Справа — стоимость хранения: сколько байт занимает одно основание, умножить на число копий и на сумму цены за 120 месяцев. Цена стартует с сегодняшних 2,3 цента за ГБ в месяц у AWS и падает со скоростью дешевения дисков — минус 12,6% в год. Пересечение — первый год, когда хранение не дешевле секвенирования. Мы считаем на мегабазу, потому что прогноз объёма архива ненадёжен — это следующий слайд.</a:t>
             </a:r>
           </a:p>
         </p:txBody>
@@ -2059,7 +2059,7 @@
           <a:p>
             <a:r>
               <a:rPr lang="en-US" dirty="0"/>
-              <a:t>Aseke. Задача 1: что хранится на каждом этапе. Все числа на графике мы измерили сами (части B): сырой сигнал Nanopore — 11,5 байта на основание, FASTQ.gz — полбайта, формат SRA — 0,34, CRAM — 0,09. Для 30x генома человека это от терабайта сигнала до 8 ГБ CRAM. Невосполним только образец. Риды нужно хранить — с них начинается любой новый анализ. Всё, что после ридов, пересчитывается. Сигнал стоит хранить только пока он может улучшить риды.</a:t>
+              <a:t>Asulkhan. Задача 1: что хранится на каждом этапе. Все числа на графике мы измерили сами (части B): сырой сигнал Nanopore — 11,5 байта на основание, FASTQ.gz — полбайта, формат SRA — 0,34, CRAM — 0,09. Для 30x генома человека это от терабайта сигнала до 8 ГБ CRAM. Невосполним только образец. Риды нужно хранить — с них начинается любой новый анализ. Всё, что после ридов, пересчитывается. Сигнал стоит хранить только пока он может улучшить риды.</a:t>
             </a:r>
           </a:p>
         </p:txBody>
@@ -2146,7 +2146,7 @@
           <a:p>
             <a:r>
               <a:rPr lang="en-US" dirty="0"/>
-              <a:t>Aseke. Задача 2. Данные — собственная статистика NCBI по SRA и release notes GenBank. Рост SRA замедляется: в 2009–2012 архив рос в 4–5 раз за год, сейчас в 1,2 раза; годовой приток почти постоянный, 12–15 петабаз. Мы подогнали три формы: экспоненту, линейную и логистическую, и проверили каждую на отложенных последних 5 годах. Каждая где-то ошиблась в 2–6 раз, а прогнозы на 2045 расходятся в 7000 раз. Поэтому объём архива мы не прогнозируем, а считаем пересечение на одну мегабазу. Квадратичную форму отбросили: она разворачивается вниз, то есть предсказывает уменьшение архива.</a:t>
+              <a:t>Asulkhan. Задача 2. Данные — собственная статистика NCBI по SRA и release notes GenBank. Рост SRA замедляется: в 2009–2012 архив рос в 4–5 раз за год, сейчас в 1,2 раза; годовой приток почти постоянный, 12–15 петабаз. Мы подогнали три формы: экспоненту, линейную и логистическую, и проверили каждую на отложенных последних 5 годах. Каждая где-то ошиблась в 2–6 раз, а прогнозы на 2045 расходятся в 7000 раз. Поэтому объём архива мы не прогнозируем, а считаем пересечение на одну мегабазу. Квадратичную форму отбросили: она разворачивается вниз, то есть предсказывает уменьшение архива.</a:t>
             </a:r>
           </a:p>
         </p:txBody>
@@ -2233,7 +2233,7 @@
           <a:p>
             <a:r>
               <a:rPr lang="en-US" dirty="0"/>
-              <a:t>Aseke. Задача 3. Таблица 15 приборов из спецификаций производителей: мощность Illumina выросла в 24 тысячи раз с 2006 по 2023, удвоение каждые 1,2 года. PromethION по объёму уже обгоняет NovaSeq 6000, но с другой моделью ошибок. По ENA 90–96% публичных запусков — Illumina, длинные риды растут. Если разделить годовой приток SRA на мощность одного флагмана, получится всего 5–12 приборов, работающих круглый год. Значит, в публичный архив попадает малая доля мировых данных — клинические и коммерческие данные туда не идут.</a:t>
+              <a:t>Asulkhan. Задача 3. Таблица 15 приборов из спецификаций производителей: мощность Illumina выросла в 24 тысячи раз с 2006 по 2023, удвоение каждые 1,2 года. PromethION по объёму уже обгоняет NovaSeq 6000, но с другой моделью ошибок. По ENA 90–96% публичных запусков — Illumina, длинные риды растут. Если разделить годовой приток SRA на мощность одного флагмана, получится всего 5–12 приборов, работающих круглый год. Значит, в публичный архив попадает малая доля мировых данных — клинические и коммерческие данные туда не идут.</a:t>
             </a:r>
           </a:p>
         </p:txBody>
@@ -2320,7 +2320,7 @@
           <a:p>
             <a:r>
               <a:rPr lang="en-US" dirty="0"/>
-              <a:t>Aseke. Главный график. Слева — отношение стоимости хранения к стоимости секвенирования мегабазы; выше единицы хранить дороже. Справа — год пересечения с 90%-интервалом для каждого способа хранения. Внизу — как каждая мера сдвигает медиану: Spring — до 2027, огрубление quality — 2029, тиринг — 2035. Чёрные отрезки — оба тренда вместе; оранжевые — если вернётся темп 2008–2022; зелёные — если сохранится темп 2015–2022, тогда при всех мерах пересечения нет до 2060. Дальше Ravil покажет, откуда эти меры и сколько они реально стоят.</a:t>
+              <a:t>Asulkhan. Главный график. Слева — отношение стоимости хранения к стоимости секвенирования мегабазы; выше единицы хранить дороже. Справа — год пересечения с 90%-интервалом для каждого способа хранения. Внизу — как каждая мера сдвигает медиану: Spring — до 2027, огрубление quality — 2029, тиринг — 2035. Чёрные отрезки — оба тренда вместе; оранжевые — если вернётся темп 2008–2022; зелёные — если сохранится темп 2015–2022, тогда при всех мерах пересечения нет до 2060. Дальше Ravil покажет, откуда эти меры и сколько они реально стоят.</a:t>
             </a:r>
           </a:p>
         </p:txBody>
@@ -3093,7 +3093,7 @@
                 <a:ea typeface="Arial" pitchFamily="34" charset="-122"/>
                 <a:cs typeface="Arial" pitchFamily="34" charset="-120"/>
               </a:rPr>
-              <a:t>Aseke · Ravil</a:t>
+              <a:t>Asulkhan · Ravil</a:t>
             </a:r>
             <a:endParaRPr lang="en-US" sz="1600" dirty="0"/>
           </a:p>

--- a/report/presentation.pptx
+++ b/report/presentation.pptx
@@ -3132,7 +3132,7 @@
                 <a:ea typeface="Space Mono" pitchFamily="34" charset="-122"/>
                 <a:cs typeface="Space Mono" pitchFamily="34" charset="-120"/>
               </a:rPr>
-              <a:t>REAL PUBLIC DATA · SNAKEMAKE · 2026</a:t>
+              <a:t>GITHUB.COM/ASEKE4867/BIOSTORAGEAPOC</a:t>
             </a:r>
             <a:endParaRPr lang="en-US" sz="900" dirty="0"/>
           </a:p>
